--- a/presentation/260916_AI활용_업무지침네비게이터_6차 수정.pptx
+++ b/presentation/260916_AI활용_업무지침네비게이터_6차 수정.pptx
@@ -687,7 +687,7 @@
           <a:p>
             <a:fld id="{6AC0F0B2-DC44-4D7F-B9BC-23EB46679998}" type="datetimeFigureOut">
               <a:rPr lang="ko-KR" altLang="en-US" smtClean="0"/>
-              <a:t>2026-09-12</a:t>
+              <a:t>2026-09-13</a:t>
             </a:fld>
             <a:endParaRPr lang="ko-KR" altLang="en-US"/>
           </a:p>
@@ -857,7 +857,7 @@
           <a:p>
             <a:fld id="{6AC0F0B2-DC44-4D7F-B9BC-23EB46679998}" type="datetimeFigureOut">
               <a:rPr lang="ko-KR" altLang="en-US" smtClean="0"/>
-              <a:t>2026-09-12</a:t>
+              <a:t>2026-09-13</a:t>
             </a:fld>
             <a:endParaRPr lang="ko-KR" altLang="en-US"/>
           </a:p>
@@ -1037,7 +1037,7 @@
           <a:p>
             <a:fld id="{6AC0F0B2-DC44-4D7F-B9BC-23EB46679998}" type="datetimeFigureOut">
               <a:rPr lang="ko-KR" altLang="en-US" smtClean="0"/>
-              <a:t>2026-09-12</a:t>
+              <a:t>2026-09-13</a:t>
             </a:fld>
             <a:endParaRPr lang="ko-KR" altLang="en-US"/>
           </a:p>
@@ -1207,7 +1207,7 @@
           <a:p>
             <a:fld id="{6AC0F0B2-DC44-4D7F-B9BC-23EB46679998}" type="datetimeFigureOut">
               <a:rPr lang="ko-KR" altLang="en-US" smtClean="0"/>
-              <a:t>2026-09-12</a:t>
+              <a:t>2026-09-13</a:t>
             </a:fld>
             <a:endParaRPr lang="ko-KR" altLang="en-US"/>
           </a:p>
@@ -1451,7 +1451,7 @@
           <a:p>
             <a:fld id="{6AC0F0B2-DC44-4D7F-B9BC-23EB46679998}" type="datetimeFigureOut">
               <a:rPr lang="ko-KR" altLang="en-US" smtClean="0"/>
-              <a:t>2026-09-12</a:t>
+              <a:t>2026-09-13</a:t>
             </a:fld>
             <a:endParaRPr lang="ko-KR" altLang="en-US"/>
           </a:p>
@@ -1683,7 +1683,7 @@
           <a:p>
             <a:fld id="{6AC0F0B2-DC44-4D7F-B9BC-23EB46679998}" type="datetimeFigureOut">
               <a:rPr lang="ko-KR" altLang="en-US" smtClean="0"/>
-              <a:t>2026-09-12</a:t>
+              <a:t>2026-09-13</a:t>
             </a:fld>
             <a:endParaRPr lang="ko-KR" altLang="en-US"/>
           </a:p>
@@ -2050,7 +2050,7 @@
           <a:p>
             <a:fld id="{6AC0F0B2-DC44-4D7F-B9BC-23EB46679998}" type="datetimeFigureOut">
               <a:rPr lang="ko-KR" altLang="en-US" smtClean="0"/>
-              <a:t>2026-09-12</a:t>
+              <a:t>2026-09-13</a:t>
             </a:fld>
             <a:endParaRPr lang="ko-KR" altLang="en-US"/>
           </a:p>
@@ -2168,7 +2168,7 @@
           <a:p>
             <a:fld id="{6AC0F0B2-DC44-4D7F-B9BC-23EB46679998}" type="datetimeFigureOut">
               <a:rPr lang="ko-KR" altLang="en-US" smtClean="0"/>
-              <a:t>2026-09-12</a:t>
+              <a:t>2026-09-13</a:t>
             </a:fld>
             <a:endParaRPr lang="ko-KR" altLang="en-US"/>
           </a:p>
@@ -2263,7 +2263,7 @@
           <a:p>
             <a:fld id="{6AC0F0B2-DC44-4D7F-B9BC-23EB46679998}" type="datetimeFigureOut">
               <a:rPr lang="ko-KR" altLang="en-US" smtClean="0"/>
-              <a:t>2026-09-12</a:t>
+              <a:t>2026-09-13</a:t>
             </a:fld>
             <a:endParaRPr lang="ko-KR" altLang="en-US"/>
           </a:p>
@@ -2540,7 +2540,7 @@
           <a:p>
             <a:fld id="{6AC0F0B2-DC44-4D7F-B9BC-23EB46679998}" type="datetimeFigureOut">
               <a:rPr lang="ko-KR" altLang="en-US" smtClean="0"/>
-              <a:t>2026-09-12</a:t>
+              <a:t>2026-09-13</a:t>
             </a:fld>
             <a:endParaRPr lang="ko-KR" altLang="en-US"/>
           </a:p>
@@ -2797,7 +2797,7 @@
           <a:p>
             <a:fld id="{6AC0F0B2-DC44-4D7F-B9BC-23EB46679998}" type="datetimeFigureOut">
               <a:rPr lang="ko-KR" altLang="en-US" smtClean="0"/>
-              <a:t>2026-09-12</a:t>
+              <a:t>2026-09-13</a:t>
             </a:fld>
             <a:endParaRPr lang="ko-KR" altLang="en-US"/>
           </a:p>
@@ -3010,7 +3010,7 @@
           <a:p>
             <a:fld id="{6AC0F0B2-DC44-4D7F-B9BC-23EB46679998}" type="datetimeFigureOut">
               <a:rPr lang="ko-KR" altLang="en-US" smtClean="0"/>
-              <a:t>2026-09-12</a:t>
+              <a:t>2026-09-13</a:t>
             </a:fld>
             <a:endParaRPr lang="ko-KR" altLang="en-US"/>
           </a:p>
@@ -16343,53 +16343,6 @@
       </p:grpSpPr>
       <p:sp>
         <p:nvSpPr>
-          <p:cNvPr id="86" name="사각형: 둥근 모서리 85">
-            <a:extLst>
-              <a:ext uri="{FF2B5EF4-FFF2-40B4-BE49-F238E27FC236}">
-                <a16:creationId xmlns:a16="http://schemas.microsoft.com/office/drawing/2014/main" id="{F3C05E7C-CB4F-4E36-B2BF-94B965EB8077}"/>
-              </a:ext>
-            </a:extLst>
-          </p:cNvPr>
-          <p:cNvSpPr>
-            <a:spLocks noGrp="1"/>
-          </p:cNvSpPr>
-          <p:nvPr/>
-        </p:nvSpPr>
-        <p:spPr>
-          <a:xfrm>
-            <a:off x="417123" y="4295784"/>
-            <a:ext cx="9159954" cy="1483130"/>
-          </a:xfrm>
-          <a:prstGeom prst="roundRect">
-            <a:avLst>
-              <a:gd name="adj" fmla="val 5139"/>
-            </a:avLst>
-          </a:prstGeom>
-          <a:solidFill>
-            <a:schemeClr val="bg1"/>
-          </a:solidFill>
-          <a:ln>
-            <a:noFill/>
-          </a:ln>
-          <a:effectLst>
-            <a:outerShdw blurRad="228600" dist="50800" dir="5400000" rotWithShape="0">
-              <a:srgbClr val="1B2A4A">
-                <a:alpha val="22000"/>
-              </a:srgbClr>
-            </a:outerShdw>
-          </a:effectLst>
-        </p:spPr>
-        <p:txBody>
-          <a:bodyPr anchor="ctr" anchorCtr="0"/>
-          <a:lstStyle/>
-          <a:p>
-            <a:pPr algn="ctr"/>
-            <a:endParaRPr lang="ko-KR" altLang="en-US" sz="1400" b="1"/>
-          </a:p>
-        </p:txBody>
-      </p:sp>
-      <p:sp>
-        <p:nvSpPr>
           <p:cNvPr id="4" name="TextBox 3">
             <a:extLst>
               <a:ext uri="{FF2B5EF4-FFF2-40B4-BE49-F238E27FC236}">
@@ -16535,10 +16488,57 @@
       </p:sp>
       <p:sp>
         <p:nvSpPr>
-          <p:cNvPr id="40" name="사각형: 둥근 모서리 39">
-            <a:extLst>
-              <a:ext uri="{FF2B5EF4-FFF2-40B4-BE49-F238E27FC236}">
-                <a16:creationId xmlns:a16="http://schemas.microsoft.com/office/drawing/2014/main" id="{45981C6C-8822-4233-9480-4913D845F441}"/>
+          <p:cNvPr id="51" name="사각형: 둥근 모서리 50">
+            <a:extLst>
+              <a:ext uri="{FF2B5EF4-FFF2-40B4-BE49-F238E27FC236}">
+                <a16:creationId xmlns:a16="http://schemas.microsoft.com/office/drawing/2014/main" id="{FCC28CB5-907B-4120-880F-3660FB678EFB}"/>
+              </a:ext>
+            </a:extLst>
+          </p:cNvPr>
+          <p:cNvSpPr>
+            <a:spLocks noGrp="1"/>
+          </p:cNvSpPr>
+          <p:nvPr/>
+        </p:nvSpPr>
+        <p:spPr>
+          <a:xfrm>
+            <a:off x="417123" y="4295784"/>
+            <a:ext cx="9159954" cy="1483130"/>
+          </a:xfrm>
+          <a:prstGeom prst="roundRect">
+            <a:avLst>
+              <a:gd name="adj" fmla="val 5139"/>
+            </a:avLst>
+          </a:prstGeom>
+          <a:solidFill>
+            <a:schemeClr val="bg1"/>
+          </a:solidFill>
+          <a:ln>
+            <a:noFill/>
+          </a:ln>
+          <a:effectLst>
+            <a:outerShdw blurRad="228600" dist="50800" dir="5400000" rotWithShape="0">
+              <a:srgbClr val="1B2A4A">
+                <a:alpha val="22000"/>
+              </a:srgbClr>
+            </a:outerShdw>
+          </a:effectLst>
+        </p:spPr>
+        <p:txBody>
+          <a:bodyPr anchor="ctr" anchorCtr="0"/>
+          <a:lstStyle/>
+          <a:p>
+            <a:pPr algn="ctr"/>
+            <a:endParaRPr lang="ko-KR" altLang="en-US" sz="1400" b="1"/>
+          </a:p>
+        </p:txBody>
+      </p:sp>
+      <p:sp>
+        <p:nvSpPr>
+          <p:cNvPr id="63" name="사각형: 둥근 모서리 62">
+            <a:extLst>
+              <a:ext uri="{FF2B5EF4-FFF2-40B4-BE49-F238E27FC236}">
+                <a16:creationId xmlns:a16="http://schemas.microsoft.com/office/drawing/2014/main" id="{B943D869-5358-4D27-9A94-87B5A2C78238}"/>
               </a:ext>
             </a:extLst>
           </p:cNvPr>
@@ -16547,7 +16547,7 @@
         </p:nvSpPr>
         <p:spPr>
           <a:xfrm>
-            <a:off x="4257155" y="1290892"/>
+            <a:off x="4038944" y="1290892"/>
             <a:ext cx="1657198" cy="406475"/>
           </a:xfrm>
           <a:prstGeom prst="roundRect">
@@ -16604,10 +16604,10 @@
       </p:sp>
       <p:sp>
         <p:nvSpPr>
-          <p:cNvPr id="41" name="사각형: 둥근 모서리 40">
-            <a:extLst>
-              <a:ext uri="{FF2B5EF4-FFF2-40B4-BE49-F238E27FC236}">
-                <a16:creationId xmlns:a16="http://schemas.microsoft.com/office/drawing/2014/main" id="{E7ECEBBB-44B4-462C-9FD9-E0DD183C58EA}"/>
+          <p:cNvPr id="64" name="사각형: 둥근 모서리 63">
+            <a:extLst>
+              <a:ext uri="{FF2B5EF4-FFF2-40B4-BE49-F238E27FC236}">
+                <a16:creationId xmlns:a16="http://schemas.microsoft.com/office/drawing/2014/main" id="{1DA343C2-02F9-42BB-8EA6-D67F002A5940}"/>
               </a:ext>
             </a:extLst>
           </p:cNvPr>
@@ -16616,7 +16616,7 @@
         </p:nvSpPr>
         <p:spPr>
           <a:xfrm>
-            <a:off x="4257155" y="2096435"/>
+            <a:off x="4038944" y="2096435"/>
             <a:ext cx="1657198" cy="406475"/>
           </a:xfrm>
           <a:prstGeom prst="roundRect">
@@ -16691,10 +16691,10 @@
       </p:sp>
       <p:sp>
         <p:nvSpPr>
-          <p:cNvPr id="42" name="사각형: 둥근 모서리 41">
-            <a:extLst>
-              <a:ext uri="{FF2B5EF4-FFF2-40B4-BE49-F238E27FC236}">
-                <a16:creationId xmlns:a16="http://schemas.microsoft.com/office/drawing/2014/main" id="{76166D3E-CD2A-46AD-B0D6-633036C7B855}"/>
+          <p:cNvPr id="67" name="사각형: 둥근 모서리 66">
+            <a:extLst>
+              <a:ext uri="{FF2B5EF4-FFF2-40B4-BE49-F238E27FC236}">
+                <a16:creationId xmlns:a16="http://schemas.microsoft.com/office/drawing/2014/main" id="{8F001927-5608-4DBC-8389-B6A9094EEA16}"/>
               </a:ext>
             </a:extLst>
           </p:cNvPr>
@@ -16703,7 +16703,7 @@
         </p:nvSpPr>
         <p:spPr>
           <a:xfrm>
-            <a:off x="4257156" y="2957030"/>
+            <a:off x="4038945" y="2957030"/>
             <a:ext cx="1657197" cy="406475"/>
           </a:xfrm>
           <a:prstGeom prst="roundRect">
@@ -16754,10 +16754,10 @@
       </p:sp>
       <p:sp>
         <p:nvSpPr>
-          <p:cNvPr id="44" name="TextBox 43">
-            <a:extLst>
-              <a:ext uri="{FF2B5EF4-FFF2-40B4-BE49-F238E27FC236}">
-                <a16:creationId xmlns:a16="http://schemas.microsoft.com/office/drawing/2014/main" id="{09F1F9FE-BEAD-4DC4-84A8-B812553A8B16}"/>
+          <p:cNvPr id="68" name="TextBox 67">
+            <a:extLst>
+              <a:ext uri="{FF2B5EF4-FFF2-40B4-BE49-F238E27FC236}">
+                <a16:creationId xmlns:a16="http://schemas.microsoft.com/office/drawing/2014/main" id="{8983A2BC-4328-4272-82C3-B4A5C9F9970E}"/>
               </a:ext>
             </a:extLst>
           </p:cNvPr>
@@ -16766,7 +16766,7 @@
         </p:nvSpPr>
         <p:spPr>
           <a:xfrm>
-            <a:off x="5924403" y="1228672"/>
+            <a:off x="5706192" y="1228672"/>
             <a:ext cx="4221088" cy="530915"/>
           </a:xfrm>
           <a:prstGeom prst="rect">
@@ -16858,10 +16858,10 @@
       </p:sp>
       <p:sp>
         <p:nvSpPr>
-          <p:cNvPr id="52" name="TextBox 51">
-            <a:extLst>
-              <a:ext uri="{FF2B5EF4-FFF2-40B4-BE49-F238E27FC236}">
-                <a16:creationId xmlns:a16="http://schemas.microsoft.com/office/drawing/2014/main" id="{51513667-2318-4EE2-9E0A-47E1A6AC3126}"/>
+          <p:cNvPr id="69" name="TextBox 68">
+            <a:extLst>
+              <a:ext uri="{FF2B5EF4-FFF2-40B4-BE49-F238E27FC236}">
+                <a16:creationId xmlns:a16="http://schemas.microsoft.com/office/drawing/2014/main" id="{91DC0D7F-5A31-4E6A-AB58-9E20E3E91662}"/>
               </a:ext>
             </a:extLst>
           </p:cNvPr>
@@ -16870,7 +16870,7 @@
         </p:nvSpPr>
         <p:spPr>
           <a:xfrm>
-            <a:off x="5924403" y="2034215"/>
+            <a:off x="5706192" y="2034215"/>
             <a:ext cx="4101344" cy="530915"/>
           </a:xfrm>
           <a:prstGeom prst="rect">
@@ -16983,10 +16983,10 @@
       </p:sp>
       <p:sp>
         <p:nvSpPr>
-          <p:cNvPr id="53" name="TextBox 52">
-            <a:extLst>
-              <a:ext uri="{FF2B5EF4-FFF2-40B4-BE49-F238E27FC236}">
-                <a16:creationId xmlns:a16="http://schemas.microsoft.com/office/drawing/2014/main" id="{663172E6-297C-454C-8084-7AAAB8AA8108}"/>
+          <p:cNvPr id="70" name="TextBox 69">
+            <a:extLst>
+              <a:ext uri="{FF2B5EF4-FFF2-40B4-BE49-F238E27FC236}">
+                <a16:creationId xmlns:a16="http://schemas.microsoft.com/office/drawing/2014/main" id="{3584D38E-4743-4F37-B30F-64172E01FE93}"/>
               </a:ext>
             </a:extLst>
           </p:cNvPr>
@@ -16995,7 +16995,7 @@
         </p:nvSpPr>
         <p:spPr>
           <a:xfrm>
-            <a:off x="5924403" y="2775547"/>
+            <a:off x="5706192" y="2775547"/>
             <a:ext cx="4101344" cy="769441"/>
           </a:xfrm>
           <a:prstGeom prst="rect">
@@ -17120,10 +17120,10 @@
       </p:sp>
       <p:pic>
         <p:nvPicPr>
-          <p:cNvPr id="54" name="그래픽 53" descr="갈매기형 화살표 단색으로 채워진">
-            <a:extLst>
-              <a:ext uri="{FF2B5EF4-FFF2-40B4-BE49-F238E27FC236}">
-                <a16:creationId xmlns:a16="http://schemas.microsoft.com/office/drawing/2014/main" id="{6D602B2A-3F13-479E-932C-9CE5E2D13BAA}"/>
+          <p:cNvPr id="71" name="그래픽 70" descr="갈매기형 화살표 단색으로 채워진">
+            <a:extLst>
+              <a:ext uri="{FF2B5EF4-FFF2-40B4-BE49-F238E27FC236}">
+                <a16:creationId xmlns:a16="http://schemas.microsoft.com/office/drawing/2014/main" id="{08CAECC0-493E-4723-8AD6-FFB1001D0281}"/>
               </a:ext>
             </a:extLst>
           </p:cNvPr>
@@ -17149,7 +17149,7 @@
         </p:blipFill>
         <p:spPr>
           <a:xfrm rot="5400000">
-            <a:off x="4904443" y="1587729"/>
+            <a:off x="4686232" y="1587729"/>
             <a:ext cx="362623" cy="624548"/>
           </a:xfrm>
           <a:prstGeom prst="rect">
@@ -17159,10 +17159,10 @@
       </p:pic>
       <p:pic>
         <p:nvPicPr>
-          <p:cNvPr id="55" name="그래픽 54" descr="갈매기형 화살표 단색으로 채워진">
-            <a:extLst>
-              <a:ext uri="{FF2B5EF4-FFF2-40B4-BE49-F238E27FC236}">
-                <a16:creationId xmlns:a16="http://schemas.microsoft.com/office/drawing/2014/main" id="{A41834EC-F964-4C89-85D1-2ED9B6371E68}"/>
+          <p:cNvPr id="72" name="그래픽 71" descr="갈매기형 화살표 단색으로 채워진">
+            <a:extLst>
+              <a:ext uri="{FF2B5EF4-FFF2-40B4-BE49-F238E27FC236}">
+                <a16:creationId xmlns:a16="http://schemas.microsoft.com/office/drawing/2014/main" id="{2AF6BB0C-15B8-48FF-8293-F55D72FC9687}"/>
               </a:ext>
             </a:extLst>
           </p:cNvPr>
@@ -17188,7 +17188,7 @@
         </p:blipFill>
         <p:spPr>
           <a:xfrm rot="5400000">
-            <a:off x="4904443" y="2415046"/>
+            <a:off x="4686232" y="2415046"/>
             <a:ext cx="362623" cy="624548"/>
           </a:xfrm>
           <a:prstGeom prst="rect">
@@ -17198,10 +17198,10 @@
       </p:pic>
       <p:cxnSp>
         <p:nvCxnSpPr>
-          <p:cNvPr id="56" name="직선 연결선 55">
-            <a:extLst>
-              <a:ext uri="{FF2B5EF4-FFF2-40B4-BE49-F238E27FC236}">
-                <a16:creationId xmlns:a16="http://schemas.microsoft.com/office/drawing/2014/main" id="{1C771CE0-A909-4638-A86F-DBE3ABE4EA63}"/>
+          <p:cNvPr id="73" name="직선 연결선 72">
+            <a:extLst>
+              <a:ext uri="{FF2B5EF4-FFF2-40B4-BE49-F238E27FC236}">
+                <a16:creationId xmlns:a16="http://schemas.microsoft.com/office/drawing/2014/main" id="{0A7655E6-B33F-4A2A-B957-02E84C779102}"/>
               </a:ext>
             </a:extLst>
           </p:cNvPr>
@@ -17243,10 +17243,10 @@
       </p:cxnSp>
       <p:sp>
         <p:nvSpPr>
-          <p:cNvPr id="59" name="TextBox 58">
-            <a:extLst>
-              <a:ext uri="{FF2B5EF4-FFF2-40B4-BE49-F238E27FC236}">
-                <a16:creationId xmlns:a16="http://schemas.microsoft.com/office/drawing/2014/main" id="{F34A31BE-698E-4EED-9F0B-142B22C271F2}"/>
+          <p:cNvPr id="74" name="TextBox 73">
+            <a:extLst>
+              <a:ext uri="{FF2B5EF4-FFF2-40B4-BE49-F238E27FC236}">
+                <a16:creationId xmlns:a16="http://schemas.microsoft.com/office/drawing/2014/main" id="{577E5FDF-B88F-4216-B188-37AAB9895F7D}"/>
               </a:ext>
             </a:extLst>
           </p:cNvPr>
@@ -17279,10 +17279,10 @@
       </p:sp>
       <p:sp>
         <p:nvSpPr>
-          <p:cNvPr id="75" name="TextBox 74">
-            <a:extLst>
-              <a:ext uri="{FF2B5EF4-FFF2-40B4-BE49-F238E27FC236}">
-                <a16:creationId xmlns:a16="http://schemas.microsoft.com/office/drawing/2014/main" id="{7DFE27D1-3AA1-4DA8-BC7D-4845152C606C}"/>
+          <p:cNvPr id="76" name="TextBox 75">
+            <a:extLst>
+              <a:ext uri="{FF2B5EF4-FFF2-40B4-BE49-F238E27FC236}">
+                <a16:creationId xmlns:a16="http://schemas.microsoft.com/office/drawing/2014/main" id="{33F3A396-CC23-4AFA-A0A5-CD35B7CBF035}"/>
               </a:ext>
             </a:extLst>
           </p:cNvPr>
@@ -17326,10 +17326,10 @@
       </p:sp>
       <p:sp>
         <p:nvSpPr>
-          <p:cNvPr id="78" name="TextBox 77">
-            <a:extLst>
-              <a:ext uri="{FF2B5EF4-FFF2-40B4-BE49-F238E27FC236}">
-                <a16:creationId xmlns:a16="http://schemas.microsoft.com/office/drawing/2014/main" id="{60D05675-3CB6-49F0-A215-9E6D7D8882CE}"/>
+          <p:cNvPr id="77" name="TextBox 76">
+            <a:extLst>
+              <a:ext uri="{FF2B5EF4-FFF2-40B4-BE49-F238E27FC236}">
+                <a16:creationId xmlns:a16="http://schemas.microsoft.com/office/drawing/2014/main" id="{04D8BA2C-A35C-4F65-891C-4C1B1E5B03CB}"/>
               </a:ext>
             </a:extLst>
           </p:cNvPr>
@@ -17393,10 +17393,10 @@
       </p:sp>
       <p:sp>
         <p:nvSpPr>
-          <p:cNvPr id="79" name="TextBox 78">
-            <a:extLst>
-              <a:ext uri="{FF2B5EF4-FFF2-40B4-BE49-F238E27FC236}">
-                <a16:creationId xmlns:a16="http://schemas.microsoft.com/office/drawing/2014/main" id="{A0AEE09C-9804-4EC5-802E-F5E99F7DC864}"/>
+          <p:cNvPr id="80" name="TextBox 79">
+            <a:extLst>
+              <a:ext uri="{FF2B5EF4-FFF2-40B4-BE49-F238E27FC236}">
+                <a16:creationId xmlns:a16="http://schemas.microsoft.com/office/drawing/2014/main" id="{787207ED-69D2-4A0A-BC7F-F6C3D9F6EB17}"/>
               </a:ext>
             </a:extLst>
           </p:cNvPr>
@@ -17437,10 +17437,10 @@
       </p:sp>
       <p:sp>
         <p:nvSpPr>
-          <p:cNvPr id="84" name="TextBox 83">
-            <a:extLst>
-              <a:ext uri="{FF2B5EF4-FFF2-40B4-BE49-F238E27FC236}">
-                <a16:creationId xmlns:a16="http://schemas.microsoft.com/office/drawing/2014/main" id="{CF621287-5AF0-467C-95AB-19A462CB5238}"/>
+          <p:cNvPr id="81" name="TextBox 80">
+            <a:extLst>
+              <a:ext uri="{FF2B5EF4-FFF2-40B4-BE49-F238E27FC236}">
+                <a16:creationId xmlns:a16="http://schemas.microsoft.com/office/drawing/2014/main" id="{D4F2E896-EBCC-4DB2-B936-A0FF5DEB967B}"/>
               </a:ext>
             </a:extLst>
           </p:cNvPr>
@@ -17481,10 +17481,10 @@
       </p:sp>
       <p:sp>
         <p:nvSpPr>
-          <p:cNvPr id="85" name="TextBox 84">
-            <a:extLst>
-              <a:ext uri="{FF2B5EF4-FFF2-40B4-BE49-F238E27FC236}">
-                <a16:creationId xmlns:a16="http://schemas.microsoft.com/office/drawing/2014/main" id="{33C61194-C9B0-437F-9FC2-BCD1B486A971}"/>
+          <p:cNvPr id="82" name="TextBox 81">
+            <a:extLst>
+              <a:ext uri="{FF2B5EF4-FFF2-40B4-BE49-F238E27FC236}">
+                <a16:creationId xmlns:a16="http://schemas.microsoft.com/office/drawing/2014/main" id="{A5CE1525-77A6-4E8A-8DB1-EC5DDEEDC650}"/>
               </a:ext>
             </a:extLst>
           </p:cNvPr>
@@ -17517,10 +17517,10 @@
       </p:sp>
       <p:sp>
         <p:nvSpPr>
-          <p:cNvPr id="87" name="직사각형 86">
-            <a:extLst>
-              <a:ext uri="{FF2B5EF4-FFF2-40B4-BE49-F238E27FC236}">
-                <a16:creationId xmlns:a16="http://schemas.microsoft.com/office/drawing/2014/main" id="{24807FFB-D7F2-4A8E-8656-4617AEFDA05F}"/>
+          <p:cNvPr id="83" name="직사각형 82">
+            <a:extLst>
+              <a:ext uri="{FF2B5EF4-FFF2-40B4-BE49-F238E27FC236}">
+                <a16:creationId xmlns:a16="http://schemas.microsoft.com/office/drawing/2014/main" id="{96434F15-AC3A-468F-99C9-0415F081BC12}"/>
               </a:ext>
             </a:extLst>
           </p:cNvPr>
@@ -17699,10 +17699,10 @@
       </p:sp>
       <p:grpSp>
         <p:nvGrpSpPr>
-          <p:cNvPr id="88" name="그룹 87">
-            <a:extLst>
-              <a:ext uri="{FF2B5EF4-FFF2-40B4-BE49-F238E27FC236}">
-                <a16:creationId xmlns:a16="http://schemas.microsoft.com/office/drawing/2014/main" id="{658B2224-EF71-4CE7-ACE4-6325C2AB62E9}"/>
+          <p:cNvPr id="91" name="그룹 90">
+            <a:extLst>
+              <a:ext uri="{FF2B5EF4-FFF2-40B4-BE49-F238E27FC236}">
+                <a16:creationId xmlns:a16="http://schemas.microsoft.com/office/drawing/2014/main" id="{57D9776C-E8E7-48FD-B43B-3C0951C4E976}"/>
               </a:ext>
             </a:extLst>
           </p:cNvPr>
@@ -17719,10 +17719,10 @@
         </p:grpSpPr>
         <p:sp>
           <p:nvSpPr>
-            <p:cNvPr id="89" name="모서리가 둥근 직사각형 320">
+            <p:cNvPr id="92" name="모서리가 둥근 직사각형 320">
               <a:extLst>
                 <a:ext uri="{FF2B5EF4-FFF2-40B4-BE49-F238E27FC236}">
-                  <a16:creationId xmlns:a16="http://schemas.microsoft.com/office/drawing/2014/main" id="{F1230FAB-EAE2-49BF-94C7-F4C677DCB12F}"/>
+                  <a16:creationId xmlns:a16="http://schemas.microsoft.com/office/drawing/2014/main" id="{954BF770-ACB8-46E0-AA25-5E82CF5CE0EA}"/>
                 </a:ext>
               </a:extLst>
             </p:cNvPr>
@@ -17808,10 +17808,10 @@
         </p:sp>
         <p:pic>
           <p:nvPicPr>
-            <p:cNvPr id="90" name="그림 89" descr="7.png">
+            <p:cNvPr id="93" name="그림 92" descr="7.png">
               <a:extLst>
                 <a:ext uri="{FF2B5EF4-FFF2-40B4-BE49-F238E27FC236}">
-                  <a16:creationId xmlns:a16="http://schemas.microsoft.com/office/drawing/2014/main" id="{6A204FBD-E43F-45F1-9812-47291227CED9}"/>
+                  <a16:creationId xmlns:a16="http://schemas.microsoft.com/office/drawing/2014/main" id="{74C40B4D-1920-4199-963C-159DB063BC1B}"/>
                 </a:ext>
               </a:extLst>
             </p:cNvPr>
@@ -17842,10 +17842,10 @@
       </p:grpSp>
       <p:sp>
         <p:nvSpPr>
-          <p:cNvPr id="45" name="직사각형 44">
-            <a:extLst>
-              <a:ext uri="{FF2B5EF4-FFF2-40B4-BE49-F238E27FC236}">
-                <a16:creationId xmlns:a16="http://schemas.microsoft.com/office/drawing/2014/main" id="{D3B899FC-1121-411F-94D7-FA8AC50385C8}"/>
+          <p:cNvPr id="94" name="직사각형 93">
+            <a:extLst>
+              <a:ext uri="{FF2B5EF4-FFF2-40B4-BE49-F238E27FC236}">
+                <a16:creationId xmlns:a16="http://schemas.microsoft.com/office/drawing/2014/main" id="{090C8372-2F8A-4431-B4A1-B704349C54E3}"/>
               </a:ext>
             </a:extLst>
           </p:cNvPr>
@@ -17955,10 +17955,10 @@
       </p:sp>
       <p:grpSp>
         <p:nvGrpSpPr>
-          <p:cNvPr id="46" name="그룹 45">
-            <a:extLst>
-              <a:ext uri="{FF2B5EF4-FFF2-40B4-BE49-F238E27FC236}">
-                <a16:creationId xmlns:a16="http://schemas.microsoft.com/office/drawing/2014/main" id="{5D296A01-0467-4471-BFB7-716F6FEAD138}"/>
+          <p:cNvPr id="95" name="그룹 94">
+            <a:extLst>
+              <a:ext uri="{FF2B5EF4-FFF2-40B4-BE49-F238E27FC236}">
+                <a16:creationId xmlns:a16="http://schemas.microsoft.com/office/drawing/2014/main" id="{D42D3539-15C5-4E3F-87B4-B630600E8E02}"/>
               </a:ext>
             </a:extLst>
           </p:cNvPr>
@@ -17975,10 +17975,10 @@
         </p:grpSpPr>
         <p:sp>
           <p:nvSpPr>
-            <p:cNvPr id="47" name="모서리가 둥근 직사각형 320">
+            <p:cNvPr id="96" name="모서리가 둥근 직사각형 320">
               <a:extLst>
                 <a:ext uri="{FF2B5EF4-FFF2-40B4-BE49-F238E27FC236}">
-                  <a16:creationId xmlns:a16="http://schemas.microsoft.com/office/drawing/2014/main" id="{D5C715E3-3D6B-443B-959D-43AB6A203618}"/>
+                  <a16:creationId xmlns:a16="http://schemas.microsoft.com/office/drawing/2014/main" id="{F3D166EC-C8CA-4438-A464-9910551AFD45}"/>
                 </a:ext>
               </a:extLst>
             </p:cNvPr>
@@ -18064,10 +18064,10 @@
         </p:sp>
         <p:pic>
           <p:nvPicPr>
-            <p:cNvPr id="48" name="그림 47" descr="7.png">
+            <p:cNvPr id="97" name="그림 96" descr="7.png">
               <a:extLst>
                 <a:ext uri="{FF2B5EF4-FFF2-40B4-BE49-F238E27FC236}">
-                  <a16:creationId xmlns:a16="http://schemas.microsoft.com/office/drawing/2014/main" id="{95E15549-020C-463B-9471-36C41955CCB8}"/>
+                  <a16:creationId xmlns:a16="http://schemas.microsoft.com/office/drawing/2014/main" id="{71033BDD-9DCA-4127-84BE-3F7A34580409}"/>
                 </a:ext>
               </a:extLst>
             </p:cNvPr>
@@ -18096,50 +18096,12 @@
           </p:spPr>
         </p:pic>
       </p:grpSp>
-      <p:pic>
-        <p:nvPicPr>
-          <p:cNvPr id="34" name="그림 33">
-            <a:hlinkClick r:id="rId5" action="ppaction://hlinkfile"/>
-            <a:extLst>
-              <a:ext uri="{FF2B5EF4-FFF2-40B4-BE49-F238E27FC236}">
-                <a16:creationId xmlns:a16="http://schemas.microsoft.com/office/drawing/2014/main" id="{E98EEE92-2BAD-48E7-A9E1-5FE5B50C593C}"/>
-              </a:ext>
-            </a:extLst>
-          </p:cNvPr>
-          <p:cNvPicPr>
-            <a:picLocks noChangeAspect="1"/>
-          </p:cNvPicPr>
-          <p:nvPr/>
-        </p:nvPicPr>
-        <p:blipFill rotWithShape="1">
-          <a:blip r:embed="rId6"/>
-          <a:stretch/>
-        </p:blipFill>
-        <p:spPr>
-          <a:xfrm>
-            <a:off x="417123" y="1271745"/>
-            <a:ext cx="3645785" cy="2136473"/>
-          </a:xfrm>
-          <a:prstGeom prst="roundRect">
-            <a:avLst>
-              <a:gd name="adj" fmla="val 3500"/>
-            </a:avLst>
-          </a:prstGeom>
-          <a:effectLst>
-            <a:outerShdw blurRad="228600" dist="50800" dir="5400000" rotWithShape="0">
-              <a:srgbClr val="1B2A4A">
-                <a:alpha val="22000"/>
-              </a:srgbClr>
-            </a:outerShdw>
-          </a:effectLst>
-        </p:spPr>
-      </p:pic>
-      <p:sp>
-        <p:nvSpPr>
-          <p:cNvPr id="32" name="TextBox 31">
-            <a:extLst>
-              <a:ext uri="{FF2B5EF4-FFF2-40B4-BE49-F238E27FC236}">
-                <a16:creationId xmlns:a16="http://schemas.microsoft.com/office/drawing/2014/main" id="{B75B54E4-3DB9-4357-89F4-5D95D4E300D3}"/>
+      <p:sp>
+        <p:nvSpPr>
+          <p:cNvPr id="98" name="TextBox 97">
+            <a:extLst>
+              <a:ext uri="{FF2B5EF4-FFF2-40B4-BE49-F238E27FC236}">
+                <a16:creationId xmlns:a16="http://schemas.microsoft.com/office/drawing/2014/main" id="{7D2C8062-78B3-4096-9B25-047931054714}"/>
               </a:ext>
             </a:extLst>
           </p:cNvPr>
@@ -18172,10 +18134,10 @@
       </p:sp>
       <p:sp>
         <p:nvSpPr>
-          <p:cNvPr id="35" name="TextBox 34">
-            <a:extLst>
-              <a:ext uri="{FF2B5EF4-FFF2-40B4-BE49-F238E27FC236}">
-                <a16:creationId xmlns:a16="http://schemas.microsoft.com/office/drawing/2014/main" id="{75CADF0F-B5DE-493B-9922-4CC6E10A3F57}"/>
+          <p:cNvPr id="99" name="TextBox 98">
+            <a:extLst>
+              <a:ext uri="{FF2B5EF4-FFF2-40B4-BE49-F238E27FC236}">
+                <a16:creationId xmlns:a16="http://schemas.microsoft.com/office/drawing/2014/main" id="{E372FC36-B2F1-43D8-841B-81CC15D534F5}"/>
               </a:ext>
             </a:extLst>
           </p:cNvPr>
@@ -18224,10 +18186,10 @@
       </p:sp>
       <p:sp>
         <p:nvSpPr>
-          <p:cNvPr id="36" name="사각형: 둥근 모서리 35">
-            <a:extLst>
-              <a:ext uri="{FF2B5EF4-FFF2-40B4-BE49-F238E27FC236}">
-                <a16:creationId xmlns:a16="http://schemas.microsoft.com/office/drawing/2014/main" id="{91768DFA-DE01-4FC5-924E-1BF0F95E4258}"/>
+          <p:cNvPr id="100" name="사각형: 둥근 모서리 99">
+            <a:extLst>
+              <a:ext uri="{FF2B5EF4-FFF2-40B4-BE49-F238E27FC236}">
+                <a16:creationId xmlns:a16="http://schemas.microsoft.com/office/drawing/2014/main" id="{410E9026-F6FF-4700-8407-CAC9DFA00865}"/>
               </a:ext>
             </a:extLst>
           </p:cNvPr>
@@ -18271,10 +18233,10 @@
       </p:sp>
       <p:sp>
         <p:nvSpPr>
-          <p:cNvPr id="38" name="사각형: 둥근 모서리 37">
-            <a:extLst>
-              <a:ext uri="{FF2B5EF4-FFF2-40B4-BE49-F238E27FC236}">
-                <a16:creationId xmlns:a16="http://schemas.microsoft.com/office/drawing/2014/main" id="{796FA834-84F7-42EF-A7D9-0ACE0A3491BA}"/>
+          <p:cNvPr id="101" name="사각형: 둥근 모서리 100">
+            <a:extLst>
+              <a:ext uri="{FF2B5EF4-FFF2-40B4-BE49-F238E27FC236}">
+                <a16:creationId xmlns:a16="http://schemas.microsoft.com/office/drawing/2014/main" id="{44DB6583-F864-42D2-9238-F352D74CAE21}"/>
               </a:ext>
             </a:extLst>
           </p:cNvPr>
@@ -18318,10 +18280,10 @@
       </p:sp>
       <p:sp>
         <p:nvSpPr>
-          <p:cNvPr id="39" name="사각형: 둥근 모서리 38">
-            <a:extLst>
-              <a:ext uri="{FF2B5EF4-FFF2-40B4-BE49-F238E27FC236}">
-                <a16:creationId xmlns:a16="http://schemas.microsoft.com/office/drawing/2014/main" id="{12E0B78B-1636-40A6-93C5-055AB120C6E9}"/>
+          <p:cNvPr id="102" name="사각형: 둥근 모서리 101">
+            <a:extLst>
+              <a:ext uri="{FF2B5EF4-FFF2-40B4-BE49-F238E27FC236}">
+                <a16:creationId xmlns:a16="http://schemas.microsoft.com/office/drawing/2014/main" id="{1544691C-D0C7-4472-AC42-BD5A0936C964}"/>
               </a:ext>
             </a:extLst>
           </p:cNvPr>
@@ -18365,10 +18327,10 @@
       </p:sp>
       <p:sp>
         <p:nvSpPr>
-          <p:cNvPr id="3" name="TextBox 2">
-            <a:extLst>
-              <a:ext uri="{FF2B5EF4-FFF2-40B4-BE49-F238E27FC236}">
-                <a16:creationId xmlns:a16="http://schemas.microsoft.com/office/drawing/2014/main" id="{03B0CA3A-152D-4015-BBF7-BD90D455AEAC}"/>
+          <p:cNvPr id="103" name="TextBox 102">
+            <a:extLst>
+              <a:ext uri="{FF2B5EF4-FFF2-40B4-BE49-F238E27FC236}">
+                <a16:creationId xmlns:a16="http://schemas.microsoft.com/office/drawing/2014/main" id="{414A2944-3104-4311-B74C-BDD4B8754BC6}"/>
               </a:ext>
             </a:extLst>
           </p:cNvPr>
@@ -18408,10 +18370,10 @@
       </p:sp>
       <p:sp>
         <p:nvSpPr>
-          <p:cNvPr id="43" name="TextBox 42">
-            <a:extLst>
-              <a:ext uri="{FF2B5EF4-FFF2-40B4-BE49-F238E27FC236}">
-                <a16:creationId xmlns:a16="http://schemas.microsoft.com/office/drawing/2014/main" id="{7CFEDA02-0213-41AC-B4B0-4E942FE28EDC}"/>
+          <p:cNvPr id="104" name="TextBox 103">
+            <a:extLst>
+              <a:ext uri="{FF2B5EF4-FFF2-40B4-BE49-F238E27FC236}">
+                <a16:creationId xmlns:a16="http://schemas.microsoft.com/office/drawing/2014/main" id="{4A2629B0-3B37-401E-AF2D-0B8143B5CE53}"/>
               </a:ext>
             </a:extLst>
           </p:cNvPr>
@@ -18450,10 +18412,10 @@
       </p:sp>
       <p:sp>
         <p:nvSpPr>
-          <p:cNvPr id="49" name="TextBox 48">
-            <a:extLst>
-              <a:ext uri="{FF2B5EF4-FFF2-40B4-BE49-F238E27FC236}">
-                <a16:creationId xmlns:a16="http://schemas.microsoft.com/office/drawing/2014/main" id="{308E6DD0-C667-46B6-B5D2-A493891973EB}"/>
+          <p:cNvPr id="105" name="TextBox 104">
+            <a:extLst>
+              <a:ext uri="{FF2B5EF4-FFF2-40B4-BE49-F238E27FC236}">
+                <a16:creationId xmlns:a16="http://schemas.microsoft.com/office/drawing/2014/main" id="{5BB87AE7-C48A-4892-9F6B-0468470AD798}"/>
               </a:ext>
             </a:extLst>
           </p:cNvPr>
@@ -18493,10 +18455,10 @@
       </p:sp>
       <p:sp>
         <p:nvSpPr>
-          <p:cNvPr id="50" name="TextBox 49">
-            <a:extLst>
-              <a:ext uri="{FF2B5EF4-FFF2-40B4-BE49-F238E27FC236}">
-                <a16:creationId xmlns:a16="http://schemas.microsoft.com/office/drawing/2014/main" id="{CD616FD4-E477-4107-9693-14F0216A0FD6}"/>
+          <p:cNvPr id="106" name="TextBox 105">
+            <a:extLst>
+              <a:ext uri="{FF2B5EF4-FFF2-40B4-BE49-F238E27FC236}">
+                <a16:creationId xmlns:a16="http://schemas.microsoft.com/office/drawing/2014/main" id="{CB7A764B-FA80-43D4-AEB5-986699BC661F}"/>
               </a:ext>
             </a:extLst>
           </p:cNvPr>
@@ -18535,10 +18497,10 @@
       </p:sp>
       <p:sp>
         <p:nvSpPr>
-          <p:cNvPr id="57" name="TextBox 56">
-            <a:extLst>
-              <a:ext uri="{FF2B5EF4-FFF2-40B4-BE49-F238E27FC236}">
-                <a16:creationId xmlns:a16="http://schemas.microsoft.com/office/drawing/2014/main" id="{170307BE-6598-47A1-83FA-D9EE14EEC7A5}"/>
+          <p:cNvPr id="107" name="TextBox 106">
+            <a:extLst>
+              <a:ext uri="{FF2B5EF4-FFF2-40B4-BE49-F238E27FC236}">
+                <a16:creationId xmlns:a16="http://schemas.microsoft.com/office/drawing/2014/main" id="{A63252D1-394D-47E6-B655-CF81BD69F605}"/>
               </a:ext>
             </a:extLst>
           </p:cNvPr>
@@ -18578,10 +18540,10 @@
       </p:sp>
       <p:sp>
         <p:nvSpPr>
-          <p:cNvPr id="58" name="TextBox 57">
-            <a:extLst>
-              <a:ext uri="{FF2B5EF4-FFF2-40B4-BE49-F238E27FC236}">
-                <a16:creationId xmlns:a16="http://schemas.microsoft.com/office/drawing/2014/main" id="{AA5407AD-CFBC-43CC-BCBD-A292FFBDCFD8}"/>
+          <p:cNvPr id="108" name="TextBox 107">
+            <a:extLst>
+              <a:ext uri="{FF2B5EF4-FFF2-40B4-BE49-F238E27FC236}">
+                <a16:creationId xmlns:a16="http://schemas.microsoft.com/office/drawing/2014/main" id="{9E93A99E-24B0-4F29-A68B-17E59027D199}"/>
               </a:ext>
             </a:extLst>
           </p:cNvPr>
@@ -18620,10 +18582,10 @@
       </p:sp>
       <p:sp>
         <p:nvSpPr>
-          <p:cNvPr id="60" name="TextBox 59">
-            <a:extLst>
-              <a:ext uri="{FF2B5EF4-FFF2-40B4-BE49-F238E27FC236}">
-                <a16:creationId xmlns:a16="http://schemas.microsoft.com/office/drawing/2014/main" id="{FC34FC04-8356-4F3E-9921-3AEE8CC855B1}"/>
+          <p:cNvPr id="109" name="TextBox 108">
+            <a:extLst>
+              <a:ext uri="{FF2B5EF4-FFF2-40B4-BE49-F238E27FC236}">
+                <a16:creationId xmlns:a16="http://schemas.microsoft.com/office/drawing/2014/main" id="{999FA020-9707-4970-BCA1-E0CCB382D4A2}"/>
               </a:ext>
             </a:extLst>
           </p:cNvPr>
@@ -18668,10 +18630,10 @@
       </p:sp>
       <p:sp>
         <p:nvSpPr>
-          <p:cNvPr id="61" name="TextBox 60">
-            <a:extLst>
-              <a:ext uri="{FF2B5EF4-FFF2-40B4-BE49-F238E27FC236}">
-                <a16:creationId xmlns:a16="http://schemas.microsoft.com/office/drawing/2014/main" id="{3866ACBC-4164-4D24-94BA-CF7A8D749112}"/>
+          <p:cNvPr id="110" name="TextBox 109">
+            <a:extLst>
+              <a:ext uri="{FF2B5EF4-FFF2-40B4-BE49-F238E27FC236}">
+                <a16:creationId xmlns:a16="http://schemas.microsoft.com/office/drawing/2014/main" id="{1D538F00-B4E3-47CF-AE5C-35B15C14DFE5}"/>
               </a:ext>
             </a:extLst>
           </p:cNvPr>
@@ -18731,10 +18693,10 @@
       </p:sp>
       <p:sp>
         <p:nvSpPr>
-          <p:cNvPr id="62" name="TextBox 61">
-            <a:extLst>
-              <a:ext uri="{FF2B5EF4-FFF2-40B4-BE49-F238E27FC236}">
-                <a16:creationId xmlns:a16="http://schemas.microsoft.com/office/drawing/2014/main" id="{11B1D1D1-F6F2-44BE-8FB7-60AF49C853F4}"/>
+          <p:cNvPr id="111" name="TextBox 110">
+            <a:extLst>
+              <a:ext uri="{FF2B5EF4-FFF2-40B4-BE49-F238E27FC236}">
+                <a16:creationId xmlns:a16="http://schemas.microsoft.com/office/drawing/2014/main" id="{39A59CDD-A314-43D7-826C-F80CB3097BC2}"/>
               </a:ext>
             </a:extLst>
           </p:cNvPr>
@@ -18825,10 +18787,10 @@
       </p:sp>
       <p:pic>
         <p:nvPicPr>
-          <p:cNvPr id="65" name="Image 4" descr="/tmp/claude-0/-home-claude/946d89a8-cd71-5282-af60-49c1ab8579af/scratchpad/work/assets/cpu_blue.png">
-            <a:extLst>
-              <a:ext uri="{FF2B5EF4-FFF2-40B4-BE49-F238E27FC236}">
-                <a16:creationId xmlns:a16="http://schemas.microsoft.com/office/drawing/2014/main" id="{885DEA6F-B991-4C40-8C05-D6FD0F18A532}"/>
+          <p:cNvPr id="112" name="Image 4" descr="/tmp/claude-0/-home-claude/946d89a8-cd71-5282-af60-49c1ab8579af/scratchpad/work/assets/cpu_blue.png">
+            <a:extLst>
+              <a:ext uri="{FF2B5EF4-FFF2-40B4-BE49-F238E27FC236}">
+                <a16:creationId xmlns:a16="http://schemas.microsoft.com/office/drawing/2014/main" id="{59B55848-6326-4A74-864A-7DDC4F1FD18E}"/>
               </a:ext>
             </a:extLst>
           </p:cNvPr>
@@ -18838,7 +18800,7 @@
           <p:nvPr/>
         </p:nvPicPr>
         <p:blipFill>
-          <a:blip r:embed="rId7"/>
+          <a:blip r:embed="rId5"/>
           <a:stretch>
             <a:fillRect/>
           </a:stretch>
@@ -18855,10 +18817,10 @@
       </p:pic>
       <p:pic>
         <p:nvPicPr>
-          <p:cNvPr id="66" name="Image 3" descr="/tmp/claude-0/-home-claude/946d89a8-cd71-5282-af60-49c1ab8579af/scratchpad/work/assets/users_blue.png">
-            <a:extLst>
-              <a:ext uri="{FF2B5EF4-FFF2-40B4-BE49-F238E27FC236}">
-                <a16:creationId xmlns:a16="http://schemas.microsoft.com/office/drawing/2014/main" id="{1EA4566F-5A70-4095-8FBB-BCF2BAE1242A}"/>
+          <p:cNvPr id="113" name="Image 3" descr="/tmp/claude-0/-home-claude/946d89a8-cd71-5282-af60-49c1ab8579af/scratchpad/work/assets/users_blue.png">
+            <a:extLst>
+              <a:ext uri="{FF2B5EF4-FFF2-40B4-BE49-F238E27FC236}">
+                <a16:creationId xmlns:a16="http://schemas.microsoft.com/office/drawing/2014/main" id="{6FE27514-E797-471C-A874-12F7A22F8C2B}"/>
               </a:ext>
             </a:extLst>
           </p:cNvPr>
@@ -18868,7 +18830,7 @@
           <p:nvPr/>
         </p:nvPicPr>
         <p:blipFill>
-          <a:blip r:embed="rId8"/>
+          <a:blip r:embed="rId6"/>
           <a:stretch>
             <a:fillRect/>
           </a:stretch>
@@ -18885,10 +18847,10 @@
       </p:pic>
       <p:pic>
         <p:nvPicPr>
-          <p:cNvPr id="8" name="그래픽 7" descr="전자 메일 단색으로 채워진">
-            <a:extLst>
-              <a:ext uri="{FF2B5EF4-FFF2-40B4-BE49-F238E27FC236}">
-                <a16:creationId xmlns:a16="http://schemas.microsoft.com/office/drawing/2014/main" id="{448C896C-0F04-42CA-9C1A-CD4ACF47AA49}"/>
+          <p:cNvPr id="114" name="그래픽 113" descr="전자 메일 단색으로 채워진">
+            <a:extLst>
+              <a:ext uri="{FF2B5EF4-FFF2-40B4-BE49-F238E27FC236}">
+                <a16:creationId xmlns:a16="http://schemas.microsoft.com/office/drawing/2014/main" id="{5C4CFB68-319B-4074-A7AE-CCFBFC1CC7C7}"/>
               </a:ext>
             </a:extLst>
           </p:cNvPr>
@@ -18898,13 +18860,13 @@
           <p:nvPr/>
         </p:nvPicPr>
         <p:blipFill>
-          <a:blip r:embed="rId9">
+          <a:blip r:embed="rId7">
             <a:extLst>
               <a:ext uri="{28A0092B-C50C-407E-A947-70E740481C1C}">
                 <a14:useLocalDpi xmlns:a14="http://schemas.microsoft.com/office/drawing/2010/main" val="0"/>
               </a:ext>
               <a:ext uri="{96DAC541-7B7A-43D3-8B79-37D633B846F1}">
-                <asvg:svgBlip xmlns:asvg="http://schemas.microsoft.com/office/drawing/2016/SVG/main" r:embed="rId10"/>
+                <asvg:svgBlip xmlns:asvg="http://schemas.microsoft.com/office/drawing/2016/SVG/main" r:embed="rId8"/>
               </a:ext>
             </a:extLst>
           </a:blip>
@@ -18916,6 +18878,37 @@
           <a:xfrm>
             <a:off x="6817188" y="4753390"/>
             <a:ext cx="320492" cy="320492"/>
+          </a:xfrm>
+          <a:prstGeom prst="rect">
+            <a:avLst/>
+          </a:prstGeom>
+        </p:spPr>
+      </p:pic>
+      <p:pic>
+        <p:nvPicPr>
+          <p:cNvPr id="115" name="그림 114">
+            <a:hlinkClick r:id="rId9" action="ppaction://hlinkfile"/>
+            <a:extLst>
+              <a:ext uri="{FF2B5EF4-FFF2-40B4-BE49-F238E27FC236}">
+                <a16:creationId xmlns:a16="http://schemas.microsoft.com/office/drawing/2014/main" id="{B272E263-4696-4EAE-9F1A-1A0873FEEE21}"/>
+              </a:ext>
+            </a:extLst>
+          </p:cNvPr>
+          <p:cNvPicPr>
+            <a:picLocks noChangeAspect="1"/>
+          </p:cNvPicPr>
+          <p:nvPr/>
+        </p:nvPicPr>
+        <p:blipFill>
+          <a:blip r:embed="rId10"/>
+          <a:stretch>
+            <a:fillRect/>
+          </a:stretch>
+        </p:blipFill>
+        <p:spPr>
+          <a:xfrm>
+            <a:off x="407561" y="1158001"/>
+            <a:ext cx="3401618" cy="2548297"/>
           </a:xfrm>
           <a:prstGeom prst="rect">
             <a:avLst/>

--- a/presentation/260916_AI활용_업무지침네비게이터_6차 수정.pptx
+++ b/presentation/260916_AI활용_업무지침네비게이터_6차 수정.pptx
@@ -12,10 +12,10 @@
     <p:sldId id="263" r:id="rId3"/>
     <p:sldId id="278" r:id="rId4"/>
     <p:sldId id="279" r:id="rId5"/>
-    <p:sldId id="284" r:id="rId6"/>
+    <p:sldId id="287" r:id="rId6"/>
     <p:sldId id="280" r:id="rId7"/>
     <p:sldId id="283" r:id="rId8"/>
-    <p:sldId id="285" r:id="rId9"/>
+    <p:sldId id="288" r:id="rId9"/>
   </p:sldIdLst>
   <p:sldSz cx="9906000" cy="6858000" type="A4"/>
   <p:notesSz cx="6858000" cy="9144000"/>
@@ -547,6 +547,86 @@
     <p:extLst>
       <p:ext uri="{BB962C8B-B14F-4D97-AF65-F5344CB8AC3E}">
         <p14:creationId xmlns:p14="http://schemas.microsoft.com/office/powerpoint/2010/main" val="4285272690"/>
+      </p:ext>
+    </p:extLst>
+  </p:cSld>
+  <p:clrMapOvr>
+    <a:masterClrMapping/>
+  </p:clrMapOvr>
+</p:notes>
+</file>
+
+<file path=ppt/notesSlides/notesSlide4.xml><?xml version="1.0" encoding="utf-8"?>
+<p:notes xmlns:a="http://schemas.openxmlformats.org/drawingml/2006/main" xmlns:r="http://schemas.openxmlformats.org/officeDocument/2006/relationships" xmlns:p="http://schemas.openxmlformats.org/presentationml/2006/main">
+  <p:cSld>
+    <p:spTree>
+      <p:nvGrpSpPr>
+        <p:cNvPr id="1" name=""/>
+        <p:cNvGrpSpPr/>
+        <p:nvPr/>
+      </p:nvGrpSpPr>
+      <p:grpSpPr>
+        <a:xfrm>
+          <a:off x="0" y="0"/>
+          <a:ext cx="0" cy="0"/>
+          <a:chOff x="0" y="0"/>
+          <a:chExt cx="0" cy="0"/>
+        </a:xfrm>
+      </p:grpSpPr>
+      <p:sp>
+        <p:nvSpPr>
+          <p:cNvPr id="2" name="슬라이드 이미지 개체 틀 1"/>
+          <p:cNvSpPr>
+            <a:spLocks noGrp="1" noRot="1" noChangeAspect="1"/>
+          </p:cNvSpPr>
+          <p:nvPr>
+            <p:ph type="sldImg"/>
+          </p:nvPr>
+        </p:nvSpPr>
+        <p:spPr/>
+      </p:sp>
+      <p:sp>
+        <p:nvSpPr>
+          <p:cNvPr id="3" name="슬라이드 노트 개체 틀 2"/>
+          <p:cNvSpPr>
+            <a:spLocks noGrp="1"/>
+          </p:cNvSpPr>
+          <p:nvPr>
+            <p:ph type="body" idx="1"/>
+          </p:nvPr>
+        </p:nvSpPr>
+        <p:spPr/>
+        <p:txBody>
+          <a:bodyPr/>
+          <a:lstStyle/>
+          <a:p>
+            <a:endParaRPr lang="ko-KR" altLang="en-US"/>
+          </a:p>
+        </p:txBody>
+      </p:sp>
+      <p:sp>
+        <p:nvSpPr>
+          <p:cNvPr id="4" name="슬라이드 번호 개체 틀 3"/>
+          <p:cNvSpPr>
+            <a:spLocks noGrp="1"/>
+          </p:cNvSpPr>
+          <p:nvPr>
+            <p:ph type="sldNum" sz="quarter" idx="5"/>
+          </p:nvPr>
+        </p:nvSpPr>
+        <p:spPr/>
+        <p:txBody>
+          <a:bodyPr/>
+          <a:lstStyle/>
+          <a:p>
+            <a:endParaRPr lang="ko-KR" altLang="en-US"/>
+          </a:p>
+        </p:txBody>
+      </p:sp>
+    </p:spTree>
+    <p:extLst>
+      <p:ext uri="{BB962C8B-B14F-4D97-AF65-F5344CB8AC3E}">
+        <p14:creationId xmlns:p14="http://schemas.microsoft.com/office/powerpoint/2010/main" val="4151298242"/>
       </p:ext>
     </p:extLst>
   </p:cSld>
@@ -9656,7 +9736,7 @@
                 </a:solidFill>
                 <a:latin typeface="+mn-ea"/>
               </a:rPr>
-              <a:t>3</a:t>
+              <a:t>3~4</a:t>
             </a:r>
             <a:r>
               <a:rPr lang="ko-KR" altLang="en-US" sz="1200" b="1" spc="-100">
@@ -13032,7 +13112,7 @@
           </a:xfrm>
           <a:prstGeom prst="roundRect">
             <a:avLst>
-              <a:gd name="adj" fmla="val 7059"/>
+              <a:gd name="adj" fmla="val 2633"/>
             </a:avLst>
           </a:prstGeom>
           <a:solidFill>
@@ -13053,6 +13133,36 @@
           </a:effectLst>
         </p:spPr>
       </p:sp>
+      <p:pic>
+        <p:nvPicPr>
+          <p:cNvPr id="5" name="그림 4">
+            <a:extLst>
+              <a:ext uri="{FF2B5EF4-FFF2-40B4-BE49-F238E27FC236}">
+                <a16:creationId xmlns:a16="http://schemas.microsoft.com/office/drawing/2014/main" id="{E0C020AD-6E54-46E0-97B0-59A01BE40467}"/>
+              </a:ext>
+            </a:extLst>
+          </p:cNvPr>
+          <p:cNvPicPr>
+            <a:picLocks noChangeAspect="1"/>
+          </p:cNvPicPr>
+          <p:nvPr/>
+        </p:nvPicPr>
+        <p:blipFill>
+          <a:blip r:embed="rId3"/>
+          <a:stretch>
+            <a:fillRect/>
+          </a:stretch>
+        </p:blipFill>
+        <p:spPr>
+          <a:xfrm>
+            <a:off x="398361" y="1459854"/>
+            <a:ext cx="4445565" cy="2254216"/>
+          </a:xfrm>
+          <a:prstGeom prst="rect">
+            <a:avLst/>
+          </a:prstGeom>
+        </p:spPr>
+      </p:pic>
       <p:sp>
         <p:nvSpPr>
           <p:cNvPr id="91" name="Shape 10">
@@ -13072,7 +13182,7 @@
           </a:xfrm>
           <a:prstGeom prst="roundRect">
             <a:avLst>
-              <a:gd name="adj" fmla="val 7059"/>
+              <a:gd name="adj" fmla="val 2633"/>
             </a:avLst>
           </a:prstGeom>
           <a:solidFill>
@@ -13272,7 +13382,7 @@
         </p:nvSpPr>
         <p:spPr>
           <a:xfrm>
-            <a:off x="6621341" y="4975043"/>
+            <a:off x="6652514" y="4975043"/>
             <a:ext cx="2928750" cy="634989"/>
           </a:xfrm>
           <a:prstGeom prst="roundRect">
@@ -13321,7 +13431,7 @@
         </p:nvSpPr>
         <p:spPr>
           <a:xfrm>
-            <a:off x="630194" y="4975043"/>
+            <a:off x="661367" y="4975043"/>
             <a:ext cx="2928750" cy="634989"/>
           </a:xfrm>
           <a:prstGeom prst="roundRect">
@@ -13370,7 +13480,7 @@
         </p:nvSpPr>
         <p:spPr>
           <a:xfrm>
-            <a:off x="3624568" y="4975043"/>
+            <a:off x="3655741" y="4975043"/>
             <a:ext cx="2928750" cy="634989"/>
           </a:xfrm>
           <a:prstGeom prst="roundRect">
@@ -13417,7 +13527,7 @@
         </p:nvSpPr>
         <p:spPr>
           <a:xfrm>
-            <a:off x="6621341" y="4986728"/>
+            <a:off x="6652514" y="4986728"/>
             <a:ext cx="1044224" cy="369332"/>
           </a:xfrm>
           <a:prstGeom prst="rect">
@@ -13457,7 +13567,7 @@
         </p:nvSpPr>
         <p:spPr>
           <a:xfrm>
-            <a:off x="7392159" y="5025200"/>
+            <a:off x="7423332" y="5025200"/>
             <a:ext cx="1670730" cy="292388"/>
           </a:xfrm>
           <a:prstGeom prst="rect">
@@ -13475,7 +13585,7 @@
               <a:rPr lang="ko-KR" altLang="en-US" sz="1300" spc="-40">
                 <a:latin typeface="+mn-ea"/>
               </a:rPr>
-              <a:t>종합 정답률 상승 </a:t>
+              <a:t>골든셋 정답률 상승 </a:t>
             </a:r>
             <a:endParaRPr lang="ko-KR" altLang="en-US" sz="1300" spc="-40">
               <a:solidFill>
@@ -13502,7 +13612,7 @@
         </p:nvSpPr>
         <p:spPr>
           <a:xfrm>
-            <a:off x="630194" y="4986728"/>
+            <a:off x="661367" y="4986728"/>
             <a:ext cx="759638" cy="369332"/>
           </a:xfrm>
           <a:prstGeom prst="rect">
@@ -13539,7 +13649,7 @@
         </p:nvSpPr>
         <p:spPr>
           <a:xfrm>
-            <a:off x="1447713" y="5025200"/>
+            <a:off x="1478886" y="5025200"/>
             <a:ext cx="2176854" cy="292388"/>
           </a:xfrm>
           <a:prstGeom prst="rect">
@@ -13582,7 +13692,7 @@
         </p:nvSpPr>
         <p:spPr>
           <a:xfrm>
-            <a:off x="3624568" y="4986728"/>
+            <a:off x="3655741" y="4986728"/>
             <a:ext cx="728638" cy="369332"/>
           </a:xfrm>
           <a:prstGeom prst="rect">
@@ -13622,7 +13732,7 @@
         </p:nvSpPr>
         <p:spPr>
           <a:xfrm>
-            <a:off x="4395269" y="5025200"/>
+            <a:off x="4426442" y="5025200"/>
             <a:ext cx="2200109" cy="292388"/>
           </a:xfrm>
           <a:prstGeom prst="rect">
@@ -13667,7 +13777,7 @@
         </p:nvSpPr>
         <p:spPr>
           <a:xfrm>
-            <a:off x="4395269" y="5341747"/>
+            <a:off x="4426442" y="5341747"/>
             <a:ext cx="2200109" cy="276999"/>
           </a:xfrm>
           <a:prstGeom prst="rect">
@@ -13727,17 +13837,7 @@
                 <a:latin typeface="+mn-ea"/>
                 <a:sym typeface="Wingdings" panose="05000000000000000000" pitchFamily="2" charset="2"/>
               </a:rPr>
-              <a:t>89%, F1 score</a:t>
-            </a:r>
-            <a:r>
-              <a:rPr lang="ko-KR" altLang="en-US" sz="1200" b="1" spc="-60">
-                <a:solidFill>
-                  <a:srgbClr val="0F64C0"/>
-                </a:solidFill>
-                <a:latin typeface="+mn-ea"/>
-                <a:sym typeface="Wingdings" panose="05000000000000000000" pitchFamily="2" charset="2"/>
-              </a:rPr>
-              <a:t>로 측정</a:t>
+              <a:t>89%</a:t>
             </a:r>
             <a:r>
               <a:rPr lang="en-US" altLang="ko-KR" sz="1200" b="1" spc="-60">
@@ -13771,7 +13871,7 @@
         </p:nvSpPr>
         <p:spPr>
           <a:xfrm>
-            <a:off x="1489277" y="5341747"/>
+            <a:off x="1520450" y="5341747"/>
             <a:ext cx="2139762" cy="276999"/>
           </a:xfrm>
           <a:prstGeom prst="rect">
@@ -13842,17 +13942,7 @@
                 <a:latin typeface="+mn-ea"/>
                 <a:sym typeface="Wingdings" panose="05000000000000000000" pitchFamily="2" charset="2"/>
               </a:rPr>
-              <a:t>79%, </a:t>
-            </a:r>
-            <a:r>
-              <a:rPr lang="ko-KR" altLang="en-US" sz="1200" b="1" spc="-60">
-                <a:solidFill>
-                  <a:srgbClr val="0F64C0"/>
-                </a:solidFill>
-                <a:latin typeface="+mn-ea"/>
-                <a:sym typeface="Wingdings" panose="05000000000000000000" pitchFamily="2" charset="2"/>
-              </a:rPr>
-              <a:t>일치율로 측정</a:t>
+              <a:t>79%</a:t>
             </a:r>
             <a:endParaRPr lang="ko-KR" altLang="en-US" sz="1200" b="1" spc="-60">
               <a:solidFill>
@@ -13877,7 +13967,7 @@
         </p:nvSpPr>
         <p:spPr>
           <a:xfrm>
-            <a:off x="7392159" y="5341747"/>
+            <a:off x="7423332" y="5341747"/>
             <a:ext cx="2252206" cy="276999"/>
           </a:xfrm>
           <a:prstGeom prst="rect">
@@ -13909,47 +13999,7 @@
                 <a:latin typeface="+mn-ea"/>
                 <a:sym typeface="Wingdings" panose="05000000000000000000" pitchFamily="2" charset="2"/>
               </a:rPr>
-              <a:t>19</a:t>
-            </a:r>
-            <a:r>
-              <a:rPr lang="ko-KR" altLang="en-US" sz="1200" b="1" spc="-80">
-                <a:solidFill>
-                  <a:srgbClr val="0F64C0"/>
-                </a:solidFill>
-                <a:latin typeface="+mn-ea"/>
-                <a:sym typeface="Wingdings" panose="05000000000000000000" pitchFamily="2" charset="2"/>
-              </a:rPr>
-              <a:t>건</a:t>
-            </a:r>
-            <a:r>
-              <a:rPr lang="en-US" altLang="ko-KR" sz="1200" b="1" spc="-80">
-                <a:solidFill>
-                  <a:srgbClr val="0F64C0"/>
-                </a:solidFill>
-                <a:latin typeface="+mn-ea"/>
-                <a:sym typeface="Wingdings" panose="05000000000000000000" pitchFamily="2" charset="2"/>
-              </a:rPr>
-              <a:t> </a:t>
-            </a:r>
-            <a:r>
-              <a:rPr lang="ko-KR" altLang="en-US" sz="1200" b="1" spc="-80">
-                <a:solidFill>
-                  <a:srgbClr val="0F64C0"/>
-                </a:solidFill>
-                <a:latin typeface="+mn-ea"/>
-                <a:sym typeface="Wingdings" panose="05000000000000000000" pitchFamily="2" charset="2"/>
-              </a:rPr>
-              <a:t>자동 채점</a:t>
-            </a:r>
-            <a:r>
-              <a:rPr lang="en-US" altLang="ko-KR" sz="1200" b="1" spc="-80">
-                <a:solidFill>
-                  <a:srgbClr val="0F64C0"/>
-                </a:solidFill>
-                <a:latin typeface="+mn-ea"/>
-                <a:sym typeface="Wingdings" panose="05000000000000000000" pitchFamily="2" charset="2"/>
-              </a:rPr>
-              <a:t>, 37 </a:t>
+              <a:t>37 </a:t>
             </a:r>
             <a:r>
               <a:rPr lang="ko-KR" altLang="en-US" sz="1200" b="1" spc="-40">
@@ -13967,7 +14017,25 @@
                 </a:solidFill>
                 <a:latin typeface="+mn-ea"/>
               </a:rPr>
-              <a:t>68%</a:t>
+              <a:t>58 </a:t>
+            </a:r>
+            <a:r>
+              <a:rPr lang="ko-KR" altLang="en-US" sz="1200" b="1" spc="-40">
+                <a:solidFill>
+                  <a:srgbClr val="2082C8"/>
+                </a:solidFill>
+                <a:latin typeface="+mn-ea"/>
+              </a:rPr>
+              <a:t>→</a:t>
+            </a:r>
+            <a:r>
+              <a:rPr lang="en-US" altLang="ko-KR" sz="1200" b="1" spc="-40">
+                <a:solidFill>
+                  <a:srgbClr val="2082C8"/>
+                </a:solidFill>
+                <a:latin typeface="+mn-ea"/>
+              </a:rPr>
+              <a:t> 68%</a:t>
             </a:r>
             <a:r>
               <a:rPr lang="en-US" altLang="ko-KR" sz="1200" b="1" spc="-80">
@@ -14002,8 +14070,8 @@
         </p:nvSpPr>
         <p:spPr>
           <a:xfrm>
-            <a:off x="400396" y="4003465"/>
-            <a:ext cx="9176682" cy="505290"/>
+            <a:off x="351453" y="4003465"/>
+            <a:ext cx="9267683" cy="505290"/>
           </a:xfrm>
           <a:prstGeom prst="rect">
             <a:avLst/>
@@ -14069,7 +14137,7 @@
                 </a:solidFill>
                 <a:latin typeface="+mn-ea"/>
               </a:rPr>
-              <a:t>종합 정답률 개선 </a:t>
+              <a:t>골든셋 정답률 개선 </a:t>
             </a:r>
           </a:p>
         </p:txBody>
@@ -14423,7 +14491,7 @@
             <p:nvPr/>
           </p:nvPicPr>
           <p:blipFill>
-            <a:blip r:embed="rId3" cstate="print"/>
+            <a:blip r:embed="rId4" cstate="print"/>
             <a:srcRect/>
             <a:stretch>
               <a:fillRect/>
@@ -14442,35 +14510,6 @@
           </p:spPr>
         </p:pic>
       </p:grpSp>
-      <p:pic>
-        <p:nvPicPr>
-          <p:cNvPr id="6" name="그림 5">
-            <a:extLst>
-              <a:ext uri="{FF2B5EF4-FFF2-40B4-BE49-F238E27FC236}">
-                <a16:creationId xmlns:a16="http://schemas.microsoft.com/office/drawing/2014/main" id="{652B555B-12D7-43F1-9863-D55660601EF6}"/>
-              </a:ext>
-            </a:extLst>
-          </p:cNvPr>
-          <p:cNvPicPr>
-            <a:picLocks noChangeAspect="1"/>
-          </p:cNvPicPr>
-          <p:nvPr/>
-        </p:nvPicPr>
-        <p:blipFill rotWithShape="1">
-          <a:blip r:embed="rId4"/>
-          <a:srcRect t="1" b="-7835"/>
-          <a:stretch/>
-        </p:blipFill>
-        <p:spPr>
-          <a:xfrm>
-            <a:off x="390005" y="1495099"/>
-            <a:ext cx="4441768" cy="2446498"/>
-          </a:xfrm>
-          <a:prstGeom prst="rect">
-            <a:avLst/>
-          </a:prstGeom>
-        </p:spPr>
-      </p:pic>
       <p:sp>
         <p:nvSpPr>
           <p:cNvPr id="74" name="사각형: 둥근 모서리 73">
@@ -14533,6 +14572,12 @@
               </a:rPr>
               <a:t>로 질문→검색→답변 과정 트레이싱</a:t>
             </a:r>
+            <a:r>
+              <a:rPr lang="en-US" altLang="ko-KR" sz="1500" b="1" spc="-30">
+                <a:latin typeface="+mn-ea"/>
+              </a:rPr>
+              <a:t>*</a:t>
+            </a:r>
             <a:endParaRPr lang="ko-KR" altLang="en-US" sz="1500" b="1" spc="-30"/>
           </a:p>
         </p:txBody>
@@ -14785,7 +14830,7 @@
         <p:spPr>
           <a:xfrm>
             <a:off x="5481206" y="3235224"/>
-            <a:ext cx="4221262" cy="543739"/>
+            <a:ext cx="4618758" cy="543739"/>
           </a:xfrm>
           <a:prstGeom prst="rect">
             <a:avLst/>
@@ -14807,7 +14852,7 @@
               <a:rPr lang="ko-KR" altLang="en-US" sz="1300" spc="-40">
                 <a:latin typeface="+mn-ea"/>
               </a:rPr>
-              <a:t>반복 재평가로 개선 효과를 정량 확인 </a:t>
+              <a:t>반복 재평가로 개선 효과 정량적 확인 </a:t>
             </a:r>
             <a:endParaRPr lang="en-US" altLang="ko-KR" sz="1300" spc="-40">
               <a:latin typeface="+mn-ea"/>
@@ -14820,48 +14865,48 @@
               </a:spcBef>
             </a:pPr>
             <a:r>
-              <a:rPr lang="en-US" altLang="ko-KR" sz="1300" spc="-40">
+              <a:rPr lang="en-US" altLang="ko-KR" sz="1300" spc="-80">
                 <a:latin typeface="+mn-ea"/>
               </a:rPr>
               <a:t>3</a:t>
             </a:r>
             <a:r>
-              <a:rPr lang="ko-KR" altLang="en-US" sz="1300" spc="-40">
-                <a:latin typeface="+mn-ea"/>
-              </a:rPr>
-              <a:t>라운드에 걸쳐 정답률 단계적 개선 </a:t>
-            </a:r>
-            <a:r>
-              <a:rPr lang="en-US" altLang="ko-KR" sz="1300" spc="-40">
+              <a:rPr lang="ko-KR" altLang="en-US" sz="1300" spc="-80">
+                <a:latin typeface="+mn-ea"/>
+              </a:rPr>
+              <a:t>라운드에 걸쳐 골든셋 정답률 단계적 개선 </a:t>
+            </a:r>
+            <a:r>
+              <a:rPr lang="en-US" altLang="ko-KR" sz="1300" spc="-80">
                 <a:latin typeface="+mn-ea"/>
               </a:rPr>
               <a:t>(37</a:t>
             </a:r>
             <a:r>
-              <a:rPr lang="ko-KR" altLang="en-US" sz="1300" spc="-40">
+              <a:rPr lang="ko-KR" altLang="en-US" sz="1300" spc="-80">
                 <a:latin typeface="+mn-ea"/>
               </a:rPr>
               <a:t>→</a:t>
             </a:r>
             <a:r>
-              <a:rPr lang="en-US" altLang="ko-KR" sz="1300" spc="-40">
+              <a:rPr lang="en-US" altLang="ko-KR" sz="1300" spc="-80">
                 <a:latin typeface="+mn-ea"/>
               </a:rPr>
               <a:t>58</a:t>
             </a:r>
             <a:r>
-              <a:rPr lang="ko-KR" altLang="en-US" sz="1300" spc="-40">
+              <a:rPr lang="ko-KR" altLang="en-US" sz="1300" spc="-80">
                 <a:latin typeface="+mn-ea"/>
               </a:rPr>
               <a:t>→</a:t>
             </a:r>
             <a:r>
-              <a:rPr lang="en-US" altLang="ko-KR" sz="1300" spc="-40">
+              <a:rPr lang="en-US" altLang="ko-KR" sz="1300" spc="-80">
                 <a:latin typeface="+mn-ea"/>
               </a:rPr>
               <a:t>68%)</a:t>
             </a:r>
-            <a:endParaRPr lang="ko-KR" altLang="en-US" sz="1300" spc="-40">
+            <a:endParaRPr lang="ko-KR" altLang="en-US" sz="1300" spc="-80">
               <a:latin typeface="+mn-ea"/>
             </a:endParaRPr>
           </a:p>
@@ -15031,7 +15076,7 @@
                 <a:buNone/>
               </a:pPr>
               <a:r>
-                <a:rPr lang="en-US" sz="1100" b="1" dirty="0">
+                <a:rPr lang="en-US" sz="1100" b="1">
                   <a:solidFill>
                     <a:srgbClr val="FFFFFF"/>
                   </a:solidFill>
@@ -15039,7 +15084,7 @@
                   <a:ea typeface="HY견고딕" pitchFamily="34" charset="-122"/>
                   <a:cs typeface="HY견고딕" pitchFamily="34" charset="-120"/>
                 </a:rPr>
-                <a:t>①</a:t>
+                <a:t>1</a:t>
               </a:r>
               <a:endParaRPr lang="en-US" sz="1100" dirty="0"/>
             </a:p>
@@ -15123,7 +15168,7 @@
                 <a:buNone/>
               </a:pPr>
               <a:r>
-                <a:rPr lang="en-US" sz="1100" b="1" dirty="0">
+                <a:rPr lang="en-US" sz="1100" b="1">
                   <a:solidFill>
                     <a:srgbClr val="FFFFFF"/>
                   </a:solidFill>
@@ -15131,7 +15176,7 @@
                   <a:ea typeface="HY견고딕" pitchFamily="34" charset="-122"/>
                   <a:cs typeface="HY견고딕" pitchFamily="34" charset="-120"/>
                 </a:rPr>
-                <a:t>②</a:t>
+                <a:t>2</a:t>
               </a:r>
               <a:endParaRPr lang="en-US" sz="1100" dirty="0"/>
             </a:p>
@@ -15215,7 +15260,7 @@
                 <a:buNone/>
               </a:pPr>
               <a:r>
-                <a:rPr lang="en-US" sz="1100" b="1" dirty="0">
+                <a:rPr lang="en-US" sz="1100" b="1">
                   <a:solidFill>
                     <a:srgbClr val="FFFFFF"/>
                   </a:solidFill>
@@ -15223,7 +15268,7 @@
                   <a:ea typeface="HY견고딕" pitchFamily="34" charset="-122"/>
                   <a:cs typeface="HY견고딕" pitchFamily="34" charset="-120"/>
                 </a:rPr>
-                <a:t>③</a:t>
+                <a:t>3</a:t>
               </a:r>
               <a:endParaRPr lang="en-US" sz="1100" dirty="0"/>
             </a:p>
@@ -15307,7 +15352,7 @@
                 <a:buNone/>
               </a:pPr>
               <a:r>
-                <a:rPr lang="en-US" sz="1100" b="1" dirty="0">
+                <a:rPr lang="en-US" sz="1100" b="1">
                   <a:solidFill>
                     <a:srgbClr val="FFFFFF"/>
                   </a:solidFill>
@@ -15315,7 +15360,7 @@
                   <a:ea typeface="HY견고딕" pitchFamily="34" charset="-122"/>
                   <a:cs typeface="HY견고딕" pitchFamily="34" charset="-120"/>
                 </a:rPr>
-                <a:t>④</a:t>
+                <a:t>4</a:t>
               </a:r>
               <a:endParaRPr lang="en-US" sz="1100" dirty="0"/>
             </a:p>
@@ -15613,7 +15658,7 @@
         </p:nvSpPr>
         <p:spPr>
           <a:xfrm>
-            <a:off x="6621341" y="6083404"/>
+            <a:off x="6652514" y="6083404"/>
             <a:ext cx="2928750" cy="634989"/>
           </a:xfrm>
           <a:prstGeom prst="roundRect">
@@ -15662,7 +15707,7 @@
         </p:nvSpPr>
         <p:spPr>
           <a:xfrm>
-            <a:off x="630194" y="6083404"/>
+            <a:off x="661367" y="6083404"/>
             <a:ext cx="2928750" cy="634989"/>
           </a:xfrm>
           <a:prstGeom prst="roundRect">
@@ -15713,7 +15758,7 @@
         </p:nvSpPr>
         <p:spPr>
           <a:xfrm>
-            <a:off x="3624568" y="6083404"/>
+            <a:off x="3655741" y="6083404"/>
             <a:ext cx="2928750" cy="634989"/>
           </a:xfrm>
           <a:prstGeom prst="roundRect">
@@ -15762,7 +15807,7 @@
         </p:nvSpPr>
         <p:spPr>
           <a:xfrm>
-            <a:off x="6621341" y="6095089"/>
+            <a:off x="6652514" y="6095089"/>
             <a:ext cx="1044224" cy="369332"/>
           </a:xfrm>
           <a:prstGeom prst="rect">
@@ -15805,7 +15850,7 @@
         </p:nvSpPr>
         <p:spPr>
           <a:xfrm>
-            <a:off x="7399086" y="6133561"/>
+            <a:off x="7430259" y="6133561"/>
             <a:ext cx="1670730" cy="292388"/>
           </a:xfrm>
           <a:prstGeom prst="rect">
@@ -15850,7 +15895,7 @@
         </p:nvSpPr>
         <p:spPr>
           <a:xfrm>
-            <a:off x="630194" y="6095089"/>
+            <a:off x="661367" y="6095089"/>
             <a:ext cx="759638" cy="369332"/>
           </a:xfrm>
           <a:prstGeom prst="rect">
@@ -15887,7 +15932,7 @@
         </p:nvSpPr>
         <p:spPr>
           <a:xfrm>
-            <a:off x="1444249" y="6133561"/>
+            <a:off x="1475422" y="6133561"/>
             <a:ext cx="2176854" cy="292388"/>
           </a:xfrm>
           <a:prstGeom prst="rect">
@@ -15930,7 +15975,7 @@
         </p:nvSpPr>
         <p:spPr>
           <a:xfrm>
-            <a:off x="3624568" y="6095089"/>
+            <a:off x="3655741" y="6095089"/>
             <a:ext cx="728638" cy="369332"/>
           </a:xfrm>
           <a:prstGeom prst="rect">
@@ -15970,7 +16015,7 @@
         </p:nvSpPr>
         <p:spPr>
           <a:xfrm>
-            <a:off x="4402196" y="6133561"/>
+            <a:off x="4433369" y="6133561"/>
             <a:ext cx="2200109" cy="292388"/>
           </a:xfrm>
           <a:prstGeom prst="rect">
@@ -16015,7 +16060,7 @@
         </p:nvSpPr>
         <p:spPr>
           <a:xfrm>
-            <a:off x="4402196" y="6450108"/>
+            <a:off x="4433369" y="6450108"/>
             <a:ext cx="2200109" cy="276999"/>
           </a:xfrm>
           <a:prstGeom prst="rect">
@@ -16119,7 +16164,7 @@
         </p:nvSpPr>
         <p:spPr>
           <a:xfrm>
-            <a:off x="1485813" y="6450108"/>
+            <a:off x="1516986" y="6450108"/>
             <a:ext cx="2139762" cy="276999"/>
           </a:xfrm>
           <a:prstGeom prst="rect">
@@ -16215,7 +16260,7 @@
         </p:nvSpPr>
         <p:spPr>
           <a:xfrm>
-            <a:off x="7399086" y="6450108"/>
+            <a:off x="7430259" y="6450108"/>
             <a:ext cx="2252206" cy="276999"/>
           </a:xfrm>
           <a:prstGeom prst="rect">
@@ -16311,10 +16356,225 @@
           </a:p>
         </p:txBody>
       </p:sp>
+      <p:sp>
+        <p:nvSpPr>
+          <p:cNvPr id="72" name="TextBox 71">
+            <a:extLst>
+              <a:ext uri="{FF2B5EF4-FFF2-40B4-BE49-F238E27FC236}">
+                <a16:creationId xmlns:a16="http://schemas.microsoft.com/office/drawing/2014/main" id="{9F1399A8-F879-4FEC-9DFB-1D11467EC11B}"/>
+              </a:ext>
+            </a:extLst>
+          </p:cNvPr>
+          <p:cNvSpPr txBox="1"/>
+          <p:nvPr/>
+        </p:nvSpPr>
+        <p:spPr>
+          <a:xfrm>
+            <a:off x="2566555" y="3664298"/>
+            <a:ext cx="2286571" cy="276999"/>
+          </a:xfrm>
+          <a:prstGeom prst="rect">
+            <a:avLst/>
+          </a:prstGeom>
+          <a:noFill/>
+        </p:spPr>
+        <p:txBody>
+          <a:bodyPr wrap="square" rtlCol="0">
+            <a:spAutoFit/>
+          </a:bodyPr>
+          <a:lstStyle/>
+          <a:p>
+            <a:pPr algn="r"/>
+            <a:r>
+              <a:rPr lang="en-US" altLang="ko-KR" sz="1200">
+                <a:latin typeface="+mn-ea"/>
+              </a:rPr>
+              <a:t>* </a:t>
+            </a:r>
+            <a:r>
+              <a:rPr lang="ko-KR" altLang="en-US" sz="1200">
+                <a:latin typeface="+mn-ea"/>
+              </a:rPr>
+              <a:t>골든셋 </a:t>
+            </a:r>
+            <a:r>
+              <a:rPr lang="en-US" altLang="ko-KR" sz="1200">
+                <a:latin typeface="+mn-ea"/>
+              </a:rPr>
+              <a:t>19</a:t>
+            </a:r>
+            <a:r>
+              <a:rPr lang="ko-KR" altLang="en-US" sz="1200">
+                <a:latin typeface="+mn-ea"/>
+              </a:rPr>
+              <a:t>건 기준</a:t>
+            </a:r>
+          </a:p>
+        </p:txBody>
+      </p:sp>
+      <p:grpSp>
+        <p:nvGrpSpPr>
+          <p:cNvPr id="10" name="그룹 9">
+            <a:extLst>
+              <a:ext uri="{FF2B5EF4-FFF2-40B4-BE49-F238E27FC236}">
+                <a16:creationId xmlns:a16="http://schemas.microsoft.com/office/drawing/2014/main" id="{A879A11C-BFE7-4663-8070-C7683062E7FC}"/>
+              </a:ext>
+            </a:extLst>
+          </p:cNvPr>
+          <p:cNvGrpSpPr/>
+          <p:nvPr/>
+        </p:nvGrpSpPr>
+        <p:grpSpPr>
+          <a:xfrm>
+            <a:off x="1065233" y="2172115"/>
+            <a:ext cx="3820041" cy="551408"/>
+            <a:chOff x="-3319430" y="2677076"/>
+            <a:chExt cx="3820041" cy="551408"/>
+          </a:xfrm>
+        </p:grpSpPr>
+        <p:sp>
+          <p:nvSpPr>
+            <p:cNvPr id="9" name="사각형: 둥근 모서리 8">
+              <a:extLst>
+                <a:ext uri="{FF2B5EF4-FFF2-40B4-BE49-F238E27FC236}">
+                  <a16:creationId xmlns:a16="http://schemas.microsoft.com/office/drawing/2014/main" id="{7034B27B-D7F7-49BF-8CF1-7AA52843A412}"/>
+                </a:ext>
+              </a:extLst>
+            </p:cNvPr>
+            <p:cNvSpPr/>
+            <p:nvPr/>
+          </p:nvSpPr>
+          <p:spPr>
+            <a:xfrm>
+              <a:off x="-3319430" y="2677076"/>
+              <a:ext cx="3820041" cy="551408"/>
+            </a:xfrm>
+            <a:prstGeom prst="roundRect">
+              <a:avLst/>
+            </a:prstGeom>
+            <a:noFill/>
+            <a:ln w="19050">
+              <a:solidFill>
+                <a:srgbClr val="0070C0"/>
+              </a:solidFill>
+            </a:ln>
+          </p:spPr>
+          <p:style>
+            <a:lnRef idx="2">
+              <a:schemeClr val="accent1">
+                <a:shade val="50000"/>
+              </a:schemeClr>
+            </a:lnRef>
+            <a:fillRef idx="1">
+              <a:schemeClr val="accent1"/>
+            </a:fillRef>
+            <a:effectRef idx="0">
+              <a:schemeClr val="accent1"/>
+            </a:effectRef>
+            <a:fontRef idx="minor">
+              <a:schemeClr val="lt1"/>
+            </a:fontRef>
+          </p:style>
+          <p:txBody>
+            <a:bodyPr rtlCol="0" anchor="ctr"/>
+            <a:lstStyle/>
+            <a:p>
+              <a:pPr algn="ctr"/>
+              <a:endParaRPr lang="ko-KR" altLang="en-US"/>
+            </a:p>
+          </p:txBody>
+        </p:sp>
+        <p:pic>
+          <p:nvPicPr>
+            <p:cNvPr id="73" name="그림 72">
+              <a:extLst>
+                <a:ext uri="{FF2B5EF4-FFF2-40B4-BE49-F238E27FC236}">
+                  <a16:creationId xmlns:a16="http://schemas.microsoft.com/office/drawing/2014/main" id="{B2414B01-EA20-4F93-BFED-40DAB6411FC0}"/>
+                </a:ext>
+              </a:extLst>
+            </p:cNvPr>
+            <p:cNvPicPr>
+              <a:picLocks noChangeAspect="1"/>
+            </p:cNvPicPr>
+            <p:nvPr/>
+          </p:nvPicPr>
+          <p:blipFill>
+            <a:blip r:embed="rId5"/>
+            <a:stretch>
+              <a:fillRect/>
+            </a:stretch>
+          </p:blipFill>
+          <p:spPr>
+            <a:xfrm>
+              <a:off x="-3254283" y="2706981"/>
+              <a:ext cx="3711262" cy="487624"/>
+            </a:xfrm>
+            <a:prstGeom prst="rect">
+              <a:avLst/>
+            </a:prstGeom>
+            <a:noFill/>
+            <a:ln w="19050">
+              <a:noFill/>
+            </a:ln>
+          </p:spPr>
+        </p:pic>
+      </p:grpSp>
+      <p:sp>
+        <p:nvSpPr>
+          <p:cNvPr id="75" name="사각형: 둥근 모서리 74">
+            <a:extLst>
+              <a:ext uri="{FF2B5EF4-FFF2-40B4-BE49-F238E27FC236}">
+                <a16:creationId xmlns:a16="http://schemas.microsoft.com/office/drawing/2014/main" id="{B3369A65-3330-4382-810B-16F512116A9D}"/>
+              </a:ext>
+            </a:extLst>
+          </p:cNvPr>
+          <p:cNvSpPr/>
+          <p:nvPr/>
+        </p:nvSpPr>
+        <p:spPr>
+          <a:xfrm>
+            <a:off x="3278007" y="1601231"/>
+            <a:ext cx="1597664" cy="169741"/>
+          </a:xfrm>
+          <a:prstGeom prst="roundRect">
+            <a:avLst/>
+          </a:prstGeom>
+          <a:noFill/>
+          <a:ln w="19050">
+            <a:solidFill>
+              <a:srgbClr val="0070C0"/>
+            </a:solidFill>
+          </a:ln>
+        </p:spPr>
+        <p:style>
+          <a:lnRef idx="2">
+            <a:schemeClr val="accent1">
+              <a:shade val="50000"/>
+            </a:schemeClr>
+          </a:lnRef>
+          <a:fillRef idx="1">
+            <a:schemeClr val="accent1"/>
+          </a:fillRef>
+          <a:effectRef idx="0">
+            <a:schemeClr val="accent1"/>
+          </a:effectRef>
+          <a:fontRef idx="minor">
+            <a:schemeClr val="lt1"/>
+          </a:fontRef>
+        </p:style>
+        <p:txBody>
+          <a:bodyPr rtlCol="0" anchor="ctr"/>
+          <a:lstStyle/>
+          <a:p>
+            <a:pPr algn="ctr"/>
+            <a:endParaRPr lang="ko-KR" altLang="en-US"/>
+          </a:p>
+        </p:txBody>
+      </p:sp>
     </p:spTree>
     <p:extLst>
       <p:ext uri="{BB962C8B-B14F-4D97-AF65-F5344CB8AC3E}">
-        <p14:creationId xmlns:p14="http://schemas.microsoft.com/office/powerpoint/2010/main" val="3514393205"/>
+        <p14:creationId xmlns:p14="http://schemas.microsoft.com/office/powerpoint/2010/main" val="187503836"/>
       </p:ext>
     </p:extLst>
   </p:cSld>
@@ -21097,6 +21357,288 @@
       </p:grpSpPr>
       <p:sp>
         <p:nvSpPr>
+          <p:cNvPr id="91" name="사각형: 둥근 모서리 90">
+            <a:extLst>
+              <a:ext uri="{FF2B5EF4-FFF2-40B4-BE49-F238E27FC236}">
+                <a16:creationId xmlns:a16="http://schemas.microsoft.com/office/drawing/2014/main" id="{48188336-0194-41F9-8F5E-A01D05CA77ED}"/>
+              </a:ext>
+            </a:extLst>
+          </p:cNvPr>
+          <p:cNvSpPr>
+            <a:spLocks noGrp="1"/>
+          </p:cNvSpPr>
+          <p:nvPr/>
+        </p:nvSpPr>
+        <p:spPr>
+          <a:xfrm>
+            <a:off x="3448587" y="2042591"/>
+            <a:ext cx="2957789" cy="2077698"/>
+          </a:xfrm>
+          <a:prstGeom prst="roundRect">
+            <a:avLst>
+              <a:gd name="adj" fmla="val 5139"/>
+            </a:avLst>
+          </a:prstGeom>
+          <a:solidFill>
+            <a:schemeClr val="bg1"/>
+          </a:solidFill>
+          <a:ln>
+            <a:noFill/>
+          </a:ln>
+          <a:effectLst>
+            <a:outerShdw blurRad="228600" dist="50800" dir="5400000" rotWithShape="0">
+              <a:srgbClr val="1B2A4A">
+                <a:alpha val="22000"/>
+              </a:srgbClr>
+            </a:outerShdw>
+          </a:effectLst>
+        </p:spPr>
+        <p:txBody>
+          <a:bodyPr anchor="ctr" anchorCtr="0"/>
+          <a:lstStyle/>
+          <a:p>
+            <a:pPr algn="ctr"/>
+            <a:endParaRPr lang="ko-KR" altLang="en-US" sz="1400" b="1"/>
+          </a:p>
+        </p:txBody>
+      </p:sp>
+      <p:sp>
+        <p:nvSpPr>
+          <p:cNvPr id="92" name="사각형: 둥근 모서리 91">
+            <a:extLst>
+              <a:ext uri="{FF2B5EF4-FFF2-40B4-BE49-F238E27FC236}">
+                <a16:creationId xmlns:a16="http://schemas.microsoft.com/office/drawing/2014/main" id="{53B7273A-BDF9-437A-8C55-2D48EB8ED118}"/>
+              </a:ext>
+            </a:extLst>
+          </p:cNvPr>
+          <p:cNvSpPr>
+            <a:spLocks noGrp="1"/>
+          </p:cNvSpPr>
+          <p:nvPr/>
+        </p:nvSpPr>
+        <p:spPr>
+          <a:xfrm>
+            <a:off x="6601065" y="2042591"/>
+            <a:ext cx="2957789" cy="2077698"/>
+          </a:xfrm>
+          <a:prstGeom prst="roundRect">
+            <a:avLst>
+              <a:gd name="adj" fmla="val 5139"/>
+            </a:avLst>
+          </a:prstGeom>
+          <a:solidFill>
+            <a:schemeClr val="bg1"/>
+          </a:solidFill>
+          <a:ln>
+            <a:noFill/>
+          </a:ln>
+          <a:effectLst>
+            <a:outerShdw blurRad="228600" dist="50800" dir="5400000" rotWithShape="0">
+              <a:srgbClr val="1B2A4A">
+                <a:alpha val="22000"/>
+              </a:srgbClr>
+            </a:outerShdw>
+          </a:effectLst>
+        </p:spPr>
+        <p:txBody>
+          <a:bodyPr anchor="ctr" anchorCtr="0"/>
+          <a:lstStyle/>
+          <a:p>
+            <a:pPr algn="ctr"/>
+            <a:endParaRPr lang="ko-KR" altLang="en-US" sz="1400" b="1"/>
+          </a:p>
+        </p:txBody>
+      </p:sp>
+      <p:sp>
+        <p:nvSpPr>
+          <p:cNvPr id="90" name="사각형: 둥근 모서리 89">
+            <a:extLst>
+              <a:ext uri="{FF2B5EF4-FFF2-40B4-BE49-F238E27FC236}">
+                <a16:creationId xmlns:a16="http://schemas.microsoft.com/office/drawing/2014/main" id="{F432CC7F-46D1-4AF6-ADB6-0B1FC20372EE}"/>
+              </a:ext>
+            </a:extLst>
+          </p:cNvPr>
+          <p:cNvSpPr>
+            <a:spLocks noGrp="1"/>
+          </p:cNvSpPr>
+          <p:nvPr/>
+        </p:nvSpPr>
+        <p:spPr>
+          <a:xfrm>
+            <a:off x="298630" y="2042591"/>
+            <a:ext cx="2957789" cy="2077698"/>
+          </a:xfrm>
+          <a:prstGeom prst="roundRect">
+            <a:avLst>
+              <a:gd name="adj" fmla="val 5139"/>
+            </a:avLst>
+          </a:prstGeom>
+          <a:solidFill>
+            <a:schemeClr val="bg1"/>
+          </a:solidFill>
+          <a:ln>
+            <a:noFill/>
+          </a:ln>
+          <a:effectLst>
+            <a:outerShdw blurRad="228600" dist="50800" dir="5400000" rotWithShape="0">
+              <a:srgbClr val="1B2A4A">
+                <a:alpha val="22000"/>
+              </a:srgbClr>
+            </a:outerShdw>
+          </a:effectLst>
+        </p:spPr>
+        <p:txBody>
+          <a:bodyPr anchor="ctr" anchorCtr="0"/>
+          <a:lstStyle/>
+          <a:p>
+            <a:pPr algn="ctr"/>
+            <a:endParaRPr lang="ko-KR" altLang="en-US" sz="1400" b="1"/>
+          </a:p>
+        </p:txBody>
+      </p:sp>
+      <p:sp>
+        <p:nvSpPr>
+          <p:cNvPr id="88" name="사각형: 둥근 모서리 87">
+            <a:extLst>
+              <a:ext uri="{FF2B5EF4-FFF2-40B4-BE49-F238E27FC236}">
+                <a16:creationId xmlns:a16="http://schemas.microsoft.com/office/drawing/2014/main" id="{F4133112-5F7A-4066-BF47-F14ECA240030}"/>
+              </a:ext>
+            </a:extLst>
+          </p:cNvPr>
+          <p:cNvSpPr>
+            <a:spLocks noGrp="1"/>
+          </p:cNvSpPr>
+          <p:nvPr/>
+        </p:nvSpPr>
+        <p:spPr>
+          <a:xfrm>
+            <a:off x="298630" y="4424983"/>
+            <a:ext cx="2957789" cy="2079727"/>
+          </a:xfrm>
+          <a:prstGeom prst="roundRect">
+            <a:avLst>
+              <a:gd name="adj" fmla="val 5139"/>
+            </a:avLst>
+          </a:prstGeom>
+          <a:solidFill>
+            <a:schemeClr val="bg1"/>
+          </a:solidFill>
+          <a:ln>
+            <a:noFill/>
+          </a:ln>
+          <a:effectLst>
+            <a:outerShdw blurRad="228600" dist="50800" dir="5400000" rotWithShape="0">
+              <a:srgbClr val="1B2A4A">
+                <a:alpha val="22000"/>
+              </a:srgbClr>
+            </a:outerShdw>
+          </a:effectLst>
+        </p:spPr>
+        <p:txBody>
+          <a:bodyPr anchor="ctr" anchorCtr="0"/>
+          <a:lstStyle/>
+          <a:p>
+            <a:pPr algn="ctr"/>
+            <a:endParaRPr lang="ko-KR" altLang="en-US" sz="1400" b="1"/>
+          </a:p>
+        </p:txBody>
+      </p:sp>
+      <p:sp>
+        <p:nvSpPr>
+          <p:cNvPr id="89" name="사각형: 둥근 모서리 88">
+            <a:extLst>
+              <a:ext uri="{FF2B5EF4-FFF2-40B4-BE49-F238E27FC236}">
+                <a16:creationId xmlns:a16="http://schemas.microsoft.com/office/drawing/2014/main" id="{42CD2C78-F92D-43E1-9817-7DC040D68104}"/>
+              </a:ext>
+            </a:extLst>
+          </p:cNvPr>
+          <p:cNvSpPr>
+            <a:spLocks noGrp="1"/>
+          </p:cNvSpPr>
+          <p:nvPr/>
+        </p:nvSpPr>
+        <p:spPr>
+          <a:xfrm>
+            <a:off x="3448587" y="4424983"/>
+            <a:ext cx="2957789" cy="2079727"/>
+          </a:xfrm>
+          <a:prstGeom prst="roundRect">
+            <a:avLst>
+              <a:gd name="adj" fmla="val 5139"/>
+            </a:avLst>
+          </a:prstGeom>
+          <a:solidFill>
+            <a:schemeClr val="bg1"/>
+          </a:solidFill>
+          <a:ln>
+            <a:noFill/>
+          </a:ln>
+          <a:effectLst>
+            <a:outerShdw blurRad="228600" dist="50800" dir="5400000" rotWithShape="0">
+              <a:srgbClr val="1B2A4A">
+                <a:alpha val="22000"/>
+              </a:srgbClr>
+            </a:outerShdw>
+          </a:effectLst>
+        </p:spPr>
+        <p:txBody>
+          <a:bodyPr anchor="ctr" anchorCtr="0"/>
+          <a:lstStyle/>
+          <a:p>
+            <a:pPr algn="ctr"/>
+            <a:endParaRPr lang="ko-KR" altLang="en-US" sz="1400" b="1"/>
+          </a:p>
+        </p:txBody>
+      </p:sp>
+      <p:sp>
+        <p:nvSpPr>
+          <p:cNvPr id="87" name="사각형: 둥근 모서리 86">
+            <a:extLst>
+              <a:ext uri="{FF2B5EF4-FFF2-40B4-BE49-F238E27FC236}">
+                <a16:creationId xmlns:a16="http://schemas.microsoft.com/office/drawing/2014/main" id="{1618651D-F4E5-4D6F-B934-F71DF2559191}"/>
+              </a:ext>
+            </a:extLst>
+          </p:cNvPr>
+          <p:cNvSpPr>
+            <a:spLocks noGrp="1"/>
+          </p:cNvSpPr>
+          <p:nvPr/>
+        </p:nvSpPr>
+        <p:spPr>
+          <a:xfrm>
+            <a:off x="6601065" y="4427012"/>
+            <a:ext cx="2957789" cy="2077698"/>
+          </a:xfrm>
+          <a:prstGeom prst="roundRect">
+            <a:avLst>
+              <a:gd name="adj" fmla="val 5139"/>
+            </a:avLst>
+          </a:prstGeom>
+          <a:solidFill>
+            <a:schemeClr val="bg1"/>
+          </a:solidFill>
+          <a:ln>
+            <a:noFill/>
+          </a:ln>
+          <a:effectLst>
+            <a:outerShdw blurRad="228600" dist="50800" dir="5400000" rotWithShape="0">
+              <a:srgbClr val="1B2A4A">
+                <a:alpha val="22000"/>
+              </a:srgbClr>
+            </a:outerShdw>
+          </a:effectLst>
+        </p:spPr>
+        <p:txBody>
+          <a:bodyPr anchor="ctr" anchorCtr="0"/>
+          <a:lstStyle/>
+          <a:p>
+            <a:pPr algn="ctr"/>
+            <a:endParaRPr lang="ko-KR" altLang="en-US" sz="1400" b="1"/>
+          </a:p>
+        </p:txBody>
+      </p:sp>
+      <p:sp>
+        <p:nvSpPr>
           <p:cNvPr id="4" name="TextBox 3">
             <a:extLst>
               <a:ext uri="{FF2B5EF4-FFF2-40B4-BE49-F238E27FC236}">
@@ -21239,288 +21781,6 @@
               <a:ea typeface="맑은 고딕" panose="020B0503020000020004" pitchFamily="50" charset="-127"/>
               <a:cs typeface="+mn-cs"/>
             </a:endParaRPr>
-          </a:p>
-        </p:txBody>
-      </p:sp>
-      <p:sp>
-        <p:nvSpPr>
-          <p:cNvPr id="35" name="사각형: 둥근 모서리 34">
-            <a:extLst>
-              <a:ext uri="{FF2B5EF4-FFF2-40B4-BE49-F238E27FC236}">
-                <a16:creationId xmlns:a16="http://schemas.microsoft.com/office/drawing/2014/main" id="{F5FA1B93-D2F1-4D7A-AFE3-44FD432A5A39}"/>
-              </a:ext>
-            </a:extLst>
-          </p:cNvPr>
-          <p:cNvSpPr>
-            <a:spLocks noGrp="1"/>
-          </p:cNvSpPr>
-          <p:nvPr/>
-        </p:nvSpPr>
-        <p:spPr>
-          <a:xfrm>
-            <a:off x="301491" y="1897117"/>
-            <a:ext cx="2957789" cy="2207293"/>
-          </a:xfrm>
-          <a:prstGeom prst="roundRect">
-            <a:avLst>
-              <a:gd name="adj" fmla="val 5139"/>
-            </a:avLst>
-          </a:prstGeom>
-          <a:solidFill>
-            <a:schemeClr val="bg1"/>
-          </a:solidFill>
-          <a:ln>
-            <a:noFill/>
-          </a:ln>
-          <a:effectLst>
-            <a:outerShdw blurRad="228600" dist="50800" dir="5400000" rotWithShape="0">
-              <a:srgbClr val="1B2A4A">
-                <a:alpha val="22000"/>
-              </a:srgbClr>
-            </a:outerShdw>
-          </a:effectLst>
-        </p:spPr>
-        <p:txBody>
-          <a:bodyPr anchor="ctr" anchorCtr="0"/>
-          <a:lstStyle/>
-          <a:p>
-            <a:pPr algn="ctr"/>
-            <a:endParaRPr lang="ko-KR" altLang="en-US" sz="1400" b="1"/>
-          </a:p>
-        </p:txBody>
-      </p:sp>
-      <p:sp>
-        <p:nvSpPr>
-          <p:cNvPr id="53" name="사각형: 둥근 모서리 52">
-            <a:extLst>
-              <a:ext uri="{FF2B5EF4-FFF2-40B4-BE49-F238E27FC236}">
-                <a16:creationId xmlns:a16="http://schemas.microsoft.com/office/drawing/2014/main" id="{53D6825E-24DE-4FAD-A016-71C0614FAA26}"/>
-              </a:ext>
-            </a:extLst>
-          </p:cNvPr>
-          <p:cNvSpPr>
-            <a:spLocks noGrp="1"/>
-          </p:cNvSpPr>
-          <p:nvPr/>
-        </p:nvSpPr>
-        <p:spPr>
-          <a:xfrm>
-            <a:off x="3455302" y="1897117"/>
-            <a:ext cx="2957789" cy="2207293"/>
-          </a:xfrm>
-          <a:prstGeom prst="roundRect">
-            <a:avLst>
-              <a:gd name="adj" fmla="val 5139"/>
-            </a:avLst>
-          </a:prstGeom>
-          <a:solidFill>
-            <a:schemeClr val="bg1"/>
-          </a:solidFill>
-          <a:ln>
-            <a:noFill/>
-          </a:ln>
-          <a:effectLst>
-            <a:outerShdw blurRad="228600" dist="50800" dir="5400000" rotWithShape="0">
-              <a:srgbClr val="1B2A4A">
-                <a:alpha val="22000"/>
-              </a:srgbClr>
-            </a:outerShdw>
-          </a:effectLst>
-        </p:spPr>
-        <p:txBody>
-          <a:bodyPr anchor="ctr" anchorCtr="0"/>
-          <a:lstStyle/>
-          <a:p>
-            <a:pPr algn="ctr"/>
-            <a:endParaRPr lang="ko-KR" altLang="en-US" sz="1400" b="1"/>
-          </a:p>
-        </p:txBody>
-      </p:sp>
-      <p:sp>
-        <p:nvSpPr>
-          <p:cNvPr id="54" name="사각형: 둥근 모서리 53">
-            <a:extLst>
-              <a:ext uri="{FF2B5EF4-FFF2-40B4-BE49-F238E27FC236}">
-                <a16:creationId xmlns:a16="http://schemas.microsoft.com/office/drawing/2014/main" id="{85FE3290-77E4-48A5-B8D7-B73927E4DE92}"/>
-              </a:ext>
-            </a:extLst>
-          </p:cNvPr>
-          <p:cNvSpPr>
-            <a:spLocks noGrp="1"/>
-          </p:cNvSpPr>
-          <p:nvPr/>
-        </p:nvSpPr>
-        <p:spPr>
-          <a:xfrm>
-            <a:off x="6590310" y="1897117"/>
-            <a:ext cx="2957789" cy="2207293"/>
-          </a:xfrm>
-          <a:prstGeom prst="roundRect">
-            <a:avLst>
-              <a:gd name="adj" fmla="val 5139"/>
-            </a:avLst>
-          </a:prstGeom>
-          <a:solidFill>
-            <a:schemeClr val="bg1"/>
-          </a:solidFill>
-          <a:ln>
-            <a:noFill/>
-          </a:ln>
-          <a:effectLst>
-            <a:outerShdw blurRad="228600" dist="50800" dir="5400000" rotWithShape="0">
-              <a:srgbClr val="1B2A4A">
-                <a:alpha val="22000"/>
-              </a:srgbClr>
-            </a:outerShdw>
-          </a:effectLst>
-        </p:spPr>
-        <p:txBody>
-          <a:bodyPr anchor="ctr" anchorCtr="0"/>
-          <a:lstStyle/>
-          <a:p>
-            <a:pPr algn="ctr"/>
-            <a:endParaRPr lang="ko-KR" altLang="en-US" sz="1400" b="1"/>
-          </a:p>
-        </p:txBody>
-      </p:sp>
-      <p:sp>
-        <p:nvSpPr>
-          <p:cNvPr id="55" name="사각형: 둥근 모서리 54">
-            <a:extLst>
-              <a:ext uri="{FF2B5EF4-FFF2-40B4-BE49-F238E27FC236}">
-                <a16:creationId xmlns:a16="http://schemas.microsoft.com/office/drawing/2014/main" id="{9A620DBB-EFCB-4F92-AA76-89B7BAF59B6C}"/>
-              </a:ext>
-            </a:extLst>
-          </p:cNvPr>
-          <p:cNvSpPr>
-            <a:spLocks noGrp="1"/>
-          </p:cNvSpPr>
-          <p:nvPr/>
-        </p:nvSpPr>
-        <p:spPr>
-          <a:xfrm>
-            <a:off x="301491" y="4293958"/>
-            <a:ext cx="2957789" cy="2207293"/>
-          </a:xfrm>
-          <a:prstGeom prst="roundRect">
-            <a:avLst>
-              <a:gd name="adj" fmla="val 5139"/>
-            </a:avLst>
-          </a:prstGeom>
-          <a:solidFill>
-            <a:schemeClr val="bg1"/>
-          </a:solidFill>
-          <a:ln>
-            <a:noFill/>
-          </a:ln>
-          <a:effectLst>
-            <a:outerShdw blurRad="228600" dist="50800" dir="5400000" rotWithShape="0">
-              <a:srgbClr val="1B2A4A">
-                <a:alpha val="22000"/>
-              </a:srgbClr>
-            </a:outerShdw>
-          </a:effectLst>
-        </p:spPr>
-        <p:txBody>
-          <a:bodyPr anchor="ctr" anchorCtr="0"/>
-          <a:lstStyle/>
-          <a:p>
-            <a:pPr algn="ctr"/>
-            <a:endParaRPr lang="ko-KR" altLang="en-US" sz="1400" b="1"/>
-          </a:p>
-        </p:txBody>
-      </p:sp>
-      <p:sp>
-        <p:nvSpPr>
-          <p:cNvPr id="56" name="사각형: 둥근 모서리 55">
-            <a:extLst>
-              <a:ext uri="{FF2B5EF4-FFF2-40B4-BE49-F238E27FC236}">
-                <a16:creationId xmlns:a16="http://schemas.microsoft.com/office/drawing/2014/main" id="{65BE00B6-0C96-443B-810B-AAD414CBBD65}"/>
-              </a:ext>
-            </a:extLst>
-          </p:cNvPr>
-          <p:cNvSpPr>
-            <a:spLocks noGrp="1"/>
-          </p:cNvSpPr>
-          <p:nvPr/>
-        </p:nvSpPr>
-        <p:spPr>
-          <a:xfrm>
-            <a:off x="3455302" y="4293958"/>
-            <a:ext cx="2957789" cy="2207293"/>
-          </a:xfrm>
-          <a:prstGeom prst="roundRect">
-            <a:avLst>
-              <a:gd name="adj" fmla="val 5139"/>
-            </a:avLst>
-          </a:prstGeom>
-          <a:solidFill>
-            <a:schemeClr val="bg1"/>
-          </a:solidFill>
-          <a:ln>
-            <a:noFill/>
-          </a:ln>
-          <a:effectLst>
-            <a:outerShdw blurRad="228600" dist="50800" dir="5400000" rotWithShape="0">
-              <a:srgbClr val="1B2A4A">
-                <a:alpha val="22000"/>
-              </a:srgbClr>
-            </a:outerShdw>
-          </a:effectLst>
-        </p:spPr>
-        <p:txBody>
-          <a:bodyPr anchor="ctr" anchorCtr="0"/>
-          <a:lstStyle/>
-          <a:p>
-            <a:pPr algn="ctr"/>
-            <a:endParaRPr lang="ko-KR" altLang="en-US" sz="1400" b="1"/>
-          </a:p>
-        </p:txBody>
-      </p:sp>
-      <p:sp>
-        <p:nvSpPr>
-          <p:cNvPr id="58" name="사각형: 둥근 모서리 57">
-            <a:extLst>
-              <a:ext uri="{FF2B5EF4-FFF2-40B4-BE49-F238E27FC236}">
-                <a16:creationId xmlns:a16="http://schemas.microsoft.com/office/drawing/2014/main" id="{C995B696-ACFD-4781-8AFD-946FE4DD649D}"/>
-              </a:ext>
-            </a:extLst>
-          </p:cNvPr>
-          <p:cNvSpPr>
-            <a:spLocks noGrp="1"/>
-          </p:cNvSpPr>
-          <p:nvPr/>
-        </p:nvSpPr>
-        <p:spPr>
-          <a:xfrm>
-            <a:off x="6590310" y="4293958"/>
-            <a:ext cx="2957789" cy="2207293"/>
-          </a:xfrm>
-          <a:prstGeom prst="roundRect">
-            <a:avLst>
-              <a:gd name="adj" fmla="val 5139"/>
-            </a:avLst>
-          </a:prstGeom>
-          <a:solidFill>
-            <a:schemeClr val="bg1"/>
-          </a:solidFill>
-          <a:ln>
-            <a:noFill/>
-          </a:ln>
-          <a:effectLst>
-            <a:outerShdw blurRad="228600" dist="50800" dir="5400000" rotWithShape="0">
-              <a:srgbClr val="1B2A4A">
-                <a:alpha val="22000"/>
-              </a:srgbClr>
-            </a:outerShdw>
-          </a:effectLst>
-        </p:spPr>
-        <p:txBody>
-          <a:bodyPr anchor="ctr" anchorCtr="0"/>
-          <a:lstStyle/>
-          <a:p>
-            <a:pPr algn="ctr"/>
-            <a:endParaRPr lang="ko-KR" altLang="en-US" sz="1400" b="1"/>
           </a:p>
         </p:txBody>
       </p:sp>
@@ -22423,10 +22683,2233 @@
           </p:txBody>
         </p:sp>
       </p:grpSp>
+      <p:pic>
+        <p:nvPicPr>
+          <p:cNvPr id="28" name="그래픽 27" descr="사용자 단색으로 채워진">
+            <a:extLst>
+              <a:ext uri="{FF2B5EF4-FFF2-40B4-BE49-F238E27FC236}">
+                <a16:creationId xmlns:a16="http://schemas.microsoft.com/office/drawing/2014/main" id="{7B3836CD-900E-4FF9-9FAF-0A95CD6F1811}"/>
+              </a:ext>
+            </a:extLst>
+          </p:cNvPr>
+          <p:cNvPicPr>
+            <a:picLocks noChangeAspect="1"/>
+          </p:cNvPicPr>
+          <p:nvPr/>
+        </p:nvPicPr>
+        <p:blipFill>
+          <a:blip r:embed="rId3">
+            <a:extLst>
+              <a:ext uri="{28A0092B-C50C-407E-A947-70E740481C1C}">
+                <a14:useLocalDpi xmlns:a14="http://schemas.microsoft.com/office/drawing/2010/main" val="0"/>
+              </a:ext>
+              <a:ext uri="{96DAC541-7B7A-43D3-8B79-37D633B846F1}">
+                <asvg:svgBlip xmlns:asvg="http://schemas.microsoft.com/office/drawing/2016/SVG/main" r:embed="rId4"/>
+              </a:ext>
+            </a:extLst>
+          </a:blip>
+          <a:stretch>
+            <a:fillRect/>
+          </a:stretch>
+        </p:blipFill>
+        <p:spPr>
+          <a:xfrm>
+            <a:off x="466083" y="2837068"/>
+            <a:ext cx="597557" cy="597557"/>
+          </a:xfrm>
+          <a:prstGeom prst="rect">
+            <a:avLst/>
+          </a:prstGeom>
+        </p:spPr>
+      </p:pic>
+      <p:sp>
+        <p:nvSpPr>
+          <p:cNvPr id="3" name="TextBox 2">
+            <a:extLst>
+              <a:ext uri="{FF2B5EF4-FFF2-40B4-BE49-F238E27FC236}">
+                <a16:creationId xmlns:a16="http://schemas.microsoft.com/office/drawing/2014/main" id="{DBDC2B4E-7821-40EC-BE7F-F126EFDA9CAC}"/>
+              </a:ext>
+            </a:extLst>
+          </p:cNvPr>
+          <p:cNvSpPr txBox="1"/>
+          <p:nvPr/>
+        </p:nvSpPr>
+        <p:spPr>
+          <a:xfrm>
+            <a:off x="1089640" y="2974264"/>
+            <a:ext cx="2038023" cy="323165"/>
+          </a:xfrm>
+          <a:prstGeom prst="rect">
+            <a:avLst/>
+          </a:prstGeom>
+          <a:noFill/>
+        </p:spPr>
+        <p:txBody>
+          <a:bodyPr wrap="square" rtlCol="0">
+            <a:spAutoFit/>
+          </a:bodyPr>
+          <a:lstStyle/>
+          <a:p>
+            <a:r>
+              <a:rPr lang="ko-KR" altLang="en-US" sz="1500" b="1"/>
+              <a:t>사용자 질문 입력</a:t>
+            </a:r>
+          </a:p>
+        </p:txBody>
+      </p:sp>
+      <p:sp>
+        <p:nvSpPr>
+          <p:cNvPr id="32" name="이등변 삼각형 31">
+            <a:extLst>
+              <a:ext uri="{FF2B5EF4-FFF2-40B4-BE49-F238E27FC236}">
+                <a16:creationId xmlns:a16="http://schemas.microsoft.com/office/drawing/2014/main" id="{49E8036D-CF03-4342-82F7-0B969952CBD2}"/>
+              </a:ext>
+            </a:extLst>
+          </p:cNvPr>
+          <p:cNvSpPr/>
+          <p:nvPr/>
+        </p:nvSpPr>
+        <p:spPr>
+          <a:xfrm rot="5400000">
+            <a:off x="3264302" y="3023495"/>
+            <a:ext cx="166088" cy="120792"/>
+          </a:xfrm>
+          <a:prstGeom prst="triangle">
+            <a:avLst/>
+          </a:prstGeom>
+          <a:solidFill>
+            <a:schemeClr val="bg1">
+              <a:lumMod val="75000"/>
+            </a:schemeClr>
+          </a:solidFill>
+          <a:ln>
+            <a:noFill/>
+          </a:ln>
+        </p:spPr>
+        <p:style>
+          <a:lnRef idx="2">
+            <a:schemeClr val="accent1">
+              <a:shade val="50000"/>
+            </a:schemeClr>
+          </a:lnRef>
+          <a:fillRef idx="1">
+            <a:schemeClr val="accent1"/>
+          </a:fillRef>
+          <a:effectRef idx="0">
+            <a:schemeClr val="accent1"/>
+          </a:effectRef>
+          <a:fontRef idx="minor">
+            <a:schemeClr val="lt1"/>
+          </a:fontRef>
+        </p:style>
+        <p:txBody>
+          <a:bodyPr rtlCol="0" anchor="ctr"/>
+          <a:lstStyle/>
+          <a:p>
+            <a:pPr algn="ctr"/>
+            <a:endParaRPr lang="ko-KR" altLang="en-US"/>
+          </a:p>
+        </p:txBody>
+      </p:sp>
+      <p:grpSp>
+        <p:nvGrpSpPr>
+          <p:cNvPr id="10" name="그룹 9">
+            <a:extLst>
+              <a:ext uri="{FF2B5EF4-FFF2-40B4-BE49-F238E27FC236}">
+                <a16:creationId xmlns:a16="http://schemas.microsoft.com/office/drawing/2014/main" id="{73058B3F-64B0-4739-B4A3-02231852EFAB}"/>
+              </a:ext>
+            </a:extLst>
+          </p:cNvPr>
+          <p:cNvGrpSpPr/>
+          <p:nvPr/>
+        </p:nvGrpSpPr>
+        <p:grpSpPr>
+          <a:xfrm>
+            <a:off x="3586545" y="2881369"/>
+            <a:ext cx="464698" cy="508954"/>
+            <a:chOff x="3660053" y="2741160"/>
+            <a:chExt cx="464698" cy="508954"/>
+          </a:xfrm>
+        </p:grpSpPr>
+        <p:sp>
+          <p:nvSpPr>
+            <p:cNvPr id="33" name="Rounded Rectangle 6">
+              <a:extLst>
+                <a:ext uri="{FF2B5EF4-FFF2-40B4-BE49-F238E27FC236}">
+                  <a16:creationId xmlns:a16="http://schemas.microsoft.com/office/drawing/2014/main" id="{6D78DBAC-2E3E-449F-956F-865E1BD8BC19}"/>
+                </a:ext>
+              </a:extLst>
+            </p:cNvPr>
+            <p:cNvSpPr/>
+            <p:nvPr/>
+          </p:nvSpPr>
+          <p:spPr>
+            <a:xfrm>
+              <a:off x="3660053" y="2773680"/>
+              <a:ext cx="464698" cy="464698"/>
+            </a:xfrm>
+            <a:prstGeom prst="roundRect">
+              <a:avLst>
+                <a:gd name="adj" fmla="val 32000"/>
+              </a:avLst>
+            </a:prstGeom>
+            <a:solidFill>
+              <a:srgbClr val="EAF2FB"/>
+            </a:solidFill>
+            <a:ln>
+              <a:noFill/>
+            </a:ln>
+            <a:effectLst/>
+          </p:spPr>
+          <p:style>
+            <a:lnRef idx="1">
+              <a:schemeClr val="accent1"/>
+            </a:lnRef>
+            <a:fillRef idx="3">
+              <a:schemeClr val="accent1"/>
+            </a:fillRef>
+            <a:effectRef idx="2">
+              <a:schemeClr val="accent1"/>
+            </a:effectRef>
+            <a:fontRef idx="minor">
+              <a:schemeClr val="lt1"/>
+            </a:fontRef>
+          </p:style>
+          <p:txBody>
+            <a:bodyPr rtlCol="0" anchor="ctr"/>
+            <a:lstStyle/>
+            <a:p>
+              <a:pPr algn="ctr"/>
+              <a:endParaRPr/>
+            </a:p>
+          </p:txBody>
+        </p:sp>
+        <p:sp>
+          <p:nvSpPr>
+            <p:cNvPr id="34" name="TextBox 33">
+              <a:extLst>
+                <a:ext uri="{FF2B5EF4-FFF2-40B4-BE49-F238E27FC236}">
+                  <a16:creationId xmlns:a16="http://schemas.microsoft.com/office/drawing/2014/main" id="{A7FD9A55-8AEE-4A93-89A6-F020825C0547}"/>
+                </a:ext>
+              </a:extLst>
+            </p:cNvPr>
+            <p:cNvSpPr txBox="1"/>
+            <p:nvPr/>
+          </p:nvSpPr>
+          <p:spPr>
+            <a:xfrm>
+              <a:off x="3660053" y="2741160"/>
+              <a:ext cx="464698" cy="508954"/>
+            </a:xfrm>
+            <a:prstGeom prst="rect">
+              <a:avLst/>
+            </a:prstGeom>
+            <a:noFill/>
+          </p:spPr>
+          <p:txBody>
+            <a:bodyPr wrap="square" lIns="0" tIns="0" rIns="0" bIns="0" anchor="ctr">
+              <a:noAutofit/>
+            </a:bodyPr>
+            <a:lstStyle/>
+            <a:p>
+              <a:pPr algn="ctr">
+                <a:lnSpc>
+                  <a:spcPct val="100000"/>
+                </a:lnSpc>
+                <a:spcBef>
+                  <a:spcPts val="0"/>
+                </a:spcBef>
+                <a:spcAft>
+                  <a:spcPts val="0"/>
+                </a:spcAft>
+              </a:pPr>
+              <a:r>
+                <a:rPr sz="1260" b="0">
+                  <a:solidFill>
+                    <a:srgbClr val="1A1F2B"/>
+                  </a:solidFill>
+                </a:rPr>
+                <a:t>🖥</a:t>
+              </a:r>
+            </a:p>
+          </p:txBody>
+        </p:sp>
+      </p:grpSp>
+      <p:sp>
+        <p:nvSpPr>
+          <p:cNvPr id="36" name="TextBox 35">
+            <a:extLst>
+              <a:ext uri="{FF2B5EF4-FFF2-40B4-BE49-F238E27FC236}">
+                <a16:creationId xmlns:a16="http://schemas.microsoft.com/office/drawing/2014/main" id="{A533DBD0-9B02-4B4D-8821-9A873EB46F6B}"/>
+              </a:ext>
+            </a:extLst>
+          </p:cNvPr>
+          <p:cNvSpPr txBox="1"/>
+          <p:nvPr/>
+        </p:nvSpPr>
+        <p:spPr>
+          <a:xfrm>
+            <a:off x="3639271" y="2200230"/>
+            <a:ext cx="2497328" cy="332160"/>
+          </a:xfrm>
+          <a:prstGeom prst="rect">
+            <a:avLst/>
+          </a:prstGeom>
+          <a:noFill/>
+        </p:spPr>
+        <p:txBody>
+          <a:bodyPr wrap="square" lIns="0" tIns="0" rIns="0" bIns="0" anchor="t">
+            <a:noAutofit/>
+          </a:bodyPr>
+          <a:lstStyle/>
+          <a:p>
+            <a:pPr algn="l">
+              <a:spcBef>
+                <a:spcPts val="300"/>
+              </a:spcBef>
+              <a:spcAft>
+                <a:spcPts val="0"/>
+              </a:spcAft>
+            </a:pPr>
+            <a:r>
+              <a:rPr lang="en-US" sz="1200" b="1">
+                <a:solidFill>
+                  <a:srgbClr val="2F6FED"/>
+                </a:solidFill>
+                <a:latin typeface="+mn-ea"/>
+              </a:rPr>
+              <a:t>Next.js 14 · React · TypeScript</a:t>
+            </a:r>
+            <a:endParaRPr sz="1200" b="1">
+              <a:solidFill>
+                <a:srgbClr val="2F6FED"/>
+              </a:solidFill>
+              <a:latin typeface="+mn-ea"/>
+            </a:endParaRPr>
+          </a:p>
+        </p:txBody>
+      </p:sp>
+      <p:grpSp>
+        <p:nvGrpSpPr>
+          <p:cNvPr id="9" name="그룹 8">
+            <a:extLst>
+              <a:ext uri="{FF2B5EF4-FFF2-40B4-BE49-F238E27FC236}">
+                <a16:creationId xmlns:a16="http://schemas.microsoft.com/office/drawing/2014/main" id="{D099DC11-FA1B-4D73-A508-74E6C8353D26}"/>
+              </a:ext>
+            </a:extLst>
+          </p:cNvPr>
+          <p:cNvGrpSpPr/>
+          <p:nvPr/>
+        </p:nvGrpSpPr>
+        <p:grpSpPr>
+          <a:xfrm>
+            <a:off x="6749049" y="2881369"/>
+            <a:ext cx="464698" cy="508954"/>
+            <a:chOff x="6728267" y="2845337"/>
+            <a:chExt cx="464698" cy="508954"/>
+          </a:xfrm>
+        </p:grpSpPr>
+        <p:sp>
+          <p:nvSpPr>
+            <p:cNvPr id="38" name="Rounded Rectangle 18">
+              <a:extLst>
+                <a:ext uri="{FF2B5EF4-FFF2-40B4-BE49-F238E27FC236}">
+                  <a16:creationId xmlns:a16="http://schemas.microsoft.com/office/drawing/2014/main" id="{0585A007-AE8D-485A-9E67-8EC82B66FC1B}"/>
+                </a:ext>
+              </a:extLst>
+            </p:cNvPr>
+            <p:cNvSpPr/>
+            <p:nvPr/>
+          </p:nvSpPr>
+          <p:spPr>
+            <a:xfrm>
+              <a:off x="6728267" y="2867466"/>
+              <a:ext cx="464698" cy="464698"/>
+            </a:xfrm>
+            <a:prstGeom prst="roundRect">
+              <a:avLst>
+                <a:gd name="adj" fmla="val 32000"/>
+              </a:avLst>
+            </a:prstGeom>
+            <a:solidFill>
+              <a:srgbClr val="EAF2FB"/>
+            </a:solidFill>
+            <a:ln>
+              <a:noFill/>
+            </a:ln>
+            <a:effectLst/>
+          </p:spPr>
+          <p:style>
+            <a:lnRef idx="1">
+              <a:schemeClr val="accent1"/>
+            </a:lnRef>
+            <a:fillRef idx="3">
+              <a:schemeClr val="accent1"/>
+            </a:fillRef>
+            <a:effectRef idx="2">
+              <a:schemeClr val="accent1"/>
+            </a:effectRef>
+            <a:fontRef idx="minor">
+              <a:schemeClr val="lt1"/>
+            </a:fontRef>
+          </p:style>
+          <p:txBody>
+            <a:bodyPr rtlCol="0" anchor="ctr"/>
+            <a:lstStyle/>
+            <a:p>
+              <a:pPr algn="ctr"/>
+              <a:endParaRPr/>
+            </a:p>
+          </p:txBody>
+        </p:sp>
+        <p:sp>
+          <p:nvSpPr>
+            <p:cNvPr id="39" name="TextBox 38">
+              <a:extLst>
+                <a:ext uri="{FF2B5EF4-FFF2-40B4-BE49-F238E27FC236}">
+                  <a16:creationId xmlns:a16="http://schemas.microsoft.com/office/drawing/2014/main" id="{C6271F58-8C72-4211-A91B-60E062CC763F}"/>
+                </a:ext>
+              </a:extLst>
+            </p:cNvPr>
+            <p:cNvSpPr txBox="1"/>
+            <p:nvPr/>
+          </p:nvSpPr>
+          <p:spPr>
+            <a:xfrm>
+              <a:off x="6728267" y="2845337"/>
+              <a:ext cx="464698" cy="508954"/>
+            </a:xfrm>
+            <a:prstGeom prst="rect">
+              <a:avLst/>
+            </a:prstGeom>
+            <a:noFill/>
+          </p:spPr>
+          <p:txBody>
+            <a:bodyPr wrap="square" lIns="0" tIns="0" rIns="0" bIns="0" anchor="ctr">
+              <a:noAutofit/>
+            </a:bodyPr>
+            <a:lstStyle/>
+            <a:p>
+              <a:pPr algn="ctr">
+                <a:lnSpc>
+                  <a:spcPct val="100000"/>
+                </a:lnSpc>
+                <a:spcBef>
+                  <a:spcPts val="0"/>
+                </a:spcBef>
+                <a:spcAft>
+                  <a:spcPts val="0"/>
+                </a:spcAft>
+              </a:pPr>
+              <a:r>
+                <a:rPr sz="1260" b="0">
+                  <a:solidFill>
+                    <a:srgbClr val="1A1F2B"/>
+                  </a:solidFill>
+                </a:rPr>
+                <a:t>🔍</a:t>
+              </a:r>
+            </a:p>
+          </p:txBody>
+        </p:sp>
+      </p:grpSp>
+      <p:sp>
+        <p:nvSpPr>
+          <p:cNvPr id="41" name="TextBox 40">
+            <a:extLst>
+              <a:ext uri="{FF2B5EF4-FFF2-40B4-BE49-F238E27FC236}">
+                <a16:creationId xmlns:a16="http://schemas.microsoft.com/office/drawing/2014/main" id="{0FAC1551-30F9-472F-BAFE-1496762D72BF}"/>
+              </a:ext>
+            </a:extLst>
+          </p:cNvPr>
+          <p:cNvSpPr txBox="1"/>
+          <p:nvPr/>
+        </p:nvSpPr>
+        <p:spPr>
+          <a:xfrm>
+            <a:off x="7214856" y="2880745"/>
+            <a:ext cx="2556061" cy="577081"/>
+          </a:xfrm>
+          <a:prstGeom prst="rect">
+            <a:avLst/>
+          </a:prstGeom>
+          <a:noFill/>
+        </p:spPr>
+        <p:txBody>
+          <a:bodyPr wrap="square" rtlCol="0">
+            <a:spAutoFit/>
+          </a:bodyPr>
+          <a:lstStyle/>
+          <a:p>
+            <a:pPr>
+              <a:spcBef>
+                <a:spcPts val="300"/>
+              </a:spcBef>
+            </a:pPr>
+            <a:r>
+              <a:rPr lang="en-US" altLang="ko-KR" sz="1500" b="1">
+                <a:latin typeface="+mn-ea"/>
+              </a:rPr>
+              <a:t>Embedding </a:t>
+            </a:r>
+            <a:r>
+              <a:rPr lang="ko-KR" altLang="en-US" sz="1500" b="1">
+                <a:latin typeface="+mn-ea"/>
+              </a:rPr>
+              <a:t>검색</a:t>
+            </a:r>
+            <a:endParaRPr lang="en-US" altLang="ko-KR" sz="1500" b="1">
+              <a:latin typeface="+mn-ea"/>
+            </a:endParaRPr>
+          </a:p>
+          <a:p>
+            <a:pPr marL="93663" indent="-93663">
+              <a:spcBef>
+                <a:spcPts val="300"/>
+              </a:spcBef>
+              <a:buFont typeface="Wingdings" panose="05000000000000000000" pitchFamily="2" charset="2"/>
+              <a:buChar char="§"/>
+            </a:pPr>
+            <a:r>
+              <a:rPr lang="en-US" altLang="ko-KR" sz="1400">
+                <a:latin typeface="+mn-ea"/>
+              </a:rPr>
+              <a:t> </a:t>
+            </a:r>
+            <a:r>
+              <a:rPr lang="ko-KR" altLang="en-US" sz="1400" spc="-40">
+                <a:latin typeface="+mn-ea"/>
+              </a:rPr>
+              <a:t>부서별 메타데이터 필터링</a:t>
+            </a:r>
+          </a:p>
+        </p:txBody>
+      </p:sp>
+      <p:sp>
+        <p:nvSpPr>
+          <p:cNvPr id="42" name="TextBox 41">
+            <a:extLst>
+              <a:ext uri="{FF2B5EF4-FFF2-40B4-BE49-F238E27FC236}">
+                <a16:creationId xmlns:a16="http://schemas.microsoft.com/office/drawing/2014/main" id="{771BA1C2-1259-4AD1-81CD-25C743F18DEE}"/>
+              </a:ext>
+            </a:extLst>
+          </p:cNvPr>
+          <p:cNvSpPr txBox="1"/>
+          <p:nvPr/>
+        </p:nvSpPr>
+        <p:spPr>
+          <a:xfrm>
+            <a:off x="6760132" y="2200230"/>
+            <a:ext cx="2865159" cy="448758"/>
+          </a:xfrm>
+          <a:prstGeom prst="rect">
+            <a:avLst/>
+          </a:prstGeom>
+          <a:noFill/>
+        </p:spPr>
+        <p:txBody>
+          <a:bodyPr wrap="square" lIns="0" tIns="0" rIns="0" bIns="0" anchor="t">
+            <a:noAutofit/>
+          </a:bodyPr>
+          <a:lstStyle/>
+          <a:p>
+            <a:pPr algn="l">
+              <a:spcBef>
+                <a:spcPts val="300"/>
+              </a:spcBef>
+              <a:spcAft>
+                <a:spcPts val="0"/>
+              </a:spcAft>
+            </a:pPr>
+            <a:r>
+              <a:rPr lang="en-US" sz="1200" b="1">
+                <a:solidFill>
+                  <a:srgbClr val="2F6FED"/>
+                </a:solidFill>
+                <a:latin typeface="+mn-ea"/>
+              </a:rPr>
+              <a:t>RAG </a:t>
+            </a:r>
+            <a:r>
+              <a:rPr sz="1200" b="1">
+                <a:solidFill>
+                  <a:srgbClr val="2F6FED"/>
+                </a:solidFill>
+                <a:latin typeface="+mn-ea"/>
+              </a:rPr>
+              <a:t>· </a:t>
+            </a:r>
+            <a:r>
+              <a:rPr lang="en-US" altLang="ko-KR" sz="1200" b="1">
+                <a:solidFill>
+                  <a:srgbClr val="2F6FED"/>
+                </a:solidFill>
+                <a:latin typeface="+mn-ea"/>
+              </a:rPr>
+              <a:t>OpenAI Embedding </a:t>
+            </a:r>
+          </a:p>
+          <a:p>
+            <a:pPr algn="l">
+              <a:spcBef>
+                <a:spcPts val="300"/>
+              </a:spcBef>
+              <a:spcAft>
+                <a:spcPts val="0"/>
+              </a:spcAft>
+            </a:pPr>
+            <a:r>
+              <a:rPr sz="1200" b="1">
+                <a:solidFill>
+                  <a:srgbClr val="2F6FED"/>
+                </a:solidFill>
+                <a:latin typeface="+mn-ea"/>
+              </a:rPr>
+              <a:t>MemoryVectorStore</a:t>
+            </a:r>
+          </a:p>
+        </p:txBody>
+      </p:sp>
+      <p:sp>
+        <p:nvSpPr>
+          <p:cNvPr id="43" name="이등변 삼각형 42">
+            <a:extLst>
+              <a:ext uri="{FF2B5EF4-FFF2-40B4-BE49-F238E27FC236}">
+                <a16:creationId xmlns:a16="http://schemas.microsoft.com/office/drawing/2014/main" id="{7B3738A7-306B-480C-9918-BD729986C622}"/>
+              </a:ext>
+            </a:extLst>
+          </p:cNvPr>
+          <p:cNvSpPr/>
+          <p:nvPr/>
+        </p:nvSpPr>
+        <p:spPr>
+          <a:xfrm rot="5400000">
+            <a:off x="6430066" y="3023495"/>
+            <a:ext cx="166088" cy="120792"/>
+          </a:xfrm>
+          <a:prstGeom prst="triangle">
+            <a:avLst/>
+          </a:prstGeom>
+          <a:solidFill>
+            <a:schemeClr val="bg1">
+              <a:lumMod val="75000"/>
+            </a:schemeClr>
+          </a:solidFill>
+          <a:ln>
+            <a:noFill/>
+          </a:ln>
+        </p:spPr>
+        <p:style>
+          <a:lnRef idx="2">
+            <a:schemeClr val="accent1">
+              <a:shade val="50000"/>
+            </a:schemeClr>
+          </a:lnRef>
+          <a:fillRef idx="1">
+            <a:schemeClr val="accent1"/>
+          </a:fillRef>
+          <a:effectRef idx="0">
+            <a:schemeClr val="accent1"/>
+          </a:effectRef>
+          <a:fontRef idx="minor">
+            <a:schemeClr val="lt1"/>
+          </a:fontRef>
+        </p:style>
+        <p:txBody>
+          <a:bodyPr rtlCol="0" anchor="ctr"/>
+          <a:lstStyle/>
+          <a:p>
+            <a:pPr algn="ctr"/>
+            <a:endParaRPr lang="ko-KR" altLang="en-US"/>
+          </a:p>
+        </p:txBody>
+      </p:sp>
+      <p:grpSp>
+        <p:nvGrpSpPr>
+          <p:cNvPr id="46" name="그룹 45">
+            <a:extLst>
+              <a:ext uri="{FF2B5EF4-FFF2-40B4-BE49-F238E27FC236}">
+                <a16:creationId xmlns:a16="http://schemas.microsoft.com/office/drawing/2014/main" id="{152F1FD1-BD14-4198-822E-F6AF4FE84033}"/>
+              </a:ext>
+            </a:extLst>
+          </p:cNvPr>
+          <p:cNvGrpSpPr/>
+          <p:nvPr/>
+        </p:nvGrpSpPr>
+        <p:grpSpPr>
+          <a:xfrm>
+            <a:off x="470649" y="5304978"/>
+            <a:ext cx="464698" cy="508954"/>
+            <a:chOff x="640080" y="3026664"/>
+            <a:chExt cx="384048" cy="420623"/>
+          </a:xfrm>
+        </p:grpSpPr>
+        <p:sp>
+          <p:nvSpPr>
+            <p:cNvPr id="47" name="Rounded Rectangle 24">
+              <a:extLst>
+                <a:ext uri="{FF2B5EF4-FFF2-40B4-BE49-F238E27FC236}">
+                  <a16:creationId xmlns:a16="http://schemas.microsoft.com/office/drawing/2014/main" id="{4A006D53-57D9-437E-B3AC-E62968AB47EF}"/>
+                </a:ext>
+              </a:extLst>
+            </p:cNvPr>
+            <p:cNvSpPr/>
+            <p:nvPr/>
+          </p:nvSpPr>
+          <p:spPr>
+            <a:xfrm>
+              <a:off x="640080" y="3044952"/>
+              <a:ext cx="384048" cy="384048"/>
+            </a:xfrm>
+            <a:prstGeom prst="roundRect">
+              <a:avLst>
+                <a:gd name="adj" fmla="val 32000"/>
+              </a:avLst>
+            </a:prstGeom>
+            <a:solidFill>
+              <a:srgbClr val="EAF2FB"/>
+            </a:solidFill>
+            <a:ln>
+              <a:noFill/>
+            </a:ln>
+            <a:effectLst/>
+          </p:spPr>
+          <p:style>
+            <a:lnRef idx="1">
+              <a:schemeClr val="accent1"/>
+            </a:lnRef>
+            <a:fillRef idx="3">
+              <a:schemeClr val="accent1"/>
+            </a:fillRef>
+            <a:effectRef idx="2">
+              <a:schemeClr val="accent1"/>
+            </a:effectRef>
+            <a:fontRef idx="minor">
+              <a:schemeClr val="lt1"/>
+            </a:fontRef>
+          </p:style>
+          <p:txBody>
+            <a:bodyPr rtlCol="0" anchor="ctr"/>
+            <a:lstStyle/>
+            <a:p>
+              <a:pPr algn="ctr"/>
+              <a:endParaRPr/>
+            </a:p>
+          </p:txBody>
+        </p:sp>
+        <p:sp>
+          <p:nvSpPr>
+            <p:cNvPr id="48" name="TextBox 47">
+              <a:extLst>
+                <a:ext uri="{FF2B5EF4-FFF2-40B4-BE49-F238E27FC236}">
+                  <a16:creationId xmlns:a16="http://schemas.microsoft.com/office/drawing/2014/main" id="{5E0FA8FB-EB67-4067-985B-8C7A3282ED47}"/>
+                </a:ext>
+              </a:extLst>
+            </p:cNvPr>
+            <p:cNvSpPr txBox="1"/>
+            <p:nvPr/>
+          </p:nvSpPr>
+          <p:spPr>
+            <a:xfrm>
+              <a:off x="640080" y="3026664"/>
+              <a:ext cx="384048" cy="420623"/>
+            </a:xfrm>
+            <a:prstGeom prst="rect">
+              <a:avLst/>
+            </a:prstGeom>
+            <a:noFill/>
+          </p:spPr>
+          <p:txBody>
+            <a:bodyPr wrap="square" lIns="0" tIns="0" rIns="0" bIns="0" anchor="ctr">
+              <a:noAutofit/>
+            </a:bodyPr>
+            <a:lstStyle/>
+            <a:p>
+              <a:pPr algn="ctr">
+                <a:lnSpc>
+                  <a:spcPct val="100000"/>
+                </a:lnSpc>
+                <a:spcBef>
+                  <a:spcPts val="0"/>
+                </a:spcBef>
+                <a:spcAft>
+                  <a:spcPts val="0"/>
+                </a:spcAft>
+              </a:pPr>
+              <a:r>
+                <a:rPr sz="1260" b="0">
+                  <a:solidFill>
+                    <a:srgbClr val="1A1F2B"/>
+                  </a:solidFill>
+                </a:rPr>
+                <a:t>💬</a:t>
+              </a:r>
+            </a:p>
+          </p:txBody>
+        </p:sp>
+      </p:grpSp>
+      <p:grpSp>
+        <p:nvGrpSpPr>
+          <p:cNvPr id="50" name="그룹 49">
+            <a:extLst>
+              <a:ext uri="{FF2B5EF4-FFF2-40B4-BE49-F238E27FC236}">
+                <a16:creationId xmlns:a16="http://schemas.microsoft.com/office/drawing/2014/main" id="{4A575AC3-D89F-4D14-9D0B-109871421C25}"/>
+              </a:ext>
+            </a:extLst>
+          </p:cNvPr>
+          <p:cNvGrpSpPr/>
+          <p:nvPr/>
+        </p:nvGrpSpPr>
+        <p:grpSpPr>
+          <a:xfrm>
+            <a:off x="3586545" y="5304978"/>
+            <a:ext cx="464698" cy="508954"/>
+            <a:chOff x="3704336" y="3026664"/>
+            <a:chExt cx="384048" cy="420623"/>
+          </a:xfrm>
+        </p:grpSpPr>
+        <p:sp>
+          <p:nvSpPr>
+            <p:cNvPr id="51" name="Rounded Rectangle 30">
+              <a:extLst>
+                <a:ext uri="{FF2B5EF4-FFF2-40B4-BE49-F238E27FC236}">
+                  <a16:creationId xmlns:a16="http://schemas.microsoft.com/office/drawing/2014/main" id="{18017F63-1BE6-4FEC-8CDC-532E579B8046}"/>
+                </a:ext>
+              </a:extLst>
+            </p:cNvPr>
+            <p:cNvSpPr/>
+            <p:nvPr/>
+          </p:nvSpPr>
+          <p:spPr>
+            <a:xfrm>
+              <a:off x="3704336" y="3044952"/>
+              <a:ext cx="384048" cy="384048"/>
+            </a:xfrm>
+            <a:prstGeom prst="roundRect">
+              <a:avLst>
+                <a:gd name="adj" fmla="val 32000"/>
+              </a:avLst>
+            </a:prstGeom>
+            <a:solidFill>
+              <a:srgbClr val="EAF2FB"/>
+            </a:solidFill>
+            <a:ln>
+              <a:noFill/>
+            </a:ln>
+            <a:effectLst/>
+          </p:spPr>
+          <p:style>
+            <a:lnRef idx="1">
+              <a:schemeClr val="accent1"/>
+            </a:lnRef>
+            <a:fillRef idx="3">
+              <a:schemeClr val="accent1"/>
+            </a:fillRef>
+            <a:effectRef idx="2">
+              <a:schemeClr val="accent1"/>
+            </a:effectRef>
+            <a:fontRef idx="minor">
+              <a:schemeClr val="lt1"/>
+            </a:fontRef>
+          </p:style>
+          <p:txBody>
+            <a:bodyPr rtlCol="0" anchor="ctr"/>
+            <a:lstStyle/>
+            <a:p>
+              <a:pPr algn="ctr"/>
+              <a:endParaRPr/>
+            </a:p>
+          </p:txBody>
+        </p:sp>
+        <p:sp>
+          <p:nvSpPr>
+            <p:cNvPr id="52" name="TextBox 51">
+              <a:extLst>
+                <a:ext uri="{FF2B5EF4-FFF2-40B4-BE49-F238E27FC236}">
+                  <a16:creationId xmlns:a16="http://schemas.microsoft.com/office/drawing/2014/main" id="{9C0BC2A9-B3E9-44BA-9385-67D93D6ACEA1}"/>
+                </a:ext>
+              </a:extLst>
+            </p:cNvPr>
+            <p:cNvSpPr txBox="1"/>
+            <p:nvPr/>
+          </p:nvSpPr>
+          <p:spPr>
+            <a:xfrm>
+              <a:off x="3704336" y="3026664"/>
+              <a:ext cx="384048" cy="420623"/>
+            </a:xfrm>
+            <a:prstGeom prst="rect">
+              <a:avLst/>
+            </a:prstGeom>
+            <a:noFill/>
+          </p:spPr>
+          <p:txBody>
+            <a:bodyPr wrap="square" lIns="0" tIns="0" rIns="0" bIns="0" anchor="ctr">
+              <a:noAutofit/>
+            </a:bodyPr>
+            <a:lstStyle/>
+            <a:p>
+              <a:pPr algn="ctr">
+                <a:lnSpc>
+                  <a:spcPct val="100000"/>
+                </a:lnSpc>
+                <a:spcBef>
+                  <a:spcPts val="0"/>
+                </a:spcBef>
+                <a:spcAft>
+                  <a:spcPts val="0"/>
+                </a:spcAft>
+              </a:pPr>
+              <a:r>
+                <a:rPr sz="1260" b="0">
+                  <a:solidFill>
+                    <a:srgbClr val="1A1F2B"/>
+                  </a:solidFill>
+                </a:rPr>
+                <a:t>📊</a:t>
+              </a:r>
+            </a:p>
+          </p:txBody>
+        </p:sp>
+      </p:grpSp>
+      <p:sp>
+        <p:nvSpPr>
+          <p:cNvPr id="57" name="TextBox 56">
+            <a:extLst>
+              <a:ext uri="{FF2B5EF4-FFF2-40B4-BE49-F238E27FC236}">
+                <a16:creationId xmlns:a16="http://schemas.microsoft.com/office/drawing/2014/main" id="{B9926761-4CCD-4333-AD5D-6F9FB4D2DBFD}"/>
+              </a:ext>
+            </a:extLst>
+          </p:cNvPr>
+          <p:cNvSpPr txBox="1"/>
+          <p:nvPr/>
+        </p:nvSpPr>
+        <p:spPr>
+          <a:xfrm>
+            <a:off x="3597628" y="4603966"/>
+            <a:ext cx="2865159" cy="448758"/>
+          </a:xfrm>
+          <a:prstGeom prst="rect">
+            <a:avLst/>
+          </a:prstGeom>
+          <a:noFill/>
+        </p:spPr>
+        <p:txBody>
+          <a:bodyPr wrap="square" lIns="0" tIns="0" rIns="0" bIns="0" anchor="t">
+            <a:noAutofit/>
+          </a:bodyPr>
+          <a:lstStyle/>
+          <a:p>
+            <a:pPr algn="l">
+              <a:spcBef>
+                <a:spcPts val="300"/>
+              </a:spcBef>
+              <a:spcAft>
+                <a:spcPts val="0"/>
+              </a:spcAft>
+            </a:pPr>
+            <a:r>
+              <a:rPr lang="en-US" sz="1200" b="1">
+                <a:solidFill>
+                  <a:srgbClr val="2F6FED"/>
+                </a:solidFill>
+                <a:latin typeface="+mn-ea"/>
+              </a:rPr>
+              <a:t>LangGraph</a:t>
+            </a:r>
+          </a:p>
+          <a:p>
+            <a:pPr algn="l">
+              <a:spcBef>
+                <a:spcPts val="300"/>
+              </a:spcBef>
+              <a:spcAft>
+                <a:spcPts val="0"/>
+              </a:spcAft>
+            </a:pPr>
+            <a:r>
+              <a:rPr lang="en-US" sz="1200" b="1">
+                <a:solidFill>
+                  <a:srgbClr val="2F6FED"/>
+                </a:solidFill>
+                <a:latin typeface="+mn-ea"/>
+              </a:rPr>
+              <a:t>RAGAS </a:t>
+            </a:r>
+            <a:r>
+              <a:rPr lang="en-US" altLang="ko-KR" sz="1200" b="1">
+                <a:solidFill>
+                  <a:srgbClr val="2F6FED"/>
+                </a:solidFill>
+                <a:latin typeface="+mn-ea"/>
+              </a:rPr>
+              <a:t>· LangSmith</a:t>
+            </a:r>
+            <a:endParaRPr sz="1200" b="1">
+              <a:solidFill>
+                <a:srgbClr val="2F6FED"/>
+              </a:solidFill>
+              <a:latin typeface="+mn-ea"/>
+            </a:endParaRPr>
+          </a:p>
+        </p:txBody>
+      </p:sp>
+      <p:sp>
+        <p:nvSpPr>
+          <p:cNvPr id="60" name="TextBox 59">
+            <a:extLst>
+              <a:ext uri="{FF2B5EF4-FFF2-40B4-BE49-F238E27FC236}">
+                <a16:creationId xmlns:a16="http://schemas.microsoft.com/office/drawing/2014/main" id="{E5537596-86A1-4738-9154-A93129F18A30}"/>
+              </a:ext>
+            </a:extLst>
+          </p:cNvPr>
+          <p:cNvSpPr txBox="1"/>
+          <p:nvPr/>
+        </p:nvSpPr>
+        <p:spPr>
+          <a:xfrm>
+            <a:off x="4083525" y="5139893"/>
+            <a:ext cx="2301334" cy="553998"/>
+          </a:xfrm>
+          <a:prstGeom prst="rect">
+            <a:avLst/>
+          </a:prstGeom>
+          <a:noFill/>
+        </p:spPr>
+        <p:txBody>
+          <a:bodyPr wrap="square" rtlCol="0">
+            <a:spAutoFit/>
+          </a:bodyPr>
+          <a:lstStyle/>
+          <a:p>
+            <a:r>
+              <a:rPr lang="ko-KR" altLang="en-US" sz="1500" b="1">
+                <a:latin typeface="+mn-ea"/>
+              </a:rPr>
+              <a:t>재검토 판정</a:t>
+            </a:r>
+            <a:endParaRPr lang="en-US" altLang="ko-KR" sz="1500" b="1">
+              <a:latin typeface="+mn-ea"/>
+            </a:endParaRPr>
+          </a:p>
+          <a:p>
+            <a:pPr marL="93663" indent="-93663">
+              <a:buFont typeface="Wingdings" panose="05000000000000000000" pitchFamily="2" charset="2"/>
+              <a:buChar char="§"/>
+            </a:pPr>
+            <a:r>
+              <a:rPr lang="en-US" altLang="ko-KR" sz="1400" b="1">
+                <a:latin typeface="+mn-ea"/>
+              </a:rPr>
+              <a:t> </a:t>
+            </a:r>
+            <a:r>
+              <a:rPr lang="en-US" altLang="ko-KR" sz="1400">
+                <a:latin typeface="+mn-ea"/>
+              </a:rPr>
+              <a:t>LangGraph</a:t>
+            </a:r>
+            <a:endParaRPr lang="ko-KR" altLang="en-US" sz="1400">
+              <a:latin typeface="+mn-ea"/>
+            </a:endParaRPr>
+          </a:p>
+        </p:txBody>
+      </p:sp>
+      <p:sp>
+        <p:nvSpPr>
+          <p:cNvPr id="61" name="TextBox 60">
+            <a:extLst>
+              <a:ext uri="{FF2B5EF4-FFF2-40B4-BE49-F238E27FC236}">
+                <a16:creationId xmlns:a16="http://schemas.microsoft.com/office/drawing/2014/main" id="{C578BC64-1104-49E9-A8C0-973F2F279CE8}"/>
+              </a:ext>
+            </a:extLst>
+          </p:cNvPr>
+          <p:cNvSpPr txBox="1"/>
+          <p:nvPr/>
+        </p:nvSpPr>
+        <p:spPr>
+          <a:xfrm>
+            <a:off x="4083525" y="5705816"/>
+            <a:ext cx="2225656" cy="754053"/>
+          </a:xfrm>
+          <a:prstGeom prst="rect">
+            <a:avLst/>
+          </a:prstGeom>
+          <a:noFill/>
+        </p:spPr>
+        <p:txBody>
+          <a:bodyPr wrap="square" rtlCol="0">
+            <a:spAutoFit/>
+          </a:bodyPr>
+          <a:lstStyle/>
+          <a:p>
+            <a:r>
+              <a:rPr lang="ko-KR" altLang="en-US" sz="1500" b="1"/>
+              <a:t>자동 채점 </a:t>
+            </a:r>
+            <a:endParaRPr lang="en-US" altLang="ko-KR" sz="1500" b="1"/>
+          </a:p>
+          <a:p>
+            <a:pPr marL="93663" indent="-93663">
+              <a:buFont typeface="Wingdings" panose="05000000000000000000" pitchFamily="2" charset="2"/>
+              <a:buChar char="§"/>
+            </a:pPr>
+            <a:r>
+              <a:rPr lang="en-US" altLang="ko-KR" sz="1400">
+                <a:latin typeface="+mn-ea"/>
+              </a:rPr>
+              <a:t> RAGAS · LangSmith </a:t>
+            </a:r>
+          </a:p>
+          <a:p>
+            <a:r>
+              <a:rPr lang="ko-KR" altLang="en-US" sz="1400">
+                <a:latin typeface="+mn-ea"/>
+              </a:rPr>
+              <a:t>  골든셋 평가</a:t>
+            </a:r>
+            <a:r>
+              <a:rPr lang="en-US" altLang="ko-KR" sz="1400">
+                <a:latin typeface="맑은 고딕" panose="020B0503020000020004" pitchFamily="50" charset="-127"/>
+                <a:ea typeface="맑은 고딕" panose="020B0503020000020004" pitchFamily="50" charset="-127"/>
+              </a:rPr>
+              <a:t> </a:t>
+            </a:r>
+            <a:endParaRPr lang="ko-KR" altLang="en-US" sz="1400"/>
+          </a:p>
+        </p:txBody>
+      </p:sp>
+      <p:sp>
+        <p:nvSpPr>
+          <p:cNvPr id="63" name="TextBox 62">
+            <a:extLst>
+              <a:ext uri="{FF2B5EF4-FFF2-40B4-BE49-F238E27FC236}">
+                <a16:creationId xmlns:a16="http://schemas.microsoft.com/office/drawing/2014/main" id="{4EE7B714-FB56-4BDE-9F1A-6E683CD88542}"/>
+              </a:ext>
+            </a:extLst>
+          </p:cNvPr>
+          <p:cNvSpPr txBox="1"/>
+          <p:nvPr/>
+        </p:nvSpPr>
+        <p:spPr>
+          <a:xfrm>
+            <a:off x="470815" y="4603966"/>
+            <a:ext cx="2865159" cy="448758"/>
+          </a:xfrm>
+          <a:prstGeom prst="rect">
+            <a:avLst/>
+          </a:prstGeom>
+          <a:noFill/>
+        </p:spPr>
+        <p:txBody>
+          <a:bodyPr wrap="square" lIns="0" tIns="0" rIns="0" bIns="0" anchor="t">
+            <a:noAutofit/>
+          </a:bodyPr>
+          <a:lstStyle/>
+          <a:p>
+            <a:pPr algn="l">
+              <a:spcBef>
+                <a:spcPts val="300"/>
+              </a:spcBef>
+              <a:spcAft>
+                <a:spcPts val="0"/>
+              </a:spcAft>
+            </a:pPr>
+            <a:r>
+              <a:rPr lang="en-US" sz="1200" b="1">
+                <a:solidFill>
+                  <a:srgbClr val="2F6FED"/>
+                </a:solidFill>
+                <a:latin typeface="+mn-ea"/>
+              </a:rPr>
+              <a:t>LangChain</a:t>
+            </a:r>
+          </a:p>
+          <a:p>
+            <a:pPr algn="l">
+              <a:spcBef>
+                <a:spcPts val="300"/>
+              </a:spcBef>
+              <a:spcAft>
+                <a:spcPts val="0"/>
+              </a:spcAft>
+            </a:pPr>
+            <a:r>
+              <a:rPr lang="en-US" sz="1200" b="1">
+                <a:solidFill>
+                  <a:srgbClr val="2F6FED"/>
+                </a:solidFill>
+                <a:latin typeface="+mn-ea"/>
+              </a:rPr>
+              <a:t>OpenAI </a:t>
+            </a:r>
+            <a:r>
+              <a:rPr lang="en-US" altLang="ko-KR" sz="1200" b="1">
+                <a:solidFill>
+                  <a:srgbClr val="2F6FED"/>
+                </a:solidFill>
+                <a:latin typeface="+mn-ea"/>
+              </a:rPr>
+              <a:t>· GPT-5.6-Luna</a:t>
+            </a:r>
+            <a:endParaRPr sz="1200" b="1">
+              <a:solidFill>
+                <a:srgbClr val="2F6FED"/>
+              </a:solidFill>
+              <a:latin typeface="+mn-ea"/>
+            </a:endParaRPr>
+          </a:p>
+        </p:txBody>
+      </p:sp>
+      <p:grpSp>
+        <p:nvGrpSpPr>
+          <p:cNvPr id="74" name="그룹 73">
+            <a:extLst>
+              <a:ext uri="{FF2B5EF4-FFF2-40B4-BE49-F238E27FC236}">
+                <a16:creationId xmlns:a16="http://schemas.microsoft.com/office/drawing/2014/main" id="{B8583573-7B0A-4021-BC60-A6290B016B94}"/>
+              </a:ext>
+            </a:extLst>
+          </p:cNvPr>
+          <p:cNvGrpSpPr/>
+          <p:nvPr/>
+        </p:nvGrpSpPr>
+        <p:grpSpPr>
+          <a:xfrm>
+            <a:off x="6749049" y="5304978"/>
+            <a:ext cx="464698" cy="508954"/>
+            <a:chOff x="6768592" y="3026664"/>
+            <a:chExt cx="384048" cy="420623"/>
+          </a:xfrm>
+        </p:grpSpPr>
+        <p:sp>
+          <p:nvSpPr>
+            <p:cNvPr id="75" name="Rounded Rectangle 36">
+              <a:extLst>
+                <a:ext uri="{FF2B5EF4-FFF2-40B4-BE49-F238E27FC236}">
+                  <a16:creationId xmlns:a16="http://schemas.microsoft.com/office/drawing/2014/main" id="{398FB2E0-9EA0-4D69-A220-5DF0D0682540}"/>
+                </a:ext>
+              </a:extLst>
+            </p:cNvPr>
+            <p:cNvSpPr/>
+            <p:nvPr/>
+          </p:nvSpPr>
+          <p:spPr>
+            <a:xfrm>
+              <a:off x="6768592" y="3044952"/>
+              <a:ext cx="384048" cy="384048"/>
+            </a:xfrm>
+            <a:prstGeom prst="roundRect">
+              <a:avLst>
+                <a:gd name="adj" fmla="val 32000"/>
+              </a:avLst>
+            </a:prstGeom>
+            <a:solidFill>
+              <a:srgbClr val="EAF2FB"/>
+            </a:solidFill>
+            <a:ln>
+              <a:noFill/>
+            </a:ln>
+            <a:effectLst/>
+          </p:spPr>
+          <p:style>
+            <a:lnRef idx="1">
+              <a:schemeClr val="accent1"/>
+            </a:lnRef>
+            <a:fillRef idx="3">
+              <a:schemeClr val="accent1"/>
+            </a:fillRef>
+            <a:effectRef idx="2">
+              <a:schemeClr val="accent1"/>
+            </a:effectRef>
+            <a:fontRef idx="minor">
+              <a:schemeClr val="lt1"/>
+            </a:fontRef>
+          </p:style>
+          <p:txBody>
+            <a:bodyPr rtlCol="0" anchor="ctr"/>
+            <a:lstStyle/>
+            <a:p>
+              <a:pPr algn="ctr"/>
+              <a:endParaRPr/>
+            </a:p>
+          </p:txBody>
+        </p:sp>
+        <p:sp>
+          <p:nvSpPr>
+            <p:cNvPr id="76" name="TextBox 75">
+              <a:extLst>
+                <a:ext uri="{FF2B5EF4-FFF2-40B4-BE49-F238E27FC236}">
+                  <a16:creationId xmlns:a16="http://schemas.microsoft.com/office/drawing/2014/main" id="{521CA3AF-B42D-4B1A-9724-7749C0165CD2}"/>
+                </a:ext>
+              </a:extLst>
+            </p:cNvPr>
+            <p:cNvSpPr txBox="1"/>
+            <p:nvPr/>
+          </p:nvSpPr>
+          <p:spPr>
+            <a:xfrm>
+              <a:off x="6768592" y="3026664"/>
+              <a:ext cx="384048" cy="420623"/>
+            </a:xfrm>
+            <a:prstGeom prst="rect">
+              <a:avLst/>
+            </a:prstGeom>
+            <a:noFill/>
+          </p:spPr>
+          <p:txBody>
+            <a:bodyPr wrap="square" lIns="0" tIns="0" rIns="0" bIns="0" anchor="ctr">
+              <a:noAutofit/>
+            </a:bodyPr>
+            <a:lstStyle/>
+            <a:p>
+              <a:pPr algn="ctr">
+                <a:lnSpc>
+                  <a:spcPct val="100000"/>
+                </a:lnSpc>
+                <a:spcBef>
+                  <a:spcPts val="0"/>
+                </a:spcBef>
+                <a:spcAft>
+                  <a:spcPts val="0"/>
+                </a:spcAft>
+              </a:pPr>
+              <a:r>
+                <a:rPr sz="1260" b="0">
+                  <a:solidFill>
+                    <a:srgbClr val="1A1F2B"/>
+                  </a:solidFill>
+                </a:rPr>
+                <a:t>📧</a:t>
+              </a:r>
+            </a:p>
+          </p:txBody>
+        </p:sp>
+      </p:grpSp>
+      <p:sp>
+        <p:nvSpPr>
+          <p:cNvPr id="77" name="TextBox 76">
+            <a:extLst>
+              <a:ext uri="{FF2B5EF4-FFF2-40B4-BE49-F238E27FC236}">
+                <a16:creationId xmlns:a16="http://schemas.microsoft.com/office/drawing/2014/main" id="{70A85C43-F232-45CA-9884-769B7B1D7D46}"/>
+              </a:ext>
+            </a:extLst>
+          </p:cNvPr>
+          <p:cNvSpPr txBox="1"/>
+          <p:nvPr/>
+        </p:nvSpPr>
+        <p:spPr>
+          <a:xfrm>
+            <a:off x="6771204" y="4559125"/>
+            <a:ext cx="2865159" cy="448758"/>
+          </a:xfrm>
+          <a:prstGeom prst="rect">
+            <a:avLst/>
+          </a:prstGeom>
+          <a:noFill/>
+        </p:spPr>
+        <p:txBody>
+          <a:bodyPr wrap="square" lIns="0" tIns="0" rIns="0" bIns="0" anchor="t">
+            <a:noAutofit/>
+          </a:bodyPr>
+          <a:lstStyle/>
+          <a:p>
+            <a:pPr algn="l">
+              <a:lnSpc>
+                <a:spcPct val="105000"/>
+              </a:lnSpc>
+              <a:spcBef>
+                <a:spcPts val="0"/>
+              </a:spcBef>
+              <a:spcAft>
+                <a:spcPts val="0"/>
+              </a:spcAft>
+            </a:pPr>
+            <a:r>
+              <a:rPr lang="en-US" altLang="ko-KR" sz="1200" b="1">
+                <a:solidFill>
+                  <a:srgbClr val="2F6FED"/>
+                </a:solidFill>
+                <a:latin typeface="+mn-ea"/>
+              </a:rPr>
+              <a:t>Nodemailer (Gmail SMTP)</a:t>
+            </a:r>
+          </a:p>
+        </p:txBody>
+      </p:sp>
+      <p:sp>
+        <p:nvSpPr>
+          <p:cNvPr id="85" name="TextBox 84">
+            <a:extLst>
+              <a:ext uri="{FF2B5EF4-FFF2-40B4-BE49-F238E27FC236}">
+                <a16:creationId xmlns:a16="http://schemas.microsoft.com/office/drawing/2014/main" id="{2AD29F69-7889-4007-B0FF-F195C85A5293}"/>
+              </a:ext>
+            </a:extLst>
+          </p:cNvPr>
+          <p:cNvSpPr txBox="1"/>
+          <p:nvPr/>
+        </p:nvSpPr>
+        <p:spPr>
+          <a:xfrm>
+            <a:off x="7214856" y="5227557"/>
+            <a:ext cx="2141482" cy="577081"/>
+          </a:xfrm>
+          <a:prstGeom prst="rect">
+            <a:avLst/>
+          </a:prstGeom>
+          <a:noFill/>
+        </p:spPr>
+        <p:txBody>
+          <a:bodyPr wrap="square" rtlCol="0">
+            <a:spAutoFit/>
+          </a:bodyPr>
+          <a:lstStyle/>
+          <a:p>
+            <a:pPr>
+              <a:spcBef>
+                <a:spcPts val="300"/>
+              </a:spcBef>
+            </a:pPr>
+            <a:r>
+              <a:rPr lang="ko-KR" altLang="en-US" sz="1500" b="1">
+                <a:latin typeface="+mn-ea"/>
+              </a:rPr>
+              <a:t>협업 요청</a:t>
+            </a:r>
+            <a:endParaRPr lang="en-US" altLang="ko-KR" sz="1500" b="1">
+              <a:latin typeface="+mn-ea"/>
+            </a:endParaRPr>
+          </a:p>
+          <a:p>
+            <a:pPr marL="176213" indent="-176213">
+              <a:spcBef>
+                <a:spcPts val="300"/>
+              </a:spcBef>
+              <a:buFont typeface="Wingdings" panose="05000000000000000000" pitchFamily="2" charset="2"/>
+              <a:buChar char="§"/>
+            </a:pPr>
+            <a:r>
+              <a:rPr lang="ko-KR" altLang="en-US" sz="1400" spc="-40">
+                <a:latin typeface="+mn-ea"/>
+              </a:rPr>
+              <a:t>중복</a:t>
+            </a:r>
+            <a:r>
+              <a:rPr lang="en-US" altLang="ko-KR" sz="1400" spc="-40">
+                <a:latin typeface="+mn-ea"/>
+              </a:rPr>
+              <a:t>, </a:t>
+            </a:r>
+            <a:r>
+              <a:rPr lang="ko-KR" altLang="en-US" sz="1400" spc="-40">
+                <a:latin typeface="+mn-ea"/>
+              </a:rPr>
+              <a:t>미등록 발송 방지</a:t>
+            </a:r>
+          </a:p>
+        </p:txBody>
+      </p:sp>
+      <p:sp>
+        <p:nvSpPr>
+          <p:cNvPr id="78" name="이등변 삼각형 77">
+            <a:extLst>
+              <a:ext uri="{FF2B5EF4-FFF2-40B4-BE49-F238E27FC236}">
+                <a16:creationId xmlns:a16="http://schemas.microsoft.com/office/drawing/2014/main" id="{C14491D8-7583-4FE3-A757-1190AE70C948}"/>
+              </a:ext>
+            </a:extLst>
+          </p:cNvPr>
+          <p:cNvSpPr/>
+          <p:nvPr/>
+        </p:nvSpPr>
+        <p:spPr>
+          <a:xfrm rot="5400000">
+            <a:off x="3264302" y="5357987"/>
+            <a:ext cx="166088" cy="120792"/>
+          </a:xfrm>
+          <a:prstGeom prst="triangle">
+            <a:avLst/>
+          </a:prstGeom>
+          <a:solidFill>
+            <a:schemeClr val="bg1">
+              <a:lumMod val="75000"/>
+            </a:schemeClr>
+          </a:solidFill>
+          <a:ln>
+            <a:noFill/>
+          </a:ln>
+        </p:spPr>
+        <p:style>
+          <a:lnRef idx="2">
+            <a:schemeClr val="accent1">
+              <a:shade val="50000"/>
+            </a:schemeClr>
+          </a:lnRef>
+          <a:fillRef idx="1">
+            <a:schemeClr val="accent1"/>
+          </a:fillRef>
+          <a:effectRef idx="0">
+            <a:schemeClr val="accent1"/>
+          </a:effectRef>
+          <a:fontRef idx="minor">
+            <a:schemeClr val="lt1"/>
+          </a:fontRef>
+        </p:style>
+        <p:txBody>
+          <a:bodyPr rtlCol="0" anchor="ctr"/>
+          <a:lstStyle/>
+          <a:p>
+            <a:pPr algn="ctr"/>
+            <a:endParaRPr lang="ko-KR" altLang="en-US"/>
+          </a:p>
+        </p:txBody>
+      </p:sp>
+      <p:sp>
+        <p:nvSpPr>
+          <p:cNvPr id="84" name="이등변 삼각형 83">
+            <a:extLst>
+              <a:ext uri="{FF2B5EF4-FFF2-40B4-BE49-F238E27FC236}">
+                <a16:creationId xmlns:a16="http://schemas.microsoft.com/office/drawing/2014/main" id="{E7E9A3EA-33DA-4DC3-A654-9E7445FEB849}"/>
+              </a:ext>
+            </a:extLst>
+          </p:cNvPr>
+          <p:cNvSpPr/>
+          <p:nvPr/>
+        </p:nvSpPr>
+        <p:spPr>
+          <a:xfrm rot="5400000">
+            <a:off x="6430066" y="5357987"/>
+            <a:ext cx="166088" cy="120792"/>
+          </a:xfrm>
+          <a:prstGeom prst="triangle">
+            <a:avLst/>
+          </a:prstGeom>
+          <a:solidFill>
+            <a:schemeClr val="bg1">
+              <a:lumMod val="75000"/>
+            </a:schemeClr>
+          </a:solidFill>
+          <a:ln>
+            <a:noFill/>
+          </a:ln>
+        </p:spPr>
+        <p:style>
+          <a:lnRef idx="2">
+            <a:schemeClr val="accent1">
+              <a:shade val="50000"/>
+            </a:schemeClr>
+          </a:lnRef>
+          <a:fillRef idx="1">
+            <a:schemeClr val="accent1"/>
+          </a:fillRef>
+          <a:effectRef idx="0">
+            <a:schemeClr val="accent1"/>
+          </a:effectRef>
+          <a:fontRef idx="minor">
+            <a:schemeClr val="lt1"/>
+          </a:fontRef>
+        </p:style>
+        <p:txBody>
+          <a:bodyPr rtlCol="0" anchor="ctr"/>
+          <a:lstStyle/>
+          <a:p>
+            <a:pPr algn="ctr"/>
+            <a:endParaRPr lang="ko-KR" altLang="en-US"/>
+          </a:p>
+        </p:txBody>
+      </p:sp>
+      <p:grpSp>
+        <p:nvGrpSpPr>
+          <p:cNvPr id="95" name="그룹 94">
+            <a:extLst>
+              <a:ext uri="{FF2B5EF4-FFF2-40B4-BE49-F238E27FC236}">
+                <a16:creationId xmlns:a16="http://schemas.microsoft.com/office/drawing/2014/main" id="{577D9965-528F-40EB-ABDF-17CDCADC3E9A}"/>
+              </a:ext>
+            </a:extLst>
+          </p:cNvPr>
+          <p:cNvGrpSpPr/>
+          <p:nvPr/>
+        </p:nvGrpSpPr>
+        <p:grpSpPr>
+          <a:xfrm>
+            <a:off x="232193" y="1917024"/>
+            <a:ext cx="302999" cy="292608"/>
+            <a:chOff x="5104899" y="1637275"/>
+            <a:chExt cx="302999" cy="292608"/>
+          </a:xfrm>
+        </p:grpSpPr>
+        <p:sp>
+          <p:nvSpPr>
+            <p:cNvPr id="96" name="Shape 30">
+              <a:extLst>
+                <a:ext uri="{FF2B5EF4-FFF2-40B4-BE49-F238E27FC236}">
+                  <a16:creationId xmlns:a16="http://schemas.microsoft.com/office/drawing/2014/main" id="{8B2B2B3A-DFBA-4616-8BF4-ED78A2BBE7E5}"/>
+                </a:ext>
+              </a:extLst>
+            </p:cNvPr>
+            <p:cNvSpPr/>
+            <p:nvPr/>
+          </p:nvSpPr>
+          <p:spPr>
+            <a:xfrm>
+              <a:off x="5115290" y="1637275"/>
+              <a:ext cx="292608" cy="292608"/>
+            </a:xfrm>
+            <a:prstGeom prst="ellipse">
+              <a:avLst/>
+            </a:prstGeom>
+            <a:solidFill>
+              <a:srgbClr val="6795DD"/>
+            </a:solidFill>
+            <a:ln/>
+          </p:spPr>
+        </p:sp>
+        <p:sp>
+          <p:nvSpPr>
+            <p:cNvPr id="97" name="Text 31">
+              <a:extLst>
+                <a:ext uri="{FF2B5EF4-FFF2-40B4-BE49-F238E27FC236}">
+                  <a16:creationId xmlns:a16="http://schemas.microsoft.com/office/drawing/2014/main" id="{C9D612DA-B3EE-4A61-814A-B16A2C0A8BEC}"/>
+                </a:ext>
+              </a:extLst>
+            </p:cNvPr>
+            <p:cNvSpPr txBox="1"/>
+            <p:nvPr/>
+          </p:nvSpPr>
+          <p:spPr>
+            <a:xfrm>
+              <a:off x="5104899" y="1637275"/>
+              <a:ext cx="292608" cy="292608"/>
+            </a:xfrm>
+            <a:prstGeom prst="rect">
+              <a:avLst/>
+            </a:prstGeom>
+            <a:noFill/>
+            <a:ln/>
+          </p:spPr>
+          <p:txBody>
+            <a:bodyPr wrap="square" lIns="0" tIns="0" rIns="0" bIns="0" rtlCol="0" anchor="ctr"/>
+            <a:lstStyle/>
+            <a:p>
+              <a:pPr marL="0" indent="0" algn="ctr">
+                <a:buNone/>
+              </a:pPr>
+              <a:r>
+                <a:rPr lang="en-US" sz="1100" b="1">
+                  <a:solidFill>
+                    <a:srgbClr val="FFFFFF"/>
+                  </a:solidFill>
+                  <a:latin typeface="HY견고딕" pitchFamily="34" charset="0"/>
+                  <a:ea typeface="HY견고딕" pitchFamily="34" charset="-122"/>
+                  <a:cs typeface="HY견고딕" pitchFamily="34" charset="-120"/>
+                </a:rPr>
+                <a:t>1</a:t>
+              </a:r>
+              <a:endParaRPr lang="en-US" sz="1100" dirty="0"/>
+            </a:p>
+          </p:txBody>
+        </p:sp>
+      </p:grpSp>
+      <p:grpSp>
+        <p:nvGrpSpPr>
+          <p:cNvPr id="98" name="그룹 97">
+            <a:extLst>
+              <a:ext uri="{FF2B5EF4-FFF2-40B4-BE49-F238E27FC236}">
+                <a16:creationId xmlns:a16="http://schemas.microsoft.com/office/drawing/2014/main" id="{940FF4C2-C6A6-4C4F-87D3-53ABD770BADB}"/>
+              </a:ext>
+            </a:extLst>
+          </p:cNvPr>
+          <p:cNvGrpSpPr/>
+          <p:nvPr/>
+        </p:nvGrpSpPr>
+        <p:grpSpPr>
+          <a:xfrm>
+            <a:off x="3414442" y="1917024"/>
+            <a:ext cx="302999" cy="292608"/>
+            <a:chOff x="5104899" y="1637275"/>
+            <a:chExt cx="302999" cy="292608"/>
+          </a:xfrm>
+        </p:grpSpPr>
+        <p:sp>
+          <p:nvSpPr>
+            <p:cNvPr id="99" name="Shape 30">
+              <a:extLst>
+                <a:ext uri="{FF2B5EF4-FFF2-40B4-BE49-F238E27FC236}">
+                  <a16:creationId xmlns:a16="http://schemas.microsoft.com/office/drawing/2014/main" id="{D0EFD2E6-2D5E-40DB-B18C-1991BAAA0098}"/>
+                </a:ext>
+              </a:extLst>
+            </p:cNvPr>
+            <p:cNvSpPr/>
+            <p:nvPr/>
+          </p:nvSpPr>
+          <p:spPr>
+            <a:xfrm>
+              <a:off x="5115290" y="1637275"/>
+              <a:ext cx="292608" cy="292608"/>
+            </a:xfrm>
+            <a:prstGeom prst="ellipse">
+              <a:avLst/>
+            </a:prstGeom>
+            <a:solidFill>
+              <a:srgbClr val="6795DD"/>
+            </a:solidFill>
+            <a:ln/>
+          </p:spPr>
+        </p:sp>
+        <p:sp>
+          <p:nvSpPr>
+            <p:cNvPr id="100" name="Text 31">
+              <a:extLst>
+                <a:ext uri="{FF2B5EF4-FFF2-40B4-BE49-F238E27FC236}">
+                  <a16:creationId xmlns:a16="http://schemas.microsoft.com/office/drawing/2014/main" id="{92F30C12-D3F3-4A00-BB80-EA44C3A1A912}"/>
+                </a:ext>
+              </a:extLst>
+            </p:cNvPr>
+            <p:cNvSpPr txBox="1"/>
+            <p:nvPr/>
+          </p:nvSpPr>
+          <p:spPr>
+            <a:xfrm>
+              <a:off x="5104899" y="1637275"/>
+              <a:ext cx="292608" cy="292608"/>
+            </a:xfrm>
+            <a:prstGeom prst="rect">
+              <a:avLst/>
+            </a:prstGeom>
+            <a:noFill/>
+            <a:ln/>
+          </p:spPr>
+          <p:txBody>
+            <a:bodyPr wrap="square" lIns="0" tIns="0" rIns="0" bIns="0" rtlCol="0" anchor="ctr"/>
+            <a:lstStyle/>
+            <a:p>
+              <a:pPr marL="0" indent="0" algn="ctr">
+                <a:buNone/>
+              </a:pPr>
+              <a:r>
+                <a:rPr lang="en-US" sz="1100" b="1">
+                  <a:solidFill>
+                    <a:srgbClr val="FFFFFF"/>
+                  </a:solidFill>
+                  <a:latin typeface="HY견고딕" pitchFamily="34" charset="0"/>
+                  <a:ea typeface="HY견고딕" pitchFamily="34" charset="-122"/>
+                  <a:cs typeface="HY견고딕" pitchFamily="34" charset="-120"/>
+                </a:rPr>
+                <a:t>2</a:t>
+              </a:r>
+              <a:endParaRPr lang="en-US" sz="1100" dirty="0"/>
+            </a:p>
+          </p:txBody>
+        </p:sp>
+      </p:grpSp>
+      <p:grpSp>
+        <p:nvGrpSpPr>
+          <p:cNvPr id="101" name="그룹 100">
+            <a:extLst>
+              <a:ext uri="{FF2B5EF4-FFF2-40B4-BE49-F238E27FC236}">
+                <a16:creationId xmlns:a16="http://schemas.microsoft.com/office/drawing/2014/main" id="{7195E955-8E8E-40AA-B105-C5453FBE5538}"/>
+              </a:ext>
+            </a:extLst>
+          </p:cNvPr>
+          <p:cNvGrpSpPr/>
+          <p:nvPr/>
+        </p:nvGrpSpPr>
+        <p:grpSpPr>
+          <a:xfrm>
+            <a:off x="6597549" y="1917024"/>
+            <a:ext cx="302999" cy="292608"/>
+            <a:chOff x="5104899" y="1637275"/>
+            <a:chExt cx="302999" cy="292608"/>
+          </a:xfrm>
+        </p:grpSpPr>
+        <p:sp>
+          <p:nvSpPr>
+            <p:cNvPr id="102" name="Shape 30">
+              <a:extLst>
+                <a:ext uri="{FF2B5EF4-FFF2-40B4-BE49-F238E27FC236}">
+                  <a16:creationId xmlns:a16="http://schemas.microsoft.com/office/drawing/2014/main" id="{23C05CBF-C1E0-4F32-8772-3AB9FB944086}"/>
+                </a:ext>
+              </a:extLst>
+            </p:cNvPr>
+            <p:cNvSpPr/>
+            <p:nvPr/>
+          </p:nvSpPr>
+          <p:spPr>
+            <a:xfrm>
+              <a:off x="5115290" y="1637275"/>
+              <a:ext cx="292608" cy="292608"/>
+            </a:xfrm>
+            <a:prstGeom prst="ellipse">
+              <a:avLst/>
+            </a:prstGeom>
+            <a:solidFill>
+              <a:srgbClr val="6795DD"/>
+            </a:solidFill>
+            <a:ln/>
+          </p:spPr>
+        </p:sp>
+        <p:sp>
+          <p:nvSpPr>
+            <p:cNvPr id="103" name="Text 31">
+              <a:extLst>
+                <a:ext uri="{FF2B5EF4-FFF2-40B4-BE49-F238E27FC236}">
+                  <a16:creationId xmlns:a16="http://schemas.microsoft.com/office/drawing/2014/main" id="{086CC501-8ABF-4CE4-8C2F-57BE49861B9D}"/>
+                </a:ext>
+              </a:extLst>
+            </p:cNvPr>
+            <p:cNvSpPr txBox="1"/>
+            <p:nvPr/>
+          </p:nvSpPr>
+          <p:spPr>
+            <a:xfrm>
+              <a:off x="5104899" y="1637275"/>
+              <a:ext cx="292608" cy="292608"/>
+            </a:xfrm>
+            <a:prstGeom prst="rect">
+              <a:avLst/>
+            </a:prstGeom>
+            <a:noFill/>
+            <a:ln/>
+          </p:spPr>
+          <p:txBody>
+            <a:bodyPr wrap="square" lIns="0" tIns="0" rIns="0" bIns="0" rtlCol="0" anchor="ctr"/>
+            <a:lstStyle/>
+            <a:p>
+              <a:pPr marL="0" indent="0" algn="ctr">
+                <a:buNone/>
+              </a:pPr>
+              <a:r>
+                <a:rPr lang="en-US" sz="1100" b="1">
+                  <a:solidFill>
+                    <a:srgbClr val="FFFFFF"/>
+                  </a:solidFill>
+                  <a:latin typeface="HY견고딕" pitchFamily="34" charset="0"/>
+                  <a:ea typeface="HY견고딕" pitchFamily="34" charset="-122"/>
+                  <a:cs typeface="HY견고딕" pitchFamily="34" charset="-120"/>
+                </a:rPr>
+                <a:t>3</a:t>
+              </a:r>
+              <a:endParaRPr lang="en-US" sz="1100" dirty="0"/>
+            </a:p>
+          </p:txBody>
+        </p:sp>
+      </p:grpSp>
+      <p:grpSp>
+        <p:nvGrpSpPr>
+          <p:cNvPr id="104" name="그룹 103">
+            <a:extLst>
+              <a:ext uri="{FF2B5EF4-FFF2-40B4-BE49-F238E27FC236}">
+                <a16:creationId xmlns:a16="http://schemas.microsoft.com/office/drawing/2014/main" id="{1D21CC5F-4C5B-4AE9-B3F0-0B7270C14D43}"/>
+              </a:ext>
+            </a:extLst>
+          </p:cNvPr>
+          <p:cNvGrpSpPr/>
+          <p:nvPr/>
+        </p:nvGrpSpPr>
+        <p:grpSpPr>
+          <a:xfrm>
+            <a:off x="232193" y="4261910"/>
+            <a:ext cx="302999" cy="292608"/>
+            <a:chOff x="5104899" y="1637275"/>
+            <a:chExt cx="302999" cy="292608"/>
+          </a:xfrm>
+        </p:grpSpPr>
+        <p:sp>
+          <p:nvSpPr>
+            <p:cNvPr id="105" name="Shape 30">
+              <a:extLst>
+                <a:ext uri="{FF2B5EF4-FFF2-40B4-BE49-F238E27FC236}">
+                  <a16:creationId xmlns:a16="http://schemas.microsoft.com/office/drawing/2014/main" id="{1168DE8F-D4BD-49C4-9AE4-9A8435FF49B0}"/>
+                </a:ext>
+              </a:extLst>
+            </p:cNvPr>
+            <p:cNvSpPr/>
+            <p:nvPr/>
+          </p:nvSpPr>
+          <p:spPr>
+            <a:xfrm>
+              <a:off x="5115290" y="1637275"/>
+              <a:ext cx="292608" cy="292608"/>
+            </a:xfrm>
+            <a:prstGeom prst="ellipse">
+              <a:avLst/>
+            </a:prstGeom>
+            <a:solidFill>
+              <a:srgbClr val="6795DD"/>
+            </a:solidFill>
+            <a:ln/>
+          </p:spPr>
+        </p:sp>
+        <p:sp>
+          <p:nvSpPr>
+            <p:cNvPr id="106" name="Text 31">
+              <a:extLst>
+                <a:ext uri="{FF2B5EF4-FFF2-40B4-BE49-F238E27FC236}">
+                  <a16:creationId xmlns:a16="http://schemas.microsoft.com/office/drawing/2014/main" id="{4FAB4E9D-491F-4D8E-BC85-4032D3D8B35F}"/>
+                </a:ext>
+              </a:extLst>
+            </p:cNvPr>
+            <p:cNvSpPr txBox="1"/>
+            <p:nvPr/>
+          </p:nvSpPr>
+          <p:spPr>
+            <a:xfrm>
+              <a:off x="5104899" y="1637275"/>
+              <a:ext cx="292608" cy="292608"/>
+            </a:xfrm>
+            <a:prstGeom prst="rect">
+              <a:avLst/>
+            </a:prstGeom>
+            <a:noFill/>
+            <a:ln/>
+          </p:spPr>
+          <p:txBody>
+            <a:bodyPr wrap="square" lIns="0" tIns="0" rIns="0" bIns="0" rtlCol="0" anchor="ctr"/>
+            <a:lstStyle/>
+            <a:p>
+              <a:pPr marL="0" indent="0" algn="ctr">
+                <a:buNone/>
+              </a:pPr>
+              <a:r>
+                <a:rPr lang="en-US" sz="1100" b="1">
+                  <a:solidFill>
+                    <a:srgbClr val="FFFFFF"/>
+                  </a:solidFill>
+                  <a:latin typeface="HY견고딕" pitchFamily="34" charset="0"/>
+                  <a:ea typeface="HY견고딕" pitchFamily="34" charset="-122"/>
+                  <a:cs typeface="HY견고딕" pitchFamily="34" charset="-120"/>
+                </a:rPr>
+                <a:t>4</a:t>
+              </a:r>
+              <a:endParaRPr lang="en-US" sz="1100" dirty="0"/>
+            </a:p>
+          </p:txBody>
+        </p:sp>
+      </p:grpSp>
+      <p:grpSp>
+        <p:nvGrpSpPr>
+          <p:cNvPr id="107" name="그룹 106">
+            <a:extLst>
+              <a:ext uri="{FF2B5EF4-FFF2-40B4-BE49-F238E27FC236}">
+                <a16:creationId xmlns:a16="http://schemas.microsoft.com/office/drawing/2014/main" id="{9DC409BF-A5B5-4665-A6C4-B9A583D9DC13}"/>
+              </a:ext>
+            </a:extLst>
+          </p:cNvPr>
+          <p:cNvGrpSpPr/>
+          <p:nvPr/>
+        </p:nvGrpSpPr>
+        <p:grpSpPr>
+          <a:xfrm>
+            <a:off x="3414442" y="4261910"/>
+            <a:ext cx="302999" cy="292608"/>
+            <a:chOff x="5104899" y="1637275"/>
+            <a:chExt cx="302999" cy="292608"/>
+          </a:xfrm>
+        </p:grpSpPr>
+        <p:sp>
+          <p:nvSpPr>
+            <p:cNvPr id="108" name="Shape 30">
+              <a:extLst>
+                <a:ext uri="{FF2B5EF4-FFF2-40B4-BE49-F238E27FC236}">
+                  <a16:creationId xmlns:a16="http://schemas.microsoft.com/office/drawing/2014/main" id="{34C04643-2414-4225-9C94-4F705E517459}"/>
+                </a:ext>
+              </a:extLst>
+            </p:cNvPr>
+            <p:cNvSpPr/>
+            <p:nvPr/>
+          </p:nvSpPr>
+          <p:spPr>
+            <a:xfrm>
+              <a:off x="5115290" y="1637275"/>
+              <a:ext cx="292608" cy="292608"/>
+            </a:xfrm>
+            <a:prstGeom prst="ellipse">
+              <a:avLst/>
+            </a:prstGeom>
+            <a:solidFill>
+              <a:srgbClr val="6795DD"/>
+            </a:solidFill>
+            <a:ln/>
+          </p:spPr>
+        </p:sp>
+        <p:sp>
+          <p:nvSpPr>
+            <p:cNvPr id="109" name="Text 31">
+              <a:extLst>
+                <a:ext uri="{FF2B5EF4-FFF2-40B4-BE49-F238E27FC236}">
+                  <a16:creationId xmlns:a16="http://schemas.microsoft.com/office/drawing/2014/main" id="{69FA204D-8D89-4844-8272-C77A0627D99F}"/>
+                </a:ext>
+              </a:extLst>
+            </p:cNvPr>
+            <p:cNvSpPr txBox="1"/>
+            <p:nvPr/>
+          </p:nvSpPr>
+          <p:spPr>
+            <a:xfrm>
+              <a:off x="5104899" y="1637275"/>
+              <a:ext cx="292608" cy="292608"/>
+            </a:xfrm>
+            <a:prstGeom prst="rect">
+              <a:avLst/>
+            </a:prstGeom>
+            <a:noFill/>
+            <a:ln/>
+          </p:spPr>
+          <p:txBody>
+            <a:bodyPr wrap="square" lIns="0" tIns="0" rIns="0" bIns="0" rtlCol="0" anchor="ctr"/>
+            <a:lstStyle/>
+            <a:p>
+              <a:pPr marL="0" indent="0" algn="ctr">
+                <a:buNone/>
+              </a:pPr>
+              <a:r>
+                <a:rPr lang="en-US" sz="1100" b="1">
+                  <a:solidFill>
+                    <a:srgbClr val="FFFFFF"/>
+                  </a:solidFill>
+                  <a:latin typeface="HY견고딕" pitchFamily="34" charset="0"/>
+                  <a:ea typeface="HY견고딕" pitchFamily="34" charset="-122"/>
+                  <a:cs typeface="HY견고딕" pitchFamily="34" charset="-120"/>
+                </a:rPr>
+                <a:t>5</a:t>
+              </a:r>
+              <a:endParaRPr lang="en-US" sz="1100" dirty="0"/>
+            </a:p>
+          </p:txBody>
+        </p:sp>
+      </p:grpSp>
+      <p:grpSp>
+        <p:nvGrpSpPr>
+          <p:cNvPr id="110" name="그룹 109">
+            <a:extLst>
+              <a:ext uri="{FF2B5EF4-FFF2-40B4-BE49-F238E27FC236}">
+                <a16:creationId xmlns:a16="http://schemas.microsoft.com/office/drawing/2014/main" id="{91F0B405-F830-42CA-BC6D-C63A639BF8AA}"/>
+              </a:ext>
+            </a:extLst>
+          </p:cNvPr>
+          <p:cNvGrpSpPr/>
+          <p:nvPr/>
+        </p:nvGrpSpPr>
+        <p:grpSpPr>
+          <a:xfrm>
+            <a:off x="6597549" y="4261910"/>
+            <a:ext cx="302999" cy="292608"/>
+            <a:chOff x="5104899" y="1637275"/>
+            <a:chExt cx="302999" cy="292608"/>
+          </a:xfrm>
+        </p:grpSpPr>
+        <p:sp>
+          <p:nvSpPr>
+            <p:cNvPr id="111" name="Shape 30">
+              <a:extLst>
+                <a:ext uri="{FF2B5EF4-FFF2-40B4-BE49-F238E27FC236}">
+                  <a16:creationId xmlns:a16="http://schemas.microsoft.com/office/drawing/2014/main" id="{91C303F0-3753-4963-A858-AC15B434AF5A}"/>
+                </a:ext>
+              </a:extLst>
+            </p:cNvPr>
+            <p:cNvSpPr/>
+            <p:nvPr/>
+          </p:nvSpPr>
+          <p:spPr>
+            <a:xfrm>
+              <a:off x="5115290" y="1637275"/>
+              <a:ext cx="292608" cy="292608"/>
+            </a:xfrm>
+            <a:prstGeom prst="ellipse">
+              <a:avLst/>
+            </a:prstGeom>
+            <a:solidFill>
+              <a:srgbClr val="6795DD"/>
+            </a:solidFill>
+            <a:ln/>
+          </p:spPr>
+        </p:sp>
+        <p:sp>
+          <p:nvSpPr>
+            <p:cNvPr id="112" name="Text 31">
+              <a:extLst>
+                <a:ext uri="{FF2B5EF4-FFF2-40B4-BE49-F238E27FC236}">
+                  <a16:creationId xmlns:a16="http://schemas.microsoft.com/office/drawing/2014/main" id="{97F17D6A-D313-42C1-925A-4E4A489C4D8D}"/>
+                </a:ext>
+              </a:extLst>
+            </p:cNvPr>
+            <p:cNvSpPr txBox="1"/>
+            <p:nvPr/>
+          </p:nvSpPr>
+          <p:spPr>
+            <a:xfrm>
+              <a:off x="5104899" y="1637275"/>
+              <a:ext cx="292608" cy="292608"/>
+            </a:xfrm>
+            <a:prstGeom prst="rect">
+              <a:avLst/>
+            </a:prstGeom>
+            <a:noFill/>
+            <a:ln/>
+          </p:spPr>
+          <p:txBody>
+            <a:bodyPr wrap="square" lIns="0" tIns="0" rIns="0" bIns="0" rtlCol="0" anchor="ctr"/>
+            <a:lstStyle/>
+            <a:p>
+              <a:pPr marL="0" indent="0" algn="ctr">
+                <a:buNone/>
+              </a:pPr>
+              <a:r>
+                <a:rPr lang="en-US" sz="1100" b="1">
+                  <a:solidFill>
+                    <a:srgbClr val="FFFFFF"/>
+                  </a:solidFill>
+                  <a:latin typeface="HY견고딕" pitchFamily="34" charset="0"/>
+                  <a:ea typeface="HY견고딕" pitchFamily="34" charset="-122"/>
+                  <a:cs typeface="HY견고딕" pitchFamily="34" charset="-120"/>
+                </a:rPr>
+                <a:t>6</a:t>
+              </a:r>
+              <a:endParaRPr lang="en-US" sz="1100" dirty="0"/>
+            </a:p>
+          </p:txBody>
+        </p:sp>
+      </p:grpSp>
+      <p:sp>
+        <p:nvSpPr>
+          <p:cNvPr id="113" name="TextBox 112">
+            <a:extLst>
+              <a:ext uri="{FF2B5EF4-FFF2-40B4-BE49-F238E27FC236}">
+                <a16:creationId xmlns:a16="http://schemas.microsoft.com/office/drawing/2014/main" id="{9CE0A0F1-CA9D-4AB3-A0A8-8D5412E08F92}"/>
+              </a:ext>
+            </a:extLst>
+          </p:cNvPr>
+          <p:cNvSpPr txBox="1"/>
+          <p:nvPr/>
+        </p:nvSpPr>
+        <p:spPr>
+          <a:xfrm>
+            <a:off x="989636" y="5227557"/>
+            <a:ext cx="2424806" cy="577081"/>
+          </a:xfrm>
+          <a:prstGeom prst="rect">
+            <a:avLst/>
+          </a:prstGeom>
+          <a:noFill/>
+        </p:spPr>
+        <p:txBody>
+          <a:bodyPr wrap="square" rtlCol="0">
+            <a:spAutoFit/>
+          </a:bodyPr>
+          <a:lstStyle/>
+          <a:p>
+            <a:pPr>
+              <a:spcBef>
+                <a:spcPts val="300"/>
+              </a:spcBef>
+            </a:pPr>
+            <a:r>
+              <a:rPr lang="ko-KR" altLang="en-US" sz="1500" b="1">
+                <a:latin typeface="+mn-ea"/>
+              </a:rPr>
+              <a:t>응답 생성</a:t>
+            </a:r>
+            <a:endParaRPr lang="en-US" altLang="ko-KR" sz="1500" b="1">
+              <a:latin typeface="+mn-ea"/>
+            </a:endParaRPr>
+          </a:p>
+          <a:p>
+            <a:pPr marL="176213" indent="-176213">
+              <a:spcBef>
+                <a:spcPts val="300"/>
+              </a:spcBef>
+              <a:buFont typeface="Wingdings" panose="05000000000000000000" pitchFamily="2" charset="2"/>
+              <a:buChar char="§"/>
+            </a:pPr>
+            <a:r>
+              <a:rPr lang="ko-KR" altLang="en-US" sz="1400" spc="-40">
+                <a:latin typeface="+mn-ea"/>
+              </a:rPr>
+              <a:t>근거 문서 인용 포함 판단</a:t>
+            </a:r>
+          </a:p>
+        </p:txBody>
+      </p:sp>
+      <p:sp>
+        <p:nvSpPr>
+          <p:cNvPr id="114" name="TextBox 113">
+            <a:extLst>
+              <a:ext uri="{FF2B5EF4-FFF2-40B4-BE49-F238E27FC236}">
+                <a16:creationId xmlns:a16="http://schemas.microsoft.com/office/drawing/2014/main" id="{0377F850-F23F-4F0F-9DB3-19DE32D713A8}"/>
+              </a:ext>
+            </a:extLst>
+          </p:cNvPr>
+          <p:cNvSpPr txBox="1"/>
+          <p:nvPr/>
+        </p:nvSpPr>
+        <p:spPr>
+          <a:xfrm>
+            <a:off x="4041488" y="2880745"/>
+            <a:ext cx="2556061" cy="577081"/>
+          </a:xfrm>
+          <a:prstGeom prst="rect">
+            <a:avLst/>
+          </a:prstGeom>
+          <a:noFill/>
+        </p:spPr>
+        <p:txBody>
+          <a:bodyPr wrap="square" rtlCol="0">
+            <a:spAutoFit/>
+          </a:bodyPr>
+          <a:lstStyle/>
+          <a:p>
+            <a:pPr>
+              <a:spcBef>
+                <a:spcPts val="300"/>
+              </a:spcBef>
+            </a:pPr>
+            <a:r>
+              <a:rPr lang="ko-KR" altLang="en-US" sz="1500" b="1">
+                <a:latin typeface="+mn-ea"/>
+              </a:rPr>
+              <a:t>요청 처리 서버</a:t>
+            </a:r>
+            <a:endParaRPr lang="en-US" altLang="ko-KR" sz="1500" b="1">
+              <a:latin typeface="+mn-ea"/>
+            </a:endParaRPr>
+          </a:p>
+          <a:p>
+            <a:pPr marL="93663" indent="-93663">
+              <a:spcBef>
+                <a:spcPts val="300"/>
+              </a:spcBef>
+              <a:buFont typeface="Wingdings" panose="05000000000000000000" pitchFamily="2" charset="2"/>
+              <a:buChar char="§"/>
+            </a:pPr>
+            <a:r>
+              <a:rPr lang="en-US" altLang="ko-KR" sz="1400">
+                <a:latin typeface="+mn-ea"/>
+              </a:rPr>
+              <a:t> </a:t>
+            </a:r>
+            <a:r>
+              <a:rPr lang="ko-KR" altLang="en-US" sz="1400" spc="-60">
+                <a:latin typeface="+mn-ea"/>
+              </a:rPr>
+              <a:t>화면</a:t>
+            </a:r>
+            <a:r>
+              <a:rPr lang="en-US" altLang="ko-KR" sz="1400" b="1">
+                <a:latin typeface="+mn-ea"/>
+              </a:rPr>
+              <a:t>·</a:t>
+            </a:r>
+            <a:r>
+              <a:rPr lang="ko-KR" altLang="en-US" sz="1400" spc="-60">
+                <a:latin typeface="+mn-ea"/>
+              </a:rPr>
+              <a:t>서버 하나로 통합 구성</a:t>
+            </a:r>
+          </a:p>
+        </p:txBody>
+      </p:sp>
     </p:spTree>
     <p:extLst>
       <p:ext uri="{BB962C8B-B14F-4D97-AF65-F5344CB8AC3E}">
-        <p14:creationId xmlns:p14="http://schemas.microsoft.com/office/powerpoint/2010/main" val="3604479269"/>
+        <p14:creationId xmlns:p14="http://schemas.microsoft.com/office/powerpoint/2010/main" val="192216185"/>
       </p:ext>
     </p:extLst>
   </p:cSld>

--- a/presentation/260916_AI활용_업무지침네비게이터_6차 수정.pptx
+++ b/presentation/260916_AI활용_업무지침네비게이터_6차 수정.pptx
@@ -10,7 +10,7 @@
   <p:sldIdLst>
     <p:sldId id="256" r:id="rId2"/>
     <p:sldId id="263" r:id="rId3"/>
-    <p:sldId id="278" r:id="rId4"/>
+    <p:sldId id="285" r:id="rId4"/>
     <p:sldId id="279" r:id="rId5"/>
     <p:sldId id="287" r:id="rId6"/>
     <p:sldId id="280" r:id="rId7"/>
@@ -767,7 +767,7 @@
           <a:p>
             <a:fld id="{6AC0F0B2-DC44-4D7F-B9BC-23EB46679998}" type="datetimeFigureOut">
               <a:rPr lang="ko-KR" altLang="en-US" smtClean="0"/>
-              <a:t>2026-09-13</a:t>
+              <a:t>2026-09-14</a:t>
             </a:fld>
             <a:endParaRPr lang="ko-KR" altLang="en-US"/>
           </a:p>
@@ -937,7 +937,7 @@
           <a:p>
             <a:fld id="{6AC0F0B2-DC44-4D7F-B9BC-23EB46679998}" type="datetimeFigureOut">
               <a:rPr lang="ko-KR" altLang="en-US" smtClean="0"/>
-              <a:t>2026-09-13</a:t>
+              <a:t>2026-09-14</a:t>
             </a:fld>
             <a:endParaRPr lang="ko-KR" altLang="en-US"/>
           </a:p>
@@ -1117,7 +1117,7 @@
           <a:p>
             <a:fld id="{6AC0F0B2-DC44-4D7F-B9BC-23EB46679998}" type="datetimeFigureOut">
               <a:rPr lang="ko-KR" altLang="en-US" smtClean="0"/>
-              <a:t>2026-09-13</a:t>
+              <a:t>2026-09-14</a:t>
             </a:fld>
             <a:endParaRPr lang="ko-KR" altLang="en-US"/>
           </a:p>
@@ -1287,7 +1287,7 @@
           <a:p>
             <a:fld id="{6AC0F0B2-DC44-4D7F-B9BC-23EB46679998}" type="datetimeFigureOut">
               <a:rPr lang="ko-KR" altLang="en-US" smtClean="0"/>
-              <a:t>2026-09-13</a:t>
+              <a:t>2026-09-14</a:t>
             </a:fld>
             <a:endParaRPr lang="ko-KR" altLang="en-US"/>
           </a:p>
@@ -1531,7 +1531,7 @@
           <a:p>
             <a:fld id="{6AC0F0B2-DC44-4D7F-B9BC-23EB46679998}" type="datetimeFigureOut">
               <a:rPr lang="ko-KR" altLang="en-US" smtClean="0"/>
-              <a:t>2026-09-13</a:t>
+              <a:t>2026-09-14</a:t>
             </a:fld>
             <a:endParaRPr lang="ko-KR" altLang="en-US"/>
           </a:p>
@@ -1763,7 +1763,7 @@
           <a:p>
             <a:fld id="{6AC0F0B2-DC44-4D7F-B9BC-23EB46679998}" type="datetimeFigureOut">
               <a:rPr lang="ko-KR" altLang="en-US" smtClean="0"/>
-              <a:t>2026-09-13</a:t>
+              <a:t>2026-09-14</a:t>
             </a:fld>
             <a:endParaRPr lang="ko-KR" altLang="en-US"/>
           </a:p>
@@ -2130,7 +2130,7 @@
           <a:p>
             <a:fld id="{6AC0F0B2-DC44-4D7F-B9BC-23EB46679998}" type="datetimeFigureOut">
               <a:rPr lang="ko-KR" altLang="en-US" smtClean="0"/>
-              <a:t>2026-09-13</a:t>
+              <a:t>2026-09-14</a:t>
             </a:fld>
             <a:endParaRPr lang="ko-KR" altLang="en-US"/>
           </a:p>
@@ -2248,7 +2248,7 @@
           <a:p>
             <a:fld id="{6AC0F0B2-DC44-4D7F-B9BC-23EB46679998}" type="datetimeFigureOut">
               <a:rPr lang="ko-KR" altLang="en-US" smtClean="0"/>
-              <a:t>2026-09-13</a:t>
+              <a:t>2026-09-14</a:t>
             </a:fld>
             <a:endParaRPr lang="ko-KR" altLang="en-US"/>
           </a:p>
@@ -2343,7 +2343,7 @@
           <a:p>
             <a:fld id="{6AC0F0B2-DC44-4D7F-B9BC-23EB46679998}" type="datetimeFigureOut">
               <a:rPr lang="ko-KR" altLang="en-US" smtClean="0"/>
-              <a:t>2026-09-13</a:t>
+              <a:t>2026-09-14</a:t>
             </a:fld>
             <a:endParaRPr lang="ko-KR" altLang="en-US"/>
           </a:p>
@@ -2620,7 +2620,7 @@
           <a:p>
             <a:fld id="{6AC0F0B2-DC44-4D7F-B9BC-23EB46679998}" type="datetimeFigureOut">
               <a:rPr lang="ko-KR" altLang="en-US" smtClean="0"/>
-              <a:t>2026-09-13</a:t>
+              <a:t>2026-09-14</a:t>
             </a:fld>
             <a:endParaRPr lang="ko-KR" altLang="en-US"/>
           </a:p>
@@ -2877,7 +2877,7 @@
           <a:p>
             <a:fld id="{6AC0F0B2-DC44-4D7F-B9BC-23EB46679998}" type="datetimeFigureOut">
               <a:rPr lang="ko-KR" altLang="en-US" smtClean="0"/>
-              <a:t>2026-09-13</a:t>
+              <a:t>2026-09-14</a:t>
             </a:fld>
             <a:endParaRPr lang="ko-KR" altLang="en-US"/>
           </a:p>
@@ -3090,7 +3090,7 @@
           <a:p>
             <a:fld id="{6AC0F0B2-DC44-4D7F-B9BC-23EB46679998}" type="datetimeFigureOut">
               <a:rPr lang="ko-KR" altLang="en-US" smtClean="0"/>
-              <a:t>2026-09-13</a:t>
+              <a:t>2026-09-14</a:t>
             </a:fld>
             <a:endParaRPr lang="ko-KR" altLang="en-US"/>
           </a:p>
@@ -6754,74 +6754,6 @@
                 <a:ea typeface="맑은 고딕" panose="020B0503020000020004" pitchFamily="50" charset="-127"/>
                 <a:cs typeface="+mn-cs"/>
               </a:rPr>
-              <a:t>RAGAS </a:t>
-            </a:r>
-            <a:r>
-              <a:rPr kumimoji="0" lang="ko-KR" altLang="en-US" sz="2000" b="1" i="0" u="none" strike="noStrike" kern="1200" cap="none" spc="-100" normalizeH="0" baseline="0" noProof="0">
-                <a:ln>
-                  <a:noFill/>
-                </a:ln>
-                <a:solidFill>
-                  <a:prstClr val="black"/>
-                </a:solidFill>
-                <a:effectLst/>
-                <a:uLnTx/>
-                <a:uFillTx/>
-                <a:latin typeface="맑은 고딕" panose="020B0503020000020004" pitchFamily="50" charset="-127"/>
-                <a:ea typeface="맑은 고딕" panose="020B0503020000020004" pitchFamily="50" charset="-127"/>
-                <a:cs typeface="+mn-cs"/>
-              </a:rPr>
-              <a:t>평가까지</a:t>
-            </a:r>
-            <a:r>
-              <a:rPr kumimoji="0" lang="en-US" altLang="ko-KR" sz="2000" b="1" i="0" u="none" strike="noStrike" kern="1200" cap="none" spc="-100" normalizeH="0" baseline="0" noProof="0">
-                <a:ln>
-                  <a:noFill/>
-                </a:ln>
-                <a:solidFill>
-                  <a:prstClr val="black"/>
-                </a:solidFill>
-                <a:effectLst/>
-                <a:uLnTx/>
-                <a:uFillTx/>
-                <a:latin typeface="맑은 고딕" panose="020B0503020000020004" pitchFamily="50" charset="-127"/>
-                <a:ea typeface="맑은 고딕" panose="020B0503020000020004" pitchFamily="50" charset="-127"/>
-                <a:cs typeface="+mn-cs"/>
-              </a:rPr>
-              <a:t>,</a:t>
-            </a:r>
-            <a:r>
-              <a:rPr kumimoji="0" lang="ko-KR" altLang="en-US" sz="2000" b="1" i="0" u="none" strike="noStrike" kern="1200" cap="none" spc="-100" normalizeH="0" baseline="0" noProof="0">
-                <a:ln>
-                  <a:noFill/>
-                </a:ln>
-                <a:solidFill>
-                  <a:prstClr val="black"/>
-                </a:solidFill>
-                <a:effectLst/>
-                <a:uLnTx/>
-                <a:uFillTx/>
-                <a:latin typeface="맑은 고딕" panose="020B0503020000020004" pitchFamily="50" charset="-127"/>
-                <a:ea typeface="맑은 고딕" panose="020B0503020000020004" pitchFamily="50" charset="-127"/>
-                <a:cs typeface="+mn-cs"/>
-              </a:rPr>
-              <a:t> </a:t>
-            </a:r>
-            <a:r>
-              <a:rPr kumimoji="0" lang="en-US" altLang="ko-KR" sz="2000" b="1" i="0" u="none" strike="noStrike" kern="1200" cap="none" spc="-100" normalizeH="0" baseline="0" noProof="0">
-                <a:ln>
-                  <a:noFill/>
-                </a:ln>
-                <a:solidFill>
-                  <a:prstClr val="black"/>
-                </a:solidFill>
-                <a:effectLst/>
-                <a:uLnTx/>
-                <a:uFillTx/>
-                <a:latin typeface="맑은 고딕" panose="020B0503020000020004" pitchFamily="50" charset="-127"/>
-                <a:ea typeface="맑은 고딕" panose="020B0503020000020004" pitchFamily="50" charset="-127"/>
-                <a:cs typeface="+mn-cs"/>
-              </a:rPr>
               <a:t>RAG</a:t>
             </a:r>
             <a:r>
@@ -6832,7 +6764,27 @@
                 <a:latin typeface="맑은 고딕" panose="020B0503020000020004" pitchFamily="50" charset="-127"/>
                 <a:ea typeface="맑은 고딕" panose="020B0503020000020004" pitchFamily="50" charset="-127"/>
               </a:rPr>
-              <a:t> 개발 과정</a:t>
+              <a:t> 검증 체계까지 </a:t>
+            </a:r>
+            <a:r>
+              <a:rPr lang="en-US" altLang="ko-KR" sz="2000" b="1" spc="-100">
+                <a:solidFill>
+                  <a:prstClr val="black"/>
+                </a:solidFill>
+                <a:latin typeface="맑은 고딕" panose="020B0503020000020004" pitchFamily="50" charset="-127"/>
+                <a:ea typeface="맑은 고딕" panose="020B0503020000020004" pitchFamily="50" charset="-127"/>
+              </a:rPr>
+              <a:t>3</a:t>
+            </a:r>
+            <a:r>
+              <a:rPr lang="ko-KR" altLang="en-US" sz="2000" b="1" spc="-100">
+                <a:solidFill>
+                  <a:prstClr val="black"/>
+                </a:solidFill>
+                <a:latin typeface="맑은 고딕" panose="020B0503020000020004" pitchFamily="50" charset="-127"/>
+                <a:ea typeface="맑은 고딕" panose="020B0503020000020004" pitchFamily="50" charset="-127"/>
+              </a:rPr>
+              <a:t>주간 개발 여정</a:t>
             </a:r>
             <a:endParaRPr kumimoji="0" lang="ko-KR" altLang="en-US" sz="2000" b="1" i="0" u="none" strike="noStrike" kern="1200" cap="none" spc="-100" normalizeH="0" baseline="0" noProof="0" dirty="0">
               <a:ln>
@@ -7688,34 +7640,50 @@
               <a:buChar char="§"/>
             </a:pPr>
             <a:r>
-              <a:rPr lang="ko-KR" altLang="en-US" sz="1300"/>
+              <a:rPr lang="ko-KR" altLang="en-US" sz="1300">
+                <a:latin typeface="+mn-ea"/>
+              </a:rPr>
               <a:t> 사규</a:t>
             </a:r>
             <a:r>
-              <a:rPr lang="en-US" altLang="ko-KR" sz="1300"/>
+              <a:rPr lang="en-US" altLang="ko-KR" sz="1300">
+                <a:latin typeface="+mn-ea"/>
+              </a:rPr>
               <a:t>, </a:t>
             </a:r>
             <a:r>
-              <a:rPr lang="ko-KR" altLang="en-US" sz="1300"/>
+              <a:rPr lang="ko-KR" altLang="en-US" sz="1300">
+                <a:latin typeface="+mn-ea"/>
+              </a:rPr>
               <a:t>정책</a:t>
             </a:r>
             <a:r>
-              <a:rPr lang="en-US" altLang="ko-KR" sz="1300"/>
+              <a:rPr lang="en-US" altLang="ko-KR" sz="1300">
+                <a:latin typeface="+mn-ea"/>
+              </a:rPr>
               <a:t> </a:t>
             </a:r>
             <a:r>
-              <a:rPr lang="ko-KR" altLang="en-US" sz="1300"/>
+              <a:rPr lang="ko-KR" altLang="en-US" sz="1300">
+                <a:latin typeface="+mn-ea"/>
+              </a:rPr>
               <a:t>문서 </a:t>
             </a:r>
             <a:r>
-              <a:rPr lang="en-US" altLang="ko-KR" sz="1300"/>
+              <a:rPr lang="en-US" altLang="ko-KR" sz="1300">
+                <a:latin typeface="+mn-ea"/>
+              </a:rPr>
               <a:t>3,450</a:t>
             </a:r>
             <a:r>
-              <a:rPr lang="ko-KR" altLang="en-US" sz="1300"/>
+              <a:rPr lang="ko-KR" altLang="en-US" sz="1300">
+                <a:latin typeface="+mn-ea"/>
+              </a:rPr>
               <a:t>여개 </a:t>
             </a:r>
-            <a:endParaRPr lang="en-US" altLang="ko-KR" sz="1300"/>
+            <a:endParaRPr lang="en-US" altLang="ko-KR" sz="1300">
+              <a:latin typeface="+mn-ea"/>
+            </a:endParaRPr>
           </a:p>
           <a:p>
             <a:pPr marL="90488" indent="-90488">
@@ -7735,22 +7703,32 @@
               <a:buChar char="§"/>
             </a:pPr>
             <a:r>
-              <a:rPr lang="en-US" altLang="ko-KR" sz="1300"/>
+              <a:rPr lang="en-US" altLang="ko-KR" sz="1300">
+                <a:latin typeface="+mn-ea"/>
+              </a:rPr>
               <a:t> </a:t>
             </a:r>
             <a:r>
-              <a:rPr lang="ko-KR" altLang="en-US" sz="1300"/>
+              <a:rPr lang="ko-KR" altLang="en-US" sz="1300">
+                <a:latin typeface="+mn-ea"/>
+              </a:rPr>
               <a:t>조직 </a:t>
             </a:r>
             <a:r>
-              <a:rPr lang="en-US" altLang="ko-KR" sz="1300"/>
+              <a:rPr lang="en-US" altLang="ko-KR" sz="1300">
+                <a:latin typeface="+mn-ea"/>
+              </a:rPr>
               <a:t>126</a:t>
             </a:r>
             <a:r>
-              <a:rPr lang="ko-KR" altLang="en-US" sz="1300"/>
+              <a:rPr lang="ko-KR" altLang="en-US" sz="1300">
+                <a:latin typeface="+mn-ea"/>
+              </a:rPr>
               <a:t>개 </a:t>
             </a:r>
-            <a:endParaRPr lang="en-US" altLang="ko-KR" sz="1300"/>
+            <a:endParaRPr lang="en-US" altLang="ko-KR" sz="1300">
+              <a:latin typeface="+mn-ea"/>
+            </a:endParaRPr>
           </a:p>
           <a:p>
             <a:pPr marL="90488" indent="-90488">
@@ -7770,11 +7748,15 @@
               <a:buChar char="§"/>
             </a:pPr>
             <a:r>
-              <a:rPr lang="ko-KR" altLang="en-US" sz="1300"/>
-              <a:t> 대표부서 선정 </a:t>
-            </a:r>
-            <a:r>
-              <a:rPr lang="en-US" altLang="ko-KR" sz="1300"/>
+              <a:rPr lang="ko-KR" altLang="en-US" sz="1300">
+                <a:latin typeface="+mn-ea"/>
+              </a:rPr>
+              <a:t> 대표부서 선정</a:t>
+            </a:r>
+            <a:r>
+              <a:rPr lang="en-US" altLang="ko-KR" sz="1300">
+                <a:latin typeface="+mn-ea"/>
+              </a:rPr>
               <a:t>(10 </a:t>
             </a:r>
             <a:r>
@@ -7784,22 +7766,32 @@
               <a:t>→</a:t>
             </a:r>
             <a:r>
-              <a:rPr lang="ko-KR" altLang="en-US" sz="1300"/>
+              <a:rPr lang="ko-KR" altLang="en-US" sz="1300">
+                <a:latin typeface="+mn-ea"/>
+              </a:rPr>
               <a:t> </a:t>
             </a:r>
             <a:r>
-              <a:rPr lang="en-US" altLang="ko-KR" sz="1300"/>
+              <a:rPr lang="en-US" altLang="ko-KR" sz="1300">
+                <a:latin typeface="+mn-ea"/>
+              </a:rPr>
               <a:t>35</a:t>
             </a:r>
             <a:r>
-              <a:rPr lang="ko-KR" altLang="en-US" sz="1300"/>
+              <a:rPr lang="ko-KR" altLang="en-US" sz="1300">
+                <a:latin typeface="+mn-ea"/>
+              </a:rPr>
               <a:t>개</a:t>
             </a:r>
             <a:r>
-              <a:rPr lang="en-US" altLang="ko-KR" sz="1300"/>
+              <a:rPr lang="en-US" altLang="ko-KR" sz="1300">
+                <a:latin typeface="+mn-ea"/>
+              </a:rPr>
               <a:t>)</a:t>
             </a:r>
-            <a:endParaRPr lang="ko-KR" altLang="en-US" sz="1300"/>
+            <a:endParaRPr lang="ko-KR" altLang="en-US" sz="1300">
+              <a:latin typeface="+mn-ea"/>
+            </a:endParaRPr>
           </a:p>
         </p:txBody>
       </p:sp>
@@ -8102,7 +8094,25 @@
                 </a:solidFill>
                 <a:latin typeface="+mn-ea"/>
               </a:rPr>
-              <a:t>투자〮회계</a:t>
+              <a:t>투자</a:t>
+            </a:r>
+            <a:r>
+              <a:rPr lang="en-US" altLang="ko-KR" sz="1200" b="1">
+                <a:solidFill>
+                  <a:srgbClr val="0000FF"/>
+                </a:solidFill>
+                <a:latin typeface="+mn-ea"/>
+              </a:rPr>
+              <a:t>·</a:t>
+            </a:r>
+            <a:r>
+              <a:rPr lang="ko-KR" altLang="en-US" sz="1300" spc="-40">
+                <a:solidFill>
+                  <a:srgbClr val="0000FF"/>
+                </a:solidFill>
+                <a:latin typeface="+mn-ea"/>
+              </a:rPr>
+              <a:t>회계</a:t>
             </a:r>
             <a:r>
               <a:rPr lang="en-US" altLang="ko-KR" sz="1300" spc="-40">
@@ -9676,7 +9686,7 @@
                 </a:solidFill>
                 <a:latin typeface="+mn-ea"/>
               </a:rPr>
-              <a:t>검색품질 고도화</a:t>
+              <a:t>검색 품질 고도화</a:t>
             </a:r>
           </a:p>
         </p:txBody>
@@ -9736,7 +9746,7 @@
                 </a:solidFill>
                 <a:latin typeface="+mn-ea"/>
               </a:rPr>
-              <a:t>3~4</a:t>
+              <a:t>3</a:t>
             </a:r>
             <a:r>
               <a:rPr lang="ko-KR" altLang="en-US" sz="1200" b="1" spc="-100">
@@ -10134,7 +10144,7 @@
     </p:spTree>
     <p:extLst>
       <p:ext uri="{BB962C8B-B14F-4D97-AF65-F5344CB8AC3E}">
-        <p14:creationId xmlns:p14="http://schemas.microsoft.com/office/powerpoint/2010/main" val="1258906867"/>
+        <p14:creationId xmlns:p14="http://schemas.microsoft.com/office/powerpoint/2010/main" val="731787589"/>
       </p:ext>
     </p:extLst>
   </p:cSld>
